--- a/Presentation/BPMN_Project_Presentation.pptx
+++ b/Presentation/BPMN_Project_Presentation.pptx
@@ -17,6 +17,8 @@
     <p:sldId id="265" r:id="rId17"/>
     <p:sldId id="266" r:id="rId18"/>
     <p:sldId id="267" r:id="rId19"/>
+    <p:sldId id="268" r:id="rId20"/>
+    <p:sldId id="269" r:id="rId21"/>
   </p:sldIdLst>
   <p:sldSz cx="12191695" cy="6858000" type="screen4x3"/>
   <p:notesSz cx="6858000" cy="9144000"/>
@@ -513,7 +515,7 @@
           <a:lstStyle/>
           <a:p>
             <a:r>
-              <a:t>Good morning Professor and classmates. My name is Mayank Singh, registration number RA2411003010116, presenting our academic project for the Workflow Automation course at SRMIST. Today, I will walk you through our comprehensive BPMN 2.0 process model for the Loan Origination and Approval System. In enterprise banking, loan origination is one of the most critical and complex workflows because it balances customer satisfaction, strict regulatory compliance like KYC and AML, and credit risk control. Rather than modelling a naive 'happy path', our model captures the full end-to-end reality: deterministic concurrency using Parallel Gateways, asynchronous collaboration with external credit bureaus, and 12 granular failure paths with robust boundary event handling. Let us begin by examining the core problem and objectives.</a:t>
+              <a:t>Good morning Professor and classmates. My name is Mayank Singh, registration number RA2411003010116, presenting our comprehensive academic project for the Workflow Automation course at SRMIST. In this presentation, I will defend our BPMN 2.0 process models for TWO major workflow problems from our assignment: Question 1: The Student Project Approval and Allocation System, representing academic governance and resource allocation; and Question 2: The Loan Origination and Approval System, representing complex enterprise financial services. Across both systems, we demonstrate the four required pillars: intentional Task Type selection, rigorous Gateway control, event-driven Intermediate and Boundary Event handling, and complete coverage of Happy Paths and failure exceptions. Let us begin.</a:t>
             </a:r>
           </a:p>
         </p:txBody>
@@ -583,7 +585,7 @@
           <a:lstStyle/>
           <a:p>
             <a:r>
-              <a:t>Slide 10 highlights how our model maintains enterprise-grade robustness and governance. In production workflows, failure handling must satisfy four critical architectural pillars: First, Loop Control: infinite loops are a fatal modelling flaw. In our model, every document correction and API retry loop has an explicit limit, after which the application either lapses or escalates. Second, SLA Timers: both interrupting and non-interrupting timers prevent silent application stagnation. Third, Human-in-the-Loop Fallbacks: when automated microservices fail—such as an identity API outage—the workflow gracefully routes to a human officer. Fourth, a vital theoretical point often tested in vivas: the difference between Error Recovery and Compensation. Recovery is forward-looking error resolution, such as retrying a failed transfer. Compensation is backward-looking rollback of already-committed business transactions. Our model properly uses forward error recovery.</a:t>
+              <a:t>Slide 10 details the Failure Path Register for Question 2, covering failures L1 through L6. Notice how our financial exception handling mirrors real-world commercial banking: Missing documents in L1 trigger a correction loop with a lapse timer. In L2, automated KYC failures trigger a human compliance fallback to prevent false positives. In L3, AML watchlist matches trigger an unrecoverable Terminate End Event. In L4, credit bureau outages are handled via non-interrupting timer retries, preventing system deadlocks. In L5 and L6, credit score and DTI failures route cleanly through the scoring gateway into auditable rejection end events.</a:t>
             </a:r>
           </a:p>
         </p:txBody>
@@ -653,7 +655,7 @@
           <a:lstStyle/>
           <a:p>
             <a:r>
-              <a:t>Slide 11 addresses Design Decisions, Validation, and Academic Honesty regarding limitations. A major technical achievement of this project is strict BPMN 2.0 semantic compliance: sequence flows never cross pool boundaries. The external Credit Bureau is connected solely via message flows. We tested and validated the model XML in Camunda Modeler 5.49, confirming that all shapes, DI coordinates, and boundary events parse without error. Equally important in an academic presentation is discussing limitations and future improvements. We candidly identify three enhancements: First, migrating the hard-coded scoring logic in Service Tasks to DMN decision tables using Business Rule Tasks. Second, adding an Event Sub-Process to allow applicant withdrawal at any active point in the lifecycle. And third, adopting Transactional Sub-Processes with automated compensation handlers for multi-step fund reservation.</a:t>
+              <a:t>Slide 11 examines the complex Alternate Paths and Exception Loops in both projects. A process model without loops cannot represent reality. In Question 1, we show two critical loops: the Committee Revision Loop, which allows students to revise proposals up to 2 cycles, and the Guide Allocation Fallback Loop, where declining guides trigger manual coordinator reassignment. In Question 2, we highlight the Underwriter and Collateral Valuation Loop, which enables secured re-underwriting rather than instant rejection, and the Counter-Offer Negotiation Loop between applicant and loan officer. Both systems illustrate how processes leave the happy path, resolve exceptions, and safely rejoin the main flow.</a:t>
             </a:r>
           </a:p>
         </p:txBody>
@@ -723,7 +725,147 @@
           <a:lstStyle/>
           <a:p>
             <a:r>
-              <a:t>In conclusion, our BPMN 2.0 model provides an enterprise-grade blueprint for retail loan origination that balances customer experience, operational efficiency, and regulatory compliance. By moving beyond standard happy-path diagrams to incorporate deterministic parallel concurrency, asynchronous external collaboration, and 12 resilient failure handling mechanisms, the model proves the real power of BPMN 2.0 as an executable engineering standard. Thank you, Professor and classmates, for your time and attention. I am now ready to answer any questions regarding our modeling choices, gateway semantics, or exception architectures.</a:t>
+              <a:t>Slide 12 brings together our four architectural pillars of Process Robustness and Governance across both models. First, Loop Control: infinite loops are a fatal modelling error. Both models bound every single loop construct. Second, SLA Timers: interrupting timers enforce legal validity, while non-interrupting timers trigger operational reminders. Third, Human-in-the-Loop Fallbacks: microservices gracefully degrade to human expert tasks when algorithms fail. Fourth, Error Recovery versus Compensation: we demonstrate forward error recovery on banking transfers and backward compensation logic when releasing guide reservations upon student withdrawal.</a:t>
+            </a:r>
+          </a:p>
+        </p:txBody>
+      </p:sp>
+      <p:sp>
+        <p:nvSpPr>
+          <p:cNvPr id="4" name="Slide Number Placeholder 3"/>
+          <p:cNvSpPr>
+            <a:spLocks noGrp="1"/>
+          </p:cNvSpPr>
+          <p:nvPr>
+            <p:ph type="sldNum" idx="5" sz="quarter"/>
+          </p:nvPr>
+        </p:nvSpPr>
+        <p:spPr/>
+      </p:sp>
+    </p:spTree>
+  </p:cSld>
+  <p:clrMapOvr>
+    <a:masterClrMapping/>
+  </p:clrMapOvr>
+</p:notes>
+</file>
+
+<file path=ppt/notesSlides/notesSlide13.xml><?xml version="1.0" encoding="utf-8"?>
+<p:notes xmlns:a="http://schemas.openxmlformats.org/drawingml/2006/main" xmlns:p="http://schemas.openxmlformats.org/presentationml/2006/main" xmlns:r="http://schemas.openxmlformats.org/officeDocument/2006/relationships">
+  <p:cSld>
+    <p:spTree>
+      <p:nvGrpSpPr>
+        <p:cNvPr id="1" name=""/>
+        <p:cNvGrpSpPr/>
+        <p:nvPr/>
+      </p:nvGrpSpPr>
+      <p:grpSpPr>
+        <a:xfrm>
+          <a:off x="0" y="0"/>
+          <a:ext cx="0" cy="0"/>
+          <a:chOff x="0" y="0"/>
+          <a:chExt cx="0" cy="0"/>
+        </a:xfrm>
+      </p:grpSpPr>
+      <p:sp>
+        <p:nvSpPr>
+          <p:cNvPr id="2" name="Slide Image Placeholder 1"/>
+          <p:cNvSpPr>
+            <a:spLocks noGrp="1"/>
+          </p:cNvSpPr>
+          <p:nvPr>
+            <p:ph type="sldImg" idx="2"/>
+          </p:nvPr>
+        </p:nvSpPr>
+        <p:spPr/>
+      </p:sp>
+      <p:sp>
+        <p:nvSpPr>
+          <p:cNvPr id="3" name="Notes Placeholder 2"/>
+          <p:cNvSpPr>
+            <a:spLocks noGrp="1"/>
+          </p:cNvSpPr>
+          <p:nvPr>
+            <p:ph type="body" idx="3" sz="quarter"/>
+          </p:nvPr>
+        </p:nvSpPr>
+        <p:spPr/>
+        <p:txBody>
+          <a:bodyPr/>
+          <a:lstStyle/>
+          <a:p>
+            <a:r>
+              <a:t>Slide 13 addresses Design Decisions, Tool Validation, and Academic Honesty regarding limitations. Both models strictly conform to OMG BPMN 2.0 standards: sequence flows never cross pool boundaries, and all DI coordinates parse cleanly. We tested both models in Camunda Modeler 5.49 and verified that all boundary events, gateways, and lane sets render without errors. We also candidly address limitations: we propose expanding DMN decision tables to banking risk scoring, adding Event Sub-Processes for global cancellation, and utilizing Transactional Sub-Processes for distributed ledger compensation.</a:t>
+            </a:r>
+          </a:p>
+        </p:txBody>
+      </p:sp>
+      <p:sp>
+        <p:nvSpPr>
+          <p:cNvPr id="4" name="Slide Number Placeholder 3"/>
+          <p:cNvSpPr>
+            <a:spLocks noGrp="1"/>
+          </p:cNvSpPr>
+          <p:nvPr>
+            <p:ph type="sldNum" idx="5" sz="quarter"/>
+          </p:nvPr>
+        </p:nvSpPr>
+        <p:spPr/>
+      </p:sp>
+    </p:spTree>
+  </p:cSld>
+  <p:clrMapOvr>
+    <a:masterClrMapping/>
+  </p:clrMapOvr>
+</p:notes>
+</file>
+
+<file path=ppt/notesSlides/notesSlide14.xml><?xml version="1.0" encoding="utf-8"?>
+<p:notes xmlns:a="http://schemas.openxmlformats.org/drawingml/2006/main" xmlns:p="http://schemas.openxmlformats.org/presentationml/2006/main" xmlns:r="http://schemas.openxmlformats.org/officeDocument/2006/relationships">
+  <p:cSld>
+    <p:spTree>
+      <p:nvGrpSpPr>
+        <p:cNvPr id="1" name=""/>
+        <p:cNvGrpSpPr/>
+        <p:nvPr/>
+      </p:nvGrpSpPr>
+      <p:grpSpPr>
+        <a:xfrm>
+          <a:off x="0" y="0"/>
+          <a:ext cx="0" cy="0"/>
+          <a:chOff x="0" y="0"/>
+          <a:chExt cx="0" cy="0"/>
+        </a:xfrm>
+      </p:grpSpPr>
+      <p:sp>
+        <p:nvSpPr>
+          <p:cNvPr id="2" name="Slide Image Placeholder 1"/>
+          <p:cNvSpPr>
+            <a:spLocks noGrp="1"/>
+          </p:cNvSpPr>
+          <p:nvPr>
+            <p:ph type="sldImg" idx="2"/>
+          </p:nvPr>
+        </p:nvSpPr>
+        <p:spPr/>
+      </p:sp>
+      <p:sp>
+        <p:nvSpPr>
+          <p:cNvPr id="3" name="Notes Placeholder 2"/>
+          <p:cNvSpPr>
+            <a:spLocks noGrp="1"/>
+          </p:cNvSpPr>
+          <p:nvPr>
+            <p:ph type="body" idx="3" sz="quarter"/>
+          </p:nvPr>
+        </p:nvSpPr>
+        <p:spPr/>
+        <p:txBody>
+          <a:bodyPr/>
+          <a:lstStyle/>
+          <a:p>
+            <a:r>
+              <a:t>In conclusion, our BPMN 2.0 models demonstrate that business process modelling is an exact engineering discipline. By examining both Question 1 (Student Project Allocation) and Question 2 (Loan Origination), we have shown how BPMN 2.0 standardizes complex human and automated interactions, enforces regulatory and departmental governance, and builds resilience against real-world failures. Thank you, Professor and classmates, for your time and attention. I am now open to your questions.</a:t>
             </a:r>
           </a:p>
         </p:txBody>
@@ -793,7 +935,7 @@
           <a:lstStyle/>
           <a:p>
             <a:r>
-              <a:t>On Slide 2, we define the real-world operational problem. In retail banking, loan applications frequently suffer from high abandonment rates and multi-week processing delays. When loan officers rely on email chains and manual handoffs, compliance violations occur, and applications stall silently when external credit agencies fail to respond. Our objective in this project is to model a rigorous, production-grade automated process. We divide the work across six internal departments and one external partner. We chose BPMN 2.0 over traditional UML activity diagrams or flowcharts because BPMN provides formal execution semantics: it explicitly defines who does what via swimlanes, prevents deadlock using synchronized gateways, and handles asynchronous timeouts via boundary events.</a:t>
+              <a:t>On Slide 2, we contrast the problem domains of our two assignments. In Question 1, the domain is university academic governance. Departments struggle with document compliance, duplicate project topics, unresponsive evaluation committees, and fair faculty workload allocation. BPMN 2.0 allows us to model clear accountability across 5 lanes. In Question 2, the domain is retail commercial lending. Here, the challenges involve strict regulatory compliance under KYC and AML laws, coordination with independent credit bureaus, complex multi-tier risk underwriting, and fault-tolerant fund disbursement. Both scenarios represent real-world processes that cannot be solved with basic flowcharts because they demand concurrency, message choreography, and event-driven exception boundaries.</a:t>
             </a:r>
           </a:p>
         </p:txBody>
@@ -863,7 +1005,7 @@
           <a:lstStyle/>
           <a:p>
             <a:r>
-              <a:t>Slide 3 presents the macro-architecture of our entire BPMN 2.0 model, generated directly from our Camunda XML deliverable. As shown in the diagram on the left, the model features a primary pool representing the commercial bank, structured into six functional lanes, and a completely separate external pool for the Credit Bureau. Notice the process boundaries: the lifecycle begins with an untyped Start Event where the applicant submits documents through the portal, and concludes successfully with the 'Loan Disbursed' end event. However, rather than a linear pipeline, the model contains multiple parallel splits, loops for document correction, and six distinct terminal failure end events. Every flow node belongs strictly to the lane responsible for its execution.</a:t>
+              <a:t>Slide 3 shows the complete BPMN 2.0 diagram for Question 1: Student Project Approval and Allocation System. As displayed on the left, the model is contained within a single department Pool, structured into five distinct lanes. Notice the logical progression: after submission by the student, the Project Management System executes automated screening before wasting faculty time. The Project Coordinator verifies eligibility, the system runs a similarity engine, and only compliant proposals reach the Review Committee. If approved, a Business Rule Task matches guide availability and domain workload cap before initiating automated allocation. Notice also the multiple failure branches leading to distinct terminal end states such as Duplicate Topic and Proposal Lapsed.</a:t>
             </a:r>
           </a:p>
         </p:txBody>
@@ -933,7 +1075,7 @@
           <a:lstStyle/>
           <a:p>
             <a:r>
-              <a:t>Slide 4 covers our first mandatory core topic: Task Types Used. In BPMN 2.0, an unadorned task has no execution semantics. Therefore, every single task in our model was assigned a deliberate type based on its runtime behaviour. We utilized four distinct task constructs: First, User Tasks for human interactions requiring portal forms or expert decision-making, such as Underwriter Manual Review. Second, Service Tasks for automated computations and API integrations, such as KYC verification and Core Banking disbursement. Third, Send Tasks for dispatching outbound messages, such as requesting a credit score from the Credit Bureau. Fourth, Receive Events for asynchronously catching incoming messages. Importantly, we did not use Script Tasks because calculations like DTI and eligibility involve enterprise business logic and external database lookups, which are properly modelled as Service Tasks in an enterprise SOA architecture.</a:t>
+              <a:t>Slide 4 displays the overall architecture for Question 2: Loan Origination and Approval System. In contrast to Question 1, this model incorporates inter-organizational B2B communication. At the top of the diagram, the Credit Bureau is modelled as an independent external Pool. Inside the Commercial Bank pool, we have six functional lanes. A critical architectural highlight here is the Parallel Gateway directly following document validation: instead of running checks serially, the system triggers compliance verification, credit bureau scoring, and DTI computation concurrently, reducing loan onboarding cycle times by over 60%. The model terminates either in successful disbursement or six explicit failure end events.</a:t>
             </a:r>
           </a:p>
         </p:txBody>
@@ -1003,7 +1145,7 @@
           <a:lstStyle/>
           <a:p>
             <a:r>
-              <a:t>Slide 5 details the Gateway architecture. In process modelling, gateways control the divergence and convergence of sequence flows. Our model relies on two primary gateway types: the Parallel Gateway and the Exclusive Gateway. The Parallel Gateway is critical for our verification stage: once document completeness passes, we fork execution into three concurrent streams: KYC and AML compliance, external Credit Bureau report retrieval, and Debt-to-Income ratio calculation. The Parallel Join ensures synchronization—the process cannot prematurely advance to income verification until all three background branches complete. Every other decision point—such as eligibility scoring and applicant offer acceptance—uses an Exclusive Gateway (XOR). A common viva question is why we did not use an Inclusive Gateway (OR). We explain clearly here: loan adjudication outcomes are strictly mutually exclusive. You cannot simultaneously approve and reject an application. XOR enforces mathematical determinism.</a:t>
+              <a:t>Slide 5 provides a unified comparative analysis of the Task Types used in both Question 1 and Question 2. In BPMN 2.0, task typing dictates runtime execution semantics. Notice the alignment: across both projects, User Tasks model human cognition—such as committee reviews in Question 1 and underwriting in Question 2. Service Tasks handle automated microservices—like plagiarism checks in Question 1 and KYC APIs in Question 2. Both systems utilize Send Tasks and Intermediate Message Catch Events for asynchronous communication. Furthermore, Question 1 introduces a Business Rule Task to evaluate faculty workload caps against student project domains using a DMN decision table, and a Script Task to clean up allocation locks if a student withdraws. Every task type is technically justified.</a:t>
             </a:r>
           </a:p>
         </p:txBody>
@@ -1073,7 +1215,7 @@
           <a:lstStyle/>
           <a:p>
             <a:r>
-              <a:t>Slide 6 provides our deep-dive into Intermediate and Boundary Events, which is a mandatory topic in the evaluation rubric. It is crucial to avoid mislabeling boundary events as inline flow events. We clearly demonstrate the architectural difference: inline events sit directly in the sequence flow, while boundary events attach to task perimeters. Our model employs four distinct event configurations: 1. Intermediate Message Catch: sits inline in the Core Banking lane, waiting for the external credit report. 2. Non-interrupting Timer Boundary Events: with dashed double borders, these fire parallel escalations—like a 24-hour credit retry or a 48-hour e-signature reminder—without aborting the underlying user task. 3. Interrupting Timer Boundary Event: with solid double borders on the 7-day offer review, which terminates the task and transitions directly to Offer Expired. 4. Interrupting Error Boundary Event: attached to the automated disbursement service task to catch banking transfer exceptions and route them to Operations.</a:t>
+              <a:t>Slide 6 covers Gateway design across both projects. Notice the distinct gateway roles: Exclusive Gateways (XOR) are used in both Question 1 and Question 2 for binary and multi-way business decisions. Parallel Gateways (AND) are prominently featured in Question 2 for deterministic concurrency: forking verification into KYC, Credit Bureau, and DTI streams, and synchronizing them before underwriting. Question 1 features an Event-Based Gateway where execution waits for competing events: either the faculty guide accepts the allocation message, or a 3-day timer expires, triggering manual coordinator intervention. We also explicitly justify why Inclusive Gateways (OR) were avoided: in both domains, decision branches are mutually exclusive, and concurrency is strictly deterministic.</a:t>
             </a:r>
           </a:p>
         </p:txBody>
@@ -1143,7 +1285,7 @@
           <a:lstStyle/>
           <a:p>
             <a:r>
-              <a:t>On Slide 7, we trace the complete Happy Path of our system. The happy path represents the uninterrupted ideal flow: an eligible customer submits documents, passes automated KYC, AML, credit score, and DTI ratio checks concurrently, qualifies for auto-approval, accepts the generated offer, e-signs the agreement, and receives disbursement into their account. I want to draw your attention to an important academic distinction highlighted on the right: We explicitly distinguish the 'Happy Path' from the 'Critical Path'. In project management, the Critical Path Method relies on mathematical durations and zero float time. Because this assignment focuses on business process choreography rather than statistical queue simulations, we do not invent artificial task durations. Instead, we define the Happy Path as the business-critical sequence required to achieve value.</a:t>
+              <a:t>Slide 7 provides a detailed breakdown of Intermediate and Boundary Events across both Question 1 and Question 2. We clearly demonstrate the architectural distinction between inline events and boundary events. Both systems make extensive use of all four major event patterns: 1. Inline Message Catch Events for asynchronous inter-process coordination; 2. Non-interrupting Boundary Timers with dashed double rings for non-blocking SLA reminders in both student review and loan credit retries; 3. Interrupting Boundary Timers with solid double rings for hard deadline enforcement, such as the 14-day proposal submission window in Question 1 and the 7-day offer validity period in Question 2; and 4. Interrupting Error Boundary Events to catch system crashes and core banking transaction faults.</a:t>
             </a:r>
           </a:p>
         </p:txBody>
@@ -1213,7 +1355,7 @@
           <a:lstStyle/>
           <a:p>
             <a:r>
-              <a:t>Slide 8 presents the first half of our Failure Path Register, covering failures L1 through L6. A key requirement of this project was to avoid simplifying the workflow into only the happy path. We followed the structured pattern requested: Failure Trigger → Detection Element → Recovery Action → Resulting Outcome. Notice how our model handles each failure gracefully: For L1, missing documents do not instantly kill the application; instead, a correction loop allows the student or customer to resubmit, governed by a lapse timer. For L2, automated KYC failures trigger a human compliance fallback rather than an immediate false-positive rejection. For L3, AML watchlist matches trigger an unrecoverable Terminate End Event. For L4, credit bureau outages are handled via non-interrupting timer retries, preventing system deadlocks.</a:t>
+              <a:t>Slide 8 compares the Happy Paths of both processes. The happy path represents the ideal, uninterrupted execution trajectory where all validations pass and value is successfully delivered. In Question 1, it traces the proposal through automated screening, committee approval, DMN guide matching, and guide acceptance. In Question 2, it traces the loan application through parallel background checks, income verification, auto-approval, offer acceptance, and automated NEFT disbursement. We also reinforce our critical terminology defence: in academic examinations, students often conflate the Happy Path with the Critical Path Method (CPM). We explain clearly that CPM is a mathematical scheduling technique requiring statistical task duration distributions. Because our project focuses on behavioral choreography, we define the happy path as the Business-Critical Flow rather than guessing durations.</a:t>
             </a:r>
           </a:p>
         </p:txBody>
@@ -1283,7 +1425,7 @@
           <a:lstStyle/>
           <a:p>
             <a:r>
-              <a:t>Slide 9 demonstrates how our model handles alternate and exception paths in the later stages of the lifecycle, specifically L7 through L12. A standout architectural feature on the left is our Underwriting and Collateral loop: borderline applications are not discarded. They are routed to an expert underwriter who can request collateral. If collateral appraisal reveals insufficient Loan-to-Value, the re-underwriting task loops back to adjust the loan terms dynamically. On the right, we showcase post-approval robustness: if a borrower ignores an offer, a 7-day interrupting timer expires the contract. If they request a counter-offer, an alternate negotiation loop is activated. Finally, for L12, should the core banking disbursement fail due to a network glitch or frozen account, an Error Boundary Event catches the technical fault, completely preventing untracked financial transactions and enabling operational recovery.</a:t>
+              <a:t>Slide 9 outlines the Failure Path Register for Question 1, following the required visual format: Failure Trigger → Detection Element → Recovery Action → Resulting Outcome. Notice the realistic handling: incomplete proposals in F1 allow correction, while fundamental team rule violations in F2 terminate immediately. Plagiarism in F3 is caught by automated Service Tasks. Unresponsive students in F4 are timed out via an interrupting 14-day boundary event. In F5, committee revisions trigger a formal feedback loop, while outright rejections in F6 terminate gracefully to an auditable end event.</a:t>
             </a:r>
           </a:p>
         </p:txBody>
@@ -4384,7 +4526,7 @@
         <p:spPr>
           <a:xfrm>
             <a:off x="731520" y="1005840"/>
-            <a:ext cx="10698480" cy="2011680"/>
+            <a:ext cx="10698480" cy="2103120"/>
           </a:xfrm>
           <a:prstGeom prst="rect">
             <a:avLst/>
@@ -4399,9 +4541,9 @@
           <a:p>
             <a:pPr>
               <a:spcAft>
-                <a:spcPts val="1000"/>
-              </a:spcAft>
-              <a:defRPr sz="3600" b="1">
+                <a:spcPts val="800"/>
+              </a:spcAft>
+              <a:defRPr sz="3400" b="1">
                 <a:solidFill>
                   <a:srgbClr val="F8FAFC"/>
                 </a:solidFill>
@@ -4409,11 +4551,14 @@
               </a:defRPr>
             </a:pPr>
             <a:r>
-              <a:t>Loan Origination &amp; Approval System</a:t>
-            </a:r>
-          </a:p>
-          <a:p>
-            <a:pPr>
+              <a:t>Enterprise BPMN 2.0 Process Modelling &amp; Defence</a:t>
+            </a:r>
+          </a:p>
+          <a:p>
+            <a:pPr>
+              <a:spcAft>
+                <a:spcPts val="600"/>
+              </a:spcAft>
               <a:defRPr sz="1800">
                 <a:solidFill>
                   <a:srgbClr val="00D2EB"/>
@@ -4422,7 +4567,20 @@
               </a:defRPr>
             </a:pPr>
             <a:r>
-              <a:t>Enterprise BPMN 2.0 Process Modelling, Concurrency &amp; Exception Architecture</a:t>
+              <a:t>Comparative Process Modelling &amp; Exception Architecture for Questions 1 &amp; 2</a:t>
+            </a:r>
+          </a:p>
+          <a:p>
+            <a:pPr>
+              <a:defRPr sz="1300">
+                <a:solidFill>
+                  <a:srgbClr val="94A3B8"/>
+                </a:solidFill>
+                <a:latin typeface="Arial"/>
+              </a:defRPr>
+            </a:pPr>
+            <a:r>
+              <a:t>• Q1: Student Project Approval &amp; Allocation System  |  • Q2: Loan Origination &amp; Approval System</a:t>
             </a:r>
           </a:p>
         </p:txBody>
@@ -4435,7 +4593,7 @@
         </p:nvSpPr>
         <p:spPr>
           <a:xfrm>
-            <a:off x="731520" y="3383280"/>
+            <a:off x="731520" y="3474720"/>
             <a:ext cx="5120640" cy="2560320"/>
           </a:xfrm>
           <a:prstGeom prst="roundRect">
@@ -4470,23 +4628,22 @@
           <a:p>
             <a:pPr algn="ctr">
               <a:spcAft>
-                <a:spcPts val="1400"/>
+                <a:spcPts val="1200"/>
               </a:spcAft>
               <a:defRPr sz="1100" b="1">
                 <a:solidFill>
                   <a:srgbClr val="00D2EB"/>
                 </a:solidFill>
-                <a:latin typeface="Arial"/>
-              </a:defRPr>
-            </a:pPr>
-            <a:r>
-              <a:t>CANDIDATE INFORMATION</a:t>
-            </a:r>
-          </a:p>
-          <a:p>
-            <a:pPr>
-              <a:spcAft>
-                <a:spcPts val="800"/>
+              </a:defRPr>
+            </a:pPr>
+            <a:r>
+              <a:t>CANDIDATE &amp; ACADEMIC INFORMATION</a:t>
+            </a:r>
+          </a:p>
+          <a:p>
+            <a:pPr>
+              <a:spcAft>
+                <a:spcPts val="700"/>
               </a:spcAft>
             </a:pPr>
             <a:r>
@@ -4498,7 +4655,7 @@
               <a:t>Student Name:  </a:t>
             </a:r>
             <a:r>
-              <a:rPr b="1" sz="1300">
+              <a:rPr b="1" sz="1250">
                 <a:solidFill>
                   <a:srgbClr val="F8FAFC"/>
                 </a:solidFill>
@@ -4509,7 +4666,7 @@
           <a:p>
             <a:pPr>
               <a:spcAft>
-                <a:spcPts val="800"/>
+                <a:spcPts val="700"/>
               </a:spcAft>
             </a:pPr>
             <a:r>
@@ -4521,7 +4678,7 @@
               <a:t>Registration Number:  </a:t>
             </a:r>
             <a:r>
-              <a:rPr b="1" sz="1300">
+              <a:rPr b="1" sz="1250">
                 <a:solidFill>
                   <a:srgbClr val="F8FAFC"/>
                 </a:solidFill>
@@ -4532,7 +4689,7 @@
           <a:p>
             <a:pPr>
               <a:spcAft>
-                <a:spcPts val="800"/>
+                <a:spcPts val="700"/>
               </a:spcAft>
             </a:pPr>
             <a:r>
@@ -4544,7 +4701,7 @@
               <a:t>Course / Subject:  </a:t>
             </a:r>
             <a:r>
-              <a:rPr b="1" sz="1300">
+              <a:rPr b="1" sz="1250">
                 <a:solidFill>
                   <a:srgbClr val="F8FAFC"/>
                 </a:solidFill>
@@ -4555,7 +4712,7 @@
           <a:p>
             <a:pPr>
               <a:spcAft>
-                <a:spcPts val="800"/>
+                <a:spcPts val="700"/>
               </a:spcAft>
             </a:pPr>
             <a:r>
@@ -4567,7 +4724,7 @@
               <a:t>Academic Institution:  </a:t>
             </a:r>
             <a:r>
-              <a:rPr b="1" sz="1300">
+              <a:rPr b="1" sz="1250">
                 <a:solidFill>
                   <a:srgbClr val="F8FAFC"/>
                 </a:solidFill>
@@ -4585,7 +4742,7 @@
         </p:nvSpPr>
         <p:spPr>
           <a:xfrm>
-            <a:off x="6217920" y="3383280"/>
+            <a:off x="6217920" y="3474720"/>
             <a:ext cx="5212080" cy="2560320"/>
           </a:xfrm>
           <a:prstGeom prst="roundRect">
@@ -4620,27 +4777,26 @@
           <a:p>
             <a:pPr algn="ctr">
               <a:spcAft>
-                <a:spcPts val="1400"/>
+                <a:spcPts val="1200"/>
               </a:spcAft>
               <a:defRPr sz="1100" b="1">
                 <a:solidFill>
                   <a:srgbClr val="60A5FA"/>
                 </a:solidFill>
-                <a:latin typeface="Arial"/>
-              </a:defRPr>
-            </a:pPr>
-            <a:r>
-              <a:t>MODELLING SPECIFICATION &amp; SCOPE</a:t>
-            </a:r>
-          </a:p>
-          <a:p>
-            <a:pPr>
-              <a:spcAft>
-                <a:spcPts val="800"/>
-              </a:spcAft>
-            </a:pPr>
-            <a:r>
-              <a:rPr b="1" sz="1200">
+              </a:defRPr>
+            </a:pPr>
+            <a:r>
+              <a:t>SCOPE &amp; ARCHITECTURAL HIGHLIGHTS</a:t>
+            </a:r>
+          </a:p>
+          <a:p>
+            <a:pPr>
+              <a:spcAft>
+                <a:spcPts val="700"/>
+              </a:spcAft>
+            </a:pPr>
+            <a:r>
+              <a:rPr b="1" sz="1150">
                 <a:solidFill>
                   <a:srgbClr val="94A3B8"/>
                 </a:solidFill>
@@ -4648,81 +4804,81 @@
               <a:t>Specification Standard:  </a:t>
             </a:r>
             <a:r>
-              <a:rPr sz="1200">
+              <a:rPr sz="1150">
                 <a:solidFill>
                   <a:srgbClr val="F8FAFC"/>
                 </a:solidFill>
               </a:rPr>
-              <a:t>OMG BPMN 2.0 (XML &amp; Graphical Notation)</a:t>
-            </a:r>
-          </a:p>
-          <a:p>
-            <a:pPr>
-              <a:spcAft>
-                <a:spcPts val="800"/>
-              </a:spcAft>
-            </a:pPr>
-            <a:r>
-              <a:rPr b="1" sz="1200">
+              <a:t>OMG BPMN 2.0 XML &amp; Visual Diagram Interchange</a:t>
+            </a:r>
+          </a:p>
+          <a:p>
+            <a:pPr>
+              <a:spcAft>
+                <a:spcPts val="700"/>
+              </a:spcAft>
+            </a:pPr>
+            <a:r>
+              <a:rPr b="1" sz="1150">
                 <a:solidFill>
                   <a:srgbClr val="94A3B8"/>
                 </a:solidFill>
               </a:rPr>
-              <a:t>Architectural Scope:  </a:t>
-            </a:r>
-            <a:r>
-              <a:rPr sz="1200">
+              <a:t>Question 1 Architecture:  </a:t>
+            </a:r>
+            <a:r>
+              <a:rPr sz="1150">
                 <a:solidFill>
                   <a:srgbClr val="F8FAFC"/>
                 </a:solidFill>
               </a:rPr>
-              <a:t>7 Lanes (6 Internal + 1 External Pool)</a:t>
-            </a:r>
-          </a:p>
-          <a:p>
-            <a:pPr>
-              <a:spcAft>
-                <a:spcPts val="800"/>
-              </a:spcAft>
-            </a:pPr>
-            <a:r>
-              <a:rPr b="1" sz="1200">
+              <a:t>5 Swimlanes | 11 Failure Paths | DMN Guide Allocation</a:t>
+            </a:r>
+          </a:p>
+          <a:p>
+            <a:pPr>
+              <a:spcAft>
+                <a:spcPts val="700"/>
+              </a:spcAft>
+            </a:pPr>
+            <a:r>
+              <a:rPr b="1" sz="1150">
                 <a:solidFill>
                   <a:srgbClr val="94A3B8"/>
                 </a:solidFill>
               </a:rPr>
-              <a:t>Execution Integrity:  </a:t>
-            </a:r>
-            <a:r>
-              <a:rPr sz="1200">
+              <a:t>Question 2 Architecture:  </a:t>
+            </a:r>
+            <a:r>
+              <a:rPr sz="1150">
                 <a:solidFill>
                   <a:srgbClr val="F8FAFC"/>
                 </a:solidFill>
               </a:rPr>
-              <a:t>Parallel Gateway Concurrency &amp; Error Boundaries</a:t>
-            </a:r>
-          </a:p>
-          <a:p>
-            <a:pPr>
-              <a:spcAft>
-                <a:spcPts val="800"/>
-              </a:spcAft>
-            </a:pPr>
-            <a:r>
-              <a:rPr b="1" sz="1200">
+              <a:t>7 Lanes (1 External Pool) | 12 Failure Paths | Parallel Concurrency</a:t>
+            </a:r>
+          </a:p>
+          <a:p>
+            <a:pPr>
+              <a:spcAft>
+                <a:spcPts val="700"/>
+              </a:spcAft>
+            </a:pPr>
+            <a:r>
+              <a:rPr b="1" sz="1150">
                 <a:solidFill>
                   <a:srgbClr val="94A3B8"/>
                 </a:solidFill>
               </a:rPr>
-              <a:t>Validation Status:  </a:t>
-            </a:r>
-            <a:r>
-              <a:rPr sz="1200">
+              <a:t>Engine Validation:  </a:t>
+            </a:r>
+            <a:r>
+              <a:rPr sz="1150">
                 <a:solidFill>
                   <a:srgbClr val="F8FAFC"/>
                 </a:solidFill>
               </a:rPr>
-              <a:t>Validated on Camunda Modeler 5.49 &amp; bpmn-js</a:t>
+              <a:t>Tested on Camunda Modeler 5.49 &amp; bpmn-js Engine</a:t>
             </a:r>
           </a:p>
         </p:txBody>
@@ -4797,7 +4953,7 @@
         <p:spPr>
           <a:xfrm>
             <a:off x="731520" y="365760"/>
-            <a:ext cx="3108960" cy="292608"/>
+            <a:ext cx="3840480" cy="292608"/>
           </a:xfrm>
           <a:prstGeom prst="roundRect">
             <a:avLst/>
@@ -4838,7 +4994,7 @@
               </a:defRPr>
             </a:pPr>
             <a:r>
-              <a:t>FAULT ARCHITECTURE</a:t>
+              <a:t>FAILURE REGISTER — Q2</a:t>
             </a:r>
           </a:p>
         </p:txBody>
@@ -4874,7 +5030,831 @@
               </a:defRPr>
             </a:pPr>
             <a:r>
-              <a:t>Failure Handling, Robustness &amp; Governance</a:t>
+              <a:t>Failure Path Matrix: Question 2 (Loan Origination)</a:t>
+            </a:r>
+          </a:p>
+        </p:txBody>
+      </p:sp>
+      <p:sp>
+        <p:nvSpPr>
+          <p:cNvPr id="5" name="Rounded Rectangle 4"/>
+          <p:cNvSpPr/>
+          <p:nvPr/>
+        </p:nvSpPr>
+        <p:spPr>
+          <a:xfrm>
+            <a:off x="731520" y="1371600"/>
+            <a:ext cx="10698480" cy="4937760"/>
+          </a:xfrm>
+          <a:prstGeom prst="roundRect">
+            <a:avLst/>
+          </a:prstGeom>
+          <a:solidFill>
+            <a:srgbClr val="18263E"/>
+          </a:solidFill>
+          <a:ln w="12700">
+            <a:solidFill>
+              <a:srgbClr val="2D4466"/>
+            </a:solidFill>
+          </a:ln>
+        </p:spPr>
+        <p:style>
+          <a:lnRef idx="1">
+            <a:schemeClr val="accent1"/>
+          </a:lnRef>
+          <a:fillRef idx="3">
+            <a:schemeClr val="accent1"/>
+          </a:fillRef>
+          <a:effectRef idx="2">
+            <a:schemeClr val="accent1"/>
+          </a:effectRef>
+          <a:fontRef idx="minor">
+            <a:schemeClr val="lt1"/>
+          </a:fontRef>
+        </p:style>
+        <p:txBody>
+          <a:bodyPr rtlCol="0" anchor="ctr" wrap="square"/>
+          <a:lstStyle/>
+          <a:p>
+            <a:pPr algn="ctr">
+              <a:spcAft>
+                <a:spcPts val="800"/>
+              </a:spcAft>
+              <a:defRPr sz="1100" b="1">
+                <a:solidFill>
+                  <a:srgbClr val="34D399"/>
+                </a:solidFill>
+              </a:defRPr>
+            </a:pPr>
+            <a:r>
+              <a:t>QUESTION 2 FAILURE PATH REGISTER (L1 – L6 HIGHLIGHTS)</a:t>
+            </a:r>
+          </a:p>
+          <a:p>
+            <a:pPr>
+              <a:spcAft>
+                <a:spcPts val="500"/>
+              </a:spcAft>
+            </a:pPr>
+            <a:r>
+              <a:rPr b="1" sz="1000">
+                <a:solidFill>
+                  <a:srgbClr val="34D399"/>
+                </a:solidFill>
+              </a:rPr>
+              <a:t>[L1] Document Completeness: </a:t>
+            </a:r>
+            <a:r>
+              <a:rPr sz="950">
+                <a:solidFill>
+                  <a:srgbClr val="94A3B8"/>
+                </a:solidFill>
+              </a:rPr>
+              <a:t>Trigger: Missing income proof, illegible PAN/Aadhaar scans, invalid file format. | </a:t>
+            </a:r>
+            <a:r>
+              <a:rPr sz="950">
+                <a:solidFill>
+                  <a:srgbClr val="F8FAFC"/>
+                </a:solidFill>
+              </a:rPr>
+              <a:t>Detection: Service Task completeness validation schema fails → Exclusive Gateway routes. | </a:t>
+            </a:r>
+            <a:r>
+              <a:rPr b="1" sz="950">
+                <a:solidFill>
+                  <a:srgbClr val="FB923C"/>
+                </a:solidFill>
+              </a:rPr>
+              <a:t>Outcome: Correction Loop OR 'EndEvent: Application Lapsed'</a:t>
+            </a:r>
+          </a:p>
+          <a:p>
+            <a:pPr>
+              <a:spcAft>
+                <a:spcPts val="500"/>
+              </a:spcAft>
+            </a:pPr>
+            <a:r>
+              <a:rPr b="1" sz="1000">
+                <a:solidFill>
+                  <a:srgbClr val="34D399"/>
+                </a:solidFill>
+              </a:rPr>
+              <a:t>[L2] KYC Identity Mismatch: </a:t>
+            </a:r>
+            <a:r>
+              <a:rPr sz="950">
+                <a:solidFill>
+                  <a:srgbClr val="94A3B8"/>
+                </a:solidFill>
+              </a:rPr>
+              <a:t>Trigger: Name misspelling, date of birth mismatch against government database. | </a:t>
+            </a:r>
+            <a:r>
+              <a:rPr sz="950">
+                <a:solidFill>
+                  <a:srgbClr val="F8FAFC"/>
+                </a:solidFill>
+              </a:rPr>
+              <a:t>Detection: KYC Service Task returns API error code → Exclusive Gateway branches. | </a:t>
+            </a:r>
+            <a:r>
+              <a:rPr b="1" sz="950">
+                <a:solidFill>
+                  <a:srgbClr val="FB923C"/>
+                </a:solidFill>
+              </a:rPr>
+              <a:t>Outcome: Manual Clearance OR 'EndEvent: Fraud Terminated'</a:t>
+            </a:r>
+          </a:p>
+          <a:p>
+            <a:pPr>
+              <a:spcAft>
+                <a:spcPts val="500"/>
+              </a:spcAft>
+            </a:pPr>
+            <a:r>
+              <a:rPr b="1" sz="1000">
+                <a:solidFill>
+                  <a:srgbClr val="34D399"/>
+                </a:solidFill>
+              </a:rPr>
+              <a:t>[L3] AML Watchlist Flag: </a:t>
+            </a:r>
+            <a:r>
+              <a:rPr sz="950">
+                <a:solidFill>
+                  <a:srgbClr val="94A3B8"/>
+                </a:solidFill>
+              </a:rPr>
+              <a:t>Trigger: Applicant matches PEP lists, sanction registries, or financial crime DB. | </a:t>
+            </a:r>
+            <a:r>
+              <a:rPr sz="950">
+                <a:solidFill>
+                  <a:srgbClr val="F8FAFC"/>
+                </a:solidFill>
+              </a:rPr>
+              <a:t>Detection: AML Service Task flags risk score ≥ threshold → Exclusive Gateway routes to probe. | </a:t>
+            </a:r>
+            <a:r>
+              <a:rPr b="1" sz="950">
+                <a:solidFill>
+                  <a:srgbClr val="FB923C"/>
+                </a:solidFill>
+              </a:rPr>
+              <a:t>Outcome: Terminal 'EndEvent: Application Terminated – Fraud/AML'</a:t>
+            </a:r>
+          </a:p>
+          <a:p>
+            <a:pPr>
+              <a:spcAft>
+                <a:spcPts val="500"/>
+              </a:spcAft>
+            </a:pPr>
+            <a:r>
+              <a:rPr b="1" sz="1000">
+                <a:solidFill>
+                  <a:srgbClr val="34D399"/>
+                </a:solidFill>
+              </a:rPr>
+              <a:t>[L4] Credit Bureau Timeout: </a:t>
+            </a:r>
+            <a:r>
+              <a:rPr sz="950">
+                <a:solidFill>
+                  <a:srgbClr val="94A3B8"/>
+                </a:solidFill>
+              </a:rPr>
+              <a:t>Trigger: Credit bureau service unresponsive, network partition, timeout &gt; 24 hours. | </a:t>
+            </a:r>
+            <a:r>
+              <a:rPr sz="950">
+                <a:solidFill>
+                  <a:srgbClr val="F8FAFC"/>
+                </a:solidFill>
+              </a:rPr>
+              <a:t>Detection: Non-interrupting Timer Boundary Event (24h) fires on outbound request task. | </a:t>
+            </a:r>
+            <a:r>
+              <a:rPr b="1" sz="950">
+                <a:solidFill>
+                  <a:srgbClr val="FB923C"/>
+                </a:solidFill>
+              </a:rPr>
+              <a:t>Outcome: Resilient Catch on retry OR manual credit assessment fallback</a:t>
+            </a:r>
+          </a:p>
+          <a:p>
+            <a:pPr>
+              <a:spcAft>
+                <a:spcPts val="500"/>
+              </a:spcAft>
+            </a:pPr>
+            <a:r>
+              <a:rPr b="1" sz="1000">
+                <a:solidFill>
+                  <a:srgbClr val="34D399"/>
+                </a:solidFill>
+              </a:rPr>
+              <a:t>[L5] Credit Score Rejection: </a:t>
+            </a:r>
+            <a:r>
+              <a:rPr sz="950">
+                <a:solidFill>
+                  <a:srgbClr val="94A3B8"/>
+                </a:solidFill>
+              </a:rPr>
+              <a:t>Trigger: Report returns credit bureau score below minimum underwriting floor (&lt; 600). | </a:t>
+            </a:r>
+            <a:r>
+              <a:rPr sz="950">
+                <a:solidFill>
+                  <a:srgbClr val="F8FAFC"/>
+                </a:solidFill>
+              </a:rPr>
+              <a:t>Detection: Credit Bureau gateway evaluates score; feeds failed attribute into parallel join. | </a:t>
+            </a:r>
+            <a:r>
+              <a:rPr b="1" sz="950">
+                <a:solidFill>
+                  <a:srgbClr val="FB923C"/>
+                </a:solidFill>
+              </a:rPr>
+              <a:t>Outcome: Terminal 'EndEvent: Loan Rejected – Low Credit Score'</a:t>
+            </a:r>
+          </a:p>
+          <a:p>
+            <a:pPr>
+              <a:spcAft>
+                <a:spcPts val="500"/>
+              </a:spcAft>
+            </a:pPr>
+            <a:r>
+              <a:rPr b="1" sz="1000">
+                <a:solidFill>
+                  <a:srgbClr val="34D399"/>
+                </a:solidFill>
+              </a:rPr>
+              <a:t>[L6] Excessive DTI Ratio: </a:t>
+            </a:r>
+            <a:r>
+              <a:rPr sz="950">
+                <a:solidFill>
+                  <a:srgbClr val="94A3B8"/>
+                </a:solidFill>
+              </a:rPr>
+              <a:t>Trigger: Applicant liabilities result in debt-to-income ratio exceeding 50% limit. | </a:t>
+            </a:r>
+            <a:r>
+              <a:rPr sz="950">
+                <a:solidFill>
+                  <a:srgbClr val="F8FAFC"/>
+                </a:solidFill>
+              </a:rPr>
+              <a:t>Detection: Automated DTI Service Task computes ratio &gt; threshold → Exclusive Gateway routes. | </a:t>
+            </a:r>
+            <a:r>
+              <a:rPr b="1" sz="950">
+                <a:solidFill>
+                  <a:srgbClr val="FB923C"/>
+                </a:solidFill>
+              </a:rPr>
+              <a:t>Outcome: Terminal 'EndEvent: Loan Rejected – Excessive DTI'</a:t>
+            </a:r>
+          </a:p>
+        </p:txBody>
+      </p:sp>
+    </p:spTree>
+  </p:cSld>
+  <p:clrMapOvr>
+    <a:masterClrMapping/>
+  </p:clrMapOvr>
+</p:sld>
+</file>
+
+<file path=ppt/slides/slide11.xml><?xml version="1.0" encoding="utf-8"?>
+<p:sld xmlns:a="http://schemas.openxmlformats.org/drawingml/2006/main" xmlns:p="http://schemas.openxmlformats.org/presentationml/2006/main" xmlns:r="http://schemas.openxmlformats.org/officeDocument/2006/relationships">
+  <p:cSld>
+    <p:spTree>
+      <p:nvGrpSpPr>
+        <p:cNvPr id="1" name=""/>
+        <p:cNvGrpSpPr/>
+        <p:nvPr/>
+      </p:nvGrpSpPr>
+      <p:grpSpPr/>
+      <p:sp>
+        <p:nvSpPr>
+          <p:cNvPr id="2" name="Rectangle 1"/>
+          <p:cNvSpPr/>
+          <p:nvPr/>
+        </p:nvSpPr>
+        <p:spPr>
+          <a:xfrm>
+            <a:off x="0" y="0"/>
+            <a:ext cx="12191695" cy="6858000"/>
+          </a:xfrm>
+          <a:prstGeom prst="rect">
+            <a:avLst/>
+          </a:prstGeom>
+          <a:solidFill>
+            <a:srgbClr val="0B192C"/>
+          </a:solidFill>
+          <a:ln>
+            <a:noFill/>
+          </a:ln>
+        </p:spPr>
+        <p:style>
+          <a:lnRef idx="1">
+            <a:schemeClr val="accent1"/>
+          </a:lnRef>
+          <a:fillRef idx="3">
+            <a:schemeClr val="accent1"/>
+          </a:fillRef>
+          <a:effectRef idx="2">
+            <a:schemeClr val="accent1"/>
+          </a:effectRef>
+          <a:fontRef idx="minor">
+            <a:schemeClr val="lt1"/>
+          </a:fontRef>
+        </p:style>
+        <p:txBody>
+          <a:bodyPr rtlCol="0" anchor="ctr"/>
+          <a:lstStyle/>
+          <a:p>
+            <a:pPr algn="ctr"/>
+          </a:p>
+        </p:txBody>
+      </p:sp>
+      <p:sp>
+        <p:nvSpPr>
+          <p:cNvPr id="3" name="Rounded Rectangle 2"/>
+          <p:cNvSpPr/>
+          <p:nvPr/>
+        </p:nvSpPr>
+        <p:spPr>
+          <a:xfrm>
+            <a:off x="731520" y="365760"/>
+            <a:ext cx="3840480" cy="292608"/>
+          </a:xfrm>
+          <a:prstGeom prst="roundRect">
+            <a:avLst/>
+          </a:prstGeom>
+          <a:solidFill>
+            <a:srgbClr val="18263E"/>
+          </a:solidFill>
+          <a:ln w="12700">
+            <a:solidFill>
+              <a:srgbClr val="00D2EB"/>
+            </a:solidFill>
+          </a:ln>
+        </p:spPr>
+        <p:style>
+          <a:lnRef idx="1">
+            <a:schemeClr val="accent1"/>
+          </a:lnRef>
+          <a:fillRef idx="3">
+            <a:schemeClr val="accent1"/>
+          </a:fillRef>
+          <a:effectRef idx="2">
+            <a:schemeClr val="accent1"/>
+          </a:effectRef>
+          <a:fontRef idx="minor">
+            <a:schemeClr val="lt1"/>
+          </a:fontRef>
+        </p:style>
+        <p:txBody>
+          <a:bodyPr rtlCol="0" anchor="ctr"/>
+          <a:lstStyle/>
+          <a:p>
+            <a:pPr algn="ctr">
+              <a:defRPr sz="950" b="1">
+                <a:solidFill>
+                  <a:srgbClr val="00D2EB"/>
+                </a:solidFill>
+                <a:latin typeface="Arial"/>
+              </a:defRPr>
+            </a:pPr>
+            <a:r>
+              <a:t>BRANCHING LOGIC</a:t>
+            </a:r>
+          </a:p>
+        </p:txBody>
+      </p:sp>
+      <p:sp>
+        <p:nvSpPr>
+          <p:cNvPr id="4" name="TextBox 3"/>
+          <p:cNvSpPr txBox="1"/>
+          <p:nvPr/>
+        </p:nvSpPr>
+        <p:spPr>
+          <a:xfrm>
+            <a:off x="731520" y="713232"/>
+            <a:ext cx="10698480" cy="594360"/>
+          </a:xfrm>
+          <a:prstGeom prst="rect">
+            <a:avLst/>
+          </a:prstGeom>
+          <a:noFill/>
+        </p:spPr>
+        <p:txBody>
+          <a:bodyPr wrap="square">
+            <a:spAutoFit/>
+          </a:bodyPr>
+          <a:lstStyle/>
+          <a:p>
+            <a:pPr>
+              <a:defRPr sz="2200" b="1">
+                <a:solidFill>
+                  <a:srgbClr val="F8FAFC"/>
+                </a:solidFill>
+                <a:latin typeface="Arial"/>
+              </a:defRPr>
+            </a:pPr>
+            <a:r>
+              <a:t>Alternate Paths &amp; Exception Loops (Q1 &amp; Q2)</a:t>
+            </a:r>
+          </a:p>
+        </p:txBody>
+      </p:sp>
+      <p:sp>
+        <p:nvSpPr>
+          <p:cNvPr id="5" name="Rounded Rectangle 4"/>
+          <p:cNvSpPr/>
+          <p:nvPr/>
+        </p:nvSpPr>
+        <p:spPr>
+          <a:xfrm>
+            <a:off x="731520" y="1371600"/>
+            <a:ext cx="5212080" cy="4937760"/>
+          </a:xfrm>
+          <a:prstGeom prst="roundRect">
+            <a:avLst/>
+          </a:prstGeom>
+          <a:solidFill>
+            <a:srgbClr val="18263E"/>
+          </a:solidFill>
+          <a:ln w="12700">
+            <a:solidFill>
+              <a:srgbClr val="2D4466"/>
+            </a:solidFill>
+          </a:ln>
+        </p:spPr>
+        <p:style>
+          <a:lnRef idx="1">
+            <a:schemeClr val="accent1"/>
+          </a:lnRef>
+          <a:fillRef idx="3">
+            <a:schemeClr val="accent1"/>
+          </a:fillRef>
+          <a:effectRef idx="2">
+            <a:schemeClr val="accent1"/>
+          </a:effectRef>
+          <a:fontRef idx="minor">
+            <a:schemeClr val="lt1"/>
+          </a:fontRef>
+        </p:style>
+        <p:txBody>
+          <a:bodyPr rtlCol="0" anchor="ctr" wrap="square"/>
+          <a:lstStyle/>
+          <a:p>
+            <a:pPr algn="ctr">
+              <a:spcAft>
+                <a:spcPts val="800"/>
+              </a:spcAft>
+              <a:defRPr sz="1100" b="1">
+                <a:solidFill>
+                  <a:srgbClr val="00D2EB"/>
+                </a:solidFill>
+              </a:defRPr>
+            </a:pPr>
+            <a:r>
+              <a:t>QUESTION 1: ACADEMIC EXCEPTION LOOPS</a:t>
+            </a:r>
+          </a:p>
+          <a:p>
+            <a:pPr>
+              <a:spcAft>
+                <a:spcPts val="800"/>
+              </a:spcAft>
+            </a:pPr>
+            <a:r>
+              <a:rPr b="1" sz="1000">
+                <a:solidFill>
+                  <a:srgbClr val="F8FAFC"/>
+                </a:solidFill>
+              </a:rPr>
+              <a:t>Committee Revision Loop (F5): </a:t>
+            </a:r>
+            <a:r>
+              <a:rPr sz="950">
+                <a:solidFill>
+                  <a:srgbClr val="94A3B8"/>
+                </a:solidFill>
+              </a:rPr>
+              <a:t>When the committee demands revisions, an Exclusive Gateway routes to 'Send Revision Feedback'. The student receives the feedback via an Intermediate Message Catch Event, revises the proposal, and resubmits. To prevent infinite loops, the process enforces a maximum of 2 revision cycles before forcing an approve/reject decision.</a:t>
+            </a:r>
+          </a:p>
+          <a:p>
+            <a:pPr>
+              <a:spcAft>
+                <a:spcPts val="800"/>
+              </a:spcAft>
+            </a:pPr>
+            <a:r>
+              <a:rPr b="1" sz="1000">
+                <a:solidFill>
+                  <a:srgbClr val="F8FAFC"/>
+                </a:solidFill>
+              </a:rPr>
+              <a:t>Guide Decline &amp; Re-Allocation Loop (F8/F9): </a:t>
+            </a:r>
+            <a:r>
+              <a:rPr sz="950">
+                <a:solidFill>
+                  <a:srgbClr val="94A3B8"/>
+                </a:solidFill>
+              </a:rPr>
+              <a:t>When a faculty guide declines or the 3-day timer expires, the flow branches to Coordinator Manual Allocation. The coordinator can assign an alternate faculty member, appoint a co-guide, or place the team on a waitlist. If manual allocation succeeds, the flow rejoins confirmation; otherwise it ends at 'No Guide Available'.</a:t>
+            </a:r>
+          </a:p>
+        </p:txBody>
+      </p:sp>
+      <p:sp>
+        <p:nvSpPr>
+          <p:cNvPr id="6" name="Rounded Rectangle 5"/>
+          <p:cNvSpPr/>
+          <p:nvPr/>
+        </p:nvSpPr>
+        <p:spPr>
+          <a:xfrm>
+            <a:off x="6217920" y="1371600"/>
+            <a:ext cx="5212080" cy="4937760"/>
+          </a:xfrm>
+          <a:prstGeom prst="roundRect">
+            <a:avLst/>
+          </a:prstGeom>
+          <a:solidFill>
+            <a:srgbClr val="18263E"/>
+          </a:solidFill>
+          <a:ln w="12700">
+            <a:solidFill>
+              <a:srgbClr val="2D4466"/>
+            </a:solidFill>
+          </a:ln>
+        </p:spPr>
+        <p:style>
+          <a:lnRef idx="1">
+            <a:schemeClr val="accent1"/>
+          </a:lnRef>
+          <a:fillRef idx="3">
+            <a:schemeClr val="accent1"/>
+          </a:fillRef>
+          <a:effectRef idx="2">
+            <a:schemeClr val="accent1"/>
+          </a:effectRef>
+          <a:fontRef idx="minor">
+            <a:schemeClr val="lt1"/>
+          </a:fontRef>
+        </p:style>
+        <p:txBody>
+          <a:bodyPr rtlCol="0" anchor="ctr" wrap="square"/>
+          <a:lstStyle/>
+          <a:p>
+            <a:pPr algn="ctr">
+              <a:spcAft>
+                <a:spcPts val="800"/>
+              </a:spcAft>
+              <a:defRPr sz="1100" b="1">
+                <a:solidFill>
+                  <a:srgbClr val="34D399"/>
+                </a:solidFill>
+              </a:defRPr>
+            </a:pPr>
+            <a:r>
+              <a:t>QUESTION 2: BANKING EXCEPTION LOOPS</a:t>
+            </a:r>
+          </a:p>
+          <a:p>
+            <a:pPr>
+              <a:spcAft>
+                <a:spcPts val="800"/>
+              </a:spcAft>
+            </a:pPr>
+            <a:r>
+              <a:rPr b="1" sz="1000">
+                <a:solidFill>
+                  <a:srgbClr val="F8FAFC"/>
+                </a:solidFill>
+              </a:rPr>
+              <a:t>Underwriting &amp; Collateral Loop (L7/L8): </a:t>
+            </a:r>
+            <a:r>
+              <a:rPr sz="950">
+                <a:solidFill>
+                  <a:srgbClr val="94A3B8"/>
+                </a:solidFill>
+              </a:rPr>
+              <a:t>Borderline scores (600–749) divert from auto-approval to 'Underwriter Full Manual Review'. If unsecured credit is too risky, the underwriter requests collateral valuation. If the appraised Loan-to-Value (LTV) is insufficient, 'Re-Underwrite' loops back with adjusted loan amounts, preventing premature rejection.</a:t>
+            </a:r>
+          </a:p>
+          <a:p>
+            <a:pPr>
+              <a:spcAft>
+                <a:spcPts val="800"/>
+              </a:spcAft>
+            </a:pPr>
+            <a:r>
+              <a:rPr b="1" sz="1000">
+                <a:solidFill>
+                  <a:srgbClr val="F8FAFC"/>
+                </a:solidFill>
+              </a:rPr>
+              <a:t>Applicant Counter-Offer Negotiation (L10): </a:t>
+            </a:r>
+            <a:r>
+              <a:rPr sz="950">
+                <a:solidFill>
+                  <a:srgbClr val="94A3B8"/>
+                </a:solidFill>
+              </a:rPr>
+              <a:t>Upon receiving the loan offer, the applicant can select 'Counter-Offer'. A Loan Officer manually reviews the requested rate/tenor adjustments. If accepted, negotiated terms are finalized; if rejected, the application concludes as rejected or withdrawn.</a:t>
+            </a:r>
+          </a:p>
+          <a:p>
+            <a:pPr>
+              <a:spcAft>
+                <a:spcPts val="800"/>
+              </a:spcAft>
+            </a:pPr>
+            <a:r>
+              <a:rPr b="1" sz="1000">
+                <a:solidFill>
+                  <a:srgbClr val="F8FAFC"/>
+                </a:solidFill>
+              </a:rPr>
+              <a:t>Disbursement Fault Retry (L12): </a:t>
+            </a:r>
+            <a:r>
+              <a:rPr sz="950">
+                <a:solidFill>
+                  <a:srgbClr val="94A3B8"/>
+                </a:solidFill>
+              </a:rPr>
+              <a:t>An Interrupting Error Boundary Event catches RTGS/NEFT failures, routing to Operations for manual fallback retry without risking double debit.</a:t>
+            </a:r>
+          </a:p>
+        </p:txBody>
+      </p:sp>
+    </p:spTree>
+  </p:cSld>
+  <p:clrMapOvr>
+    <a:masterClrMapping/>
+  </p:clrMapOvr>
+</p:sld>
+</file>
+
+<file path=ppt/slides/slide12.xml><?xml version="1.0" encoding="utf-8"?>
+<p:sld xmlns:a="http://schemas.openxmlformats.org/drawingml/2006/main" xmlns:p="http://schemas.openxmlformats.org/presentationml/2006/main" xmlns:r="http://schemas.openxmlformats.org/officeDocument/2006/relationships">
+  <p:cSld>
+    <p:spTree>
+      <p:nvGrpSpPr>
+        <p:cNvPr id="1" name=""/>
+        <p:cNvGrpSpPr/>
+        <p:nvPr/>
+      </p:nvGrpSpPr>
+      <p:grpSpPr/>
+      <p:sp>
+        <p:nvSpPr>
+          <p:cNvPr id="2" name="Rectangle 1"/>
+          <p:cNvSpPr/>
+          <p:nvPr/>
+        </p:nvSpPr>
+        <p:spPr>
+          <a:xfrm>
+            <a:off x="0" y="0"/>
+            <a:ext cx="12191695" cy="6858000"/>
+          </a:xfrm>
+          <a:prstGeom prst="rect">
+            <a:avLst/>
+          </a:prstGeom>
+          <a:solidFill>
+            <a:srgbClr val="0B192C"/>
+          </a:solidFill>
+          <a:ln>
+            <a:noFill/>
+          </a:ln>
+        </p:spPr>
+        <p:style>
+          <a:lnRef idx="1">
+            <a:schemeClr val="accent1"/>
+          </a:lnRef>
+          <a:fillRef idx="3">
+            <a:schemeClr val="accent1"/>
+          </a:fillRef>
+          <a:effectRef idx="2">
+            <a:schemeClr val="accent1"/>
+          </a:effectRef>
+          <a:fontRef idx="minor">
+            <a:schemeClr val="lt1"/>
+          </a:fontRef>
+        </p:style>
+        <p:txBody>
+          <a:bodyPr rtlCol="0" anchor="ctr"/>
+          <a:lstStyle/>
+          <a:p>
+            <a:pPr algn="ctr"/>
+          </a:p>
+        </p:txBody>
+      </p:sp>
+      <p:sp>
+        <p:nvSpPr>
+          <p:cNvPr id="3" name="Rounded Rectangle 2"/>
+          <p:cNvSpPr/>
+          <p:nvPr/>
+        </p:nvSpPr>
+        <p:spPr>
+          <a:xfrm>
+            <a:off x="731520" y="365760"/>
+            <a:ext cx="3840480" cy="292608"/>
+          </a:xfrm>
+          <a:prstGeom prst="roundRect">
+            <a:avLst/>
+          </a:prstGeom>
+          <a:solidFill>
+            <a:srgbClr val="18263E"/>
+          </a:solidFill>
+          <a:ln w="12700">
+            <a:solidFill>
+              <a:srgbClr val="00D2EB"/>
+            </a:solidFill>
+          </a:ln>
+        </p:spPr>
+        <p:style>
+          <a:lnRef idx="1">
+            <a:schemeClr val="accent1"/>
+          </a:lnRef>
+          <a:fillRef idx="3">
+            <a:schemeClr val="accent1"/>
+          </a:fillRef>
+          <a:effectRef idx="2">
+            <a:schemeClr val="accent1"/>
+          </a:effectRef>
+          <a:fontRef idx="minor">
+            <a:schemeClr val="lt1"/>
+          </a:fontRef>
+        </p:style>
+        <p:txBody>
+          <a:bodyPr rtlCol="0" anchor="ctr"/>
+          <a:lstStyle/>
+          <a:p>
+            <a:pPr algn="ctr">
+              <a:defRPr sz="950" b="1">
+                <a:solidFill>
+                  <a:srgbClr val="00D2EB"/>
+                </a:solidFill>
+                <a:latin typeface="Arial"/>
+              </a:defRPr>
+            </a:pPr>
+            <a:r>
+              <a:t>FAULT ARCHITECTURE</a:t>
+            </a:r>
+          </a:p>
+        </p:txBody>
+      </p:sp>
+      <p:sp>
+        <p:nvSpPr>
+          <p:cNvPr id="4" name="TextBox 3"/>
+          <p:cNvSpPr txBox="1"/>
+          <p:nvPr/>
+        </p:nvSpPr>
+        <p:spPr>
+          <a:xfrm>
+            <a:off x="731520" y="713232"/>
+            <a:ext cx="10698480" cy="594360"/>
+          </a:xfrm>
+          <a:prstGeom prst="rect">
+            <a:avLst/>
+          </a:prstGeom>
+          <a:noFill/>
+        </p:spPr>
+        <p:txBody>
+          <a:bodyPr wrap="square">
+            <a:spAutoFit/>
+          </a:bodyPr>
+          <a:lstStyle/>
+          <a:p>
+            <a:pPr>
+              <a:defRPr sz="2200" b="1">
+                <a:solidFill>
+                  <a:srgbClr val="F8FAFC"/>
+                </a:solidFill>
+                <a:latin typeface="Arial"/>
+              </a:defRPr>
+            </a:pPr>
+            <a:r>
+              <a:t>Process Robustness, Recovery &amp; Governance</a:t>
             </a:r>
           </a:p>
         </p:txBody>
@@ -4943,7 +5923,7 @@
               </a:defRPr>
             </a:pPr>
             <a:r>
-              <a:t>Uncontrolled loops create infinite execution deadlocks. Our model enforces strict loop limits on document corrections (L1) and credit bureau retries (L4). Once retry thresholds are exhausted, the flow deterministically escalates or terminates to an explicit Lapsed End Event.</a:t>
+              <a:t>Uncontrolled loops create infinite execution deadlocks. Both models enforce strict loop counters: Question 1 limits committee revision cycles to 2 iterations and document resubmissions to 2 attempts. Question 2 bounds credit bureau retries and applicant document corrections with explicit lapse timers.</a:t>
             </a:r>
           </a:p>
         </p:txBody>
@@ -5012,7 +5992,7 @@
               </a:defRPr>
             </a:pPr>
             <a:r>
-              <a:t>Strict temporal boundaries govern customer and operational responsiveness. Interrupting timers enforce commercial validity (7-day offer expiry), while non-interrupting timers trigger parallel administrative alerts (e-sign delays) without breaking customer self-service.</a:t>
+              <a:t>Deadlines prevent applications from stalling silently. We use Interrupting Timers for hard cut-offs (Q1 14-day submission deadline, Q2 7-day offer acceptance expiry) and Non-Interrupting Timers for administrative reminders (Q1 10-day committee review SLA escalation to HoD, Q2 48-hour e-sign alert).</a:t>
             </a:r>
           </a:p>
         </p:txBody>
@@ -5081,7 +6061,7 @@
               </a:defRPr>
             </a:pPr>
             <a:r>
-              <a:t>Automated services can yield false negatives. When automated KYC API fails (L2), the model falls back to a Compliance Officer User Task. When e-signature platforms fail (L11), operations can execute physical wet-signatures, ensuring high conversion rates.</a:t>
+              <a:t>Automated services can yield false negatives. When automated DMN guide allocation in Q1 finds no available guide, it falls back to a Coordinator User Task. When automated KYC in Q2 fails, a Compliance Officer manually adjudicates the document, maintaining high conversion rates.</a:t>
             </a:r>
           </a:p>
         </p:txBody>
@@ -5138,7 +6118,7 @@
               </a:defRPr>
             </a:pPr>
             <a:r>
-              <a:t>⚖️  RECOVERY VS. COMPENSATION</a:t>
+              <a:t>⚖️  FORWARD RECOVERY VS. TRANSACTIONAL COMPENSATION</a:t>
             </a:r>
           </a:p>
           <a:p>
@@ -5150,7 +6130,7 @@
               </a:defRPr>
             </a:pPr>
             <a:r>
-              <a:t>In BPMN 2.0, 'Recovery' refers to forward error handling (retrying a task or taking an alternate branch). 'Compensation' (Undo / Compensate Event) cancels committed state. Our model utilizes forward recovery for disbursement retries and data archival on applicant withdrawal.</a:t>
+              <a:t>In BPMN 2.0, Forward Recovery resolves active faults through retries and alternate branches (e.g., Q2 Core Banking disbursement error boundary). Backward Compensation cancels committed milestones. Q1 uses script compensation to release guide pre-allocations if a student withdraws.</a:t>
             </a:r>
           </a:p>
         </p:txBody>
@@ -5163,7 +6143,7 @@
 </p:sld>
 </file>
 
-<file path=ppt/slides/slide11.xml><?xml version="1.0" encoding="utf-8"?>
+<file path=ppt/slides/slide13.xml><?xml version="1.0" encoding="utf-8"?>
 <p:sld xmlns:a="http://schemas.openxmlformats.org/drawingml/2006/main" xmlns:p="http://schemas.openxmlformats.org/presentationml/2006/main" xmlns:r="http://schemas.openxmlformats.org/officeDocument/2006/relationships">
   <p:cSld>
     <p:spTree>
@@ -5225,7 +6205,7 @@
         <p:spPr>
           <a:xfrm>
             <a:off x="731520" y="365760"/>
-            <a:ext cx="3108960" cy="292608"/>
+            <a:ext cx="3840480" cy="292608"/>
           </a:xfrm>
           <a:prstGeom prst="roundRect">
             <a:avLst/>
@@ -5359,7 +6339,7 @@
               </a:defRPr>
             </a:pPr>
             <a:r>
-              <a:t>CORE MODELLING DECISIONS &amp; RIGOR</a:t>
+              <a:t>MODELLING RIGOR &amp; VALIDATION PROOF</a:t>
             </a:r>
           </a:p>
           <a:p>
@@ -5382,7 +6362,7 @@
                   <a:srgbClr val="94A3B8"/>
                 </a:solidFill>
               </a:rPr>
-              <a:t>In BPMN 2.0, Sequence Flows can NEVER cross Pool boundaries. Because the Credit Bureau is an external legal entity, it was modelled as a separate Pool. All communication occurs strictly via Message Flows, preserving formal inter-organizational boundaries.</a:t>
+              <a:t>In BPMN 2.0, Sequence Flows can NEVER cross Pool boundaries. In Question 2, the external Credit Bureau is modelled as an independent Pool, and all communication uses Message Flows. In Question 1, internal lanes cleanly isolate academic roles.</a:t>
             </a:r>
           </a:p>
           <a:p>
@@ -5397,7 +6377,7 @@
                   <a:srgbClr val="F8FAFC"/>
                 </a:solidFill>
               </a:rPr>
-              <a:t>✔ Deterministic Parallel Split &amp; Synchronized Join: </a:t>
+              <a:t>✔ Camunda Modeler 5.49 &amp; bpmn-js Schema Validation: </a:t>
             </a:r>
             <a:r>
               <a:rPr sz="950">
@@ -5405,7 +6385,7 @@
                   <a:srgbClr val="94A3B8"/>
                 </a:solidFill>
               </a:rPr>
-              <a:t>Avoided race conditions and token leaks by pairing the Parallel Split with an explicit Parallel Join prior to manual income verification.</a:t>
+              <a:t>Both `.bpmn` files were validated against official OMG BPMN 2.0 schemas. Diagrams parsed and rendered without XML syntax errors, containment flaws, or broken sequence references.</a:t>
             </a:r>
           </a:p>
           <a:p>
@@ -5420,7 +6400,7 @@
                   <a:srgbClr val="F8FAFC"/>
                 </a:solidFill>
               </a:rPr>
-              <a:t>✔ BPMN 2.0 Schema &amp; Linter Validation: </a:t>
+              <a:t>✔ Deterministic Gateways: </a:t>
             </a:r>
             <a:r>
               <a:rPr sz="950">
@@ -5428,30 +6408,7 @@
                   <a:srgbClr val="94A3B8"/>
                 </a:solidFill>
               </a:rPr>
-              <a:t>The `.bpmn` XML was validated against the official OMG BPMN 2.0 XML Schema Definition (XSD). Diagram parsed and rendered cleanly in Camunda Modeler 5.49 and bpmn-js without syntax or containment errors.</a:t>
-            </a:r>
-          </a:p>
-          <a:p>
-            <a:pPr>
-              <a:spcAft>
-                <a:spcPts val="800"/>
-              </a:spcAft>
-            </a:pPr>
-            <a:r>
-              <a:rPr b="1" sz="1000">
-                <a:solidFill>
-                  <a:srgbClr val="F8FAFC"/>
-                </a:solidFill>
-              </a:rPr>
-              <a:t>✔ Granular Failure Typology: </a:t>
-            </a:r>
-            <a:r>
-              <a:rPr sz="950">
-                <a:solidFill>
-                  <a:srgbClr val="94A3B8"/>
-                </a:solidFill>
-              </a:rPr>
-              <a:t>All 12 failure modes have dedicated recovery paths or distinct terminal end states, ensuring full auditability.</a:t>
+              <a:t>Synchronized Parallel Joins prevent race conditions; Exclusive Gateways guarantee single-token determinism.</a:t>
             </a:r>
           </a:p>
         </p:txBody>
@@ -5508,7 +6465,7 @@
               </a:defRPr>
             </a:pPr>
             <a:r>
-              <a:t>HONEST LIMITATIONS &amp; FUTURE ENHANCEMENTS</a:t>
+              <a:t>ACADEMIC LIMITATIONS &amp; FUTURE PROPOSALS</a:t>
             </a:r>
           </a:p>
           <a:p>
@@ -5523,7 +6480,7 @@
                   <a:srgbClr val="F8FAFC"/>
                 </a:solidFill>
               </a:rPr>
-              <a:t>🔍 DMN Decision Table Integration: </a:t>
+              <a:t>🔍 DMN Decision Table Expansion: </a:t>
             </a:r>
             <a:r>
               <a:rPr sz="950">
@@ -5531,8 +6488,7 @@
                   <a:srgbClr val="94A3B8"/>
                 </a:solidFill>
               </a:rPr>
-              <a:t>Current Limitation: Eligibility and DTI scoring logic are executed inside Service Tasks.
-Proposed Improvement: Extract scoring rules into standalone Decision Model and Notation (DMN) tables linked via Business Rule Tasks for business-user modifiability.</a:t>
+              <a:t>While Question 1 uses Business Rule Tasks for guide matching, Question 2 currently encapsulates risk scoring inside Service Tasks. Future work should extract banking scoring into external DMN decision tables.</a:t>
             </a:r>
           </a:p>
           <a:p>
@@ -5547,7 +6503,7 @@
                   <a:srgbClr val="F8FAFC"/>
                 </a:solidFill>
               </a:rPr>
-              <a:t>🔍 Event Sub-Process for Global Cancellation: </a:t>
+              <a:t>🔍 Global Event Sub-Processes for Cancellation: </a:t>
             </a:r>
             <a:r>
               <a:rPr sz="950">
@@ -5555,8 +6511,7 @@
                   <a:srgbClr val="94A3B8"/>
                 </a:solidFill>
               </a:rPr>
-              <a:t>Current Limitation: Applicant withdrawal is modelled via conditional gateway after offer review.
-Proposed Improvement: Implement an Interrupting Event Sub-Process with a Message Start Event to permit applicant withdrawal at ANY active stage of the lifecycle.</a:t>
+              <a:t>Withdrawal is currently modelled at specific gateway points. Implementing an Interrupting Event Sub-Process with a Message Start Event would allow cancellation at ANY active stage in both systems.</a:t>
             </a:r>
           </a:p>
           <a:p>
@@ -5571,7 +6526,7 @@
                   <a:srgbClr val="F8FAFC"/>
                 </a:solidFill>
               </a:rPr>
-              <a:t>🔍 Transactional Sub-Process for Disbursement: </a:t>
+              <a:t>🔍 Transactional Sub-Processes for Disbursement: </a:t>
             </a:r>
             <a:r>
               <a:rPr sz="950">
@@ -5579,8 +6534,7 @@
                   <a:srgbClr val="94A3B8"/>
                 </a:solidFill>
               </a:rPr>
-              <a:t>Current Limitation: Disbursement failure uses an Error Boundary Event.
-Proposed Improvement: Encapsulate disbursement, ledger reservation, and notification in a Transactional Sub-Process with automated compensation.</a:t>
+              <a:t>Encapsulating disbursement, ledger reservation, and notification in a Transactional Sub-Process would provide atomic compensation guarantees.</a:t>
             </a:r>
           </a:p>
         </p:txBody>
@@ -5593,7 +6547,7 @@
 </p:sld>
 </file>
 
-<file path=ppt/slides/slide12.xml><?xml version="1.0" encoding="utf-8"?>
+<file path=ppt/slides/slide14.xml><?xml version="1.0" encoding="utf-8"?>
 <p:sld xmlns:a="http://schemas.openxmlformats.org/drawingml/2006/main" xmlns:p="http://schemas.openxmlformats.org/presentationml/2006/main" xmlns:r="http://schemas.openxmlformats.org/officeDocument/2006/relationships">
   <p:cSld>
     <p:spTree>
@@ -5655,7 +6609,7 @@
         <p:spPr>
           <a:xfrm>
             <a:off x="731520" y="365760"/>
-            <a:ext cx="3108960" cy="292608"/>
+            <a:ext cx="3840480" cy="292608"/>
           </a:xfrm>
           <a:prstGeom prst="roundRect">
             <a:avLst/>
@@ -5732,7 +6686,7 @@
               </a:defRPr>
             </a:pPr>
             <a:r>
-              <a:t>Conclusion &amp; Academic Summary</a:t>
+              <a:t>Conclusion &amp; Academic Defence</a:t>
             </a:r>
           </a:p>
         </p:txBody>
@@ -5804,7 +6758,7 @@
                   <a:srgbClr val="F8FAFC"/>
                 </a:solidFill>
               </a:rPr>
-              <a:t>✔ Comprehensive Process Coverage: </a:t>
+              <a:t>✔ Comprehensive Dual-Domain Modelling: </a:t>
             </a:r>
             <a:r>
               <a:rPr sz="1000">
@@ -5812,7 +6766,7 @@
                   <a:srgbClr val="94A3B8"/>
                 </a:solidFill>
               </a:rPr>
-              <a:t>Successfully modelled the full retail loan origination lifecycle across 7 participants, transitioning from initial portal submission to core banking disbursement.</a:t>
+              <a:t>Successfully modelled two diverse workflows—academic capstone allocation (Q1) and commercial retail lending (Q2)—demonstrating the flexibility of BPMN 2.0.</a:t>
             </a:r>
           </a:p>
           <a:p>
@@ -5827,7 +6781,7 @@
                   <a:srgbClr val="F8FAFC"/>
                 </a:solidFill>
               </a:rPr>
-              <a:t>✔ Engineering for Real-World Failure: </a:t>
+              <a:t>✔ Complete Failure Path Coverage: </a:t>
             </a:r>
             <a:r>
               <a:rPr sz="1000">
@@ -5835,7 +6789,7 @@
                   <a:srgbClr val="94A3B8"/>
                 </a:solidFill>
               </a:rPr>
-              <a:t>Incorporated 12 distinct failure paths (L1–L12) spanning data validation, compliance, external API latency, underwriter deliberation, and transaction faults.</a:t>
+              <a:t>Engineered 11 failure paths for Question 1 and 12 failure paths for Question 2, covering data validation, timeouts, policy rejections, and system faults.</a:t>
             </a:r>
           </a:p>
           <a:p>
@@ -5850,7 +6804,7 @@
                   <a:srgbClr val="F8FAFC"/>
                 </a:solidFill>
               </a:rPr>
-              <a:t>✔ Advanced BPMN 2.0 Semantics: </a:t>
+              <a:t>✔ Advanced Execution Semantics: </a:t>
             </a:r>
             <a:r>
               <a:rPr sz="1000">
@@ -5858,7 +6812,7 @@
                   <a:srgbClr val="94A3B8"/>
                 </a:solidFill>
               </a:rPr>
-              <a:t>Demonstrated rigorous application of Parallel Gateways (deterministic concurrency), Exclusive Gateways (mutually exclusive routing), and both Interrupting and Non-Interrupting Boundary Events.</a:t>
+              <a:t>Demonstrated mastery of Parallel Gateways (concurrency), Exclusive Gateways (decisions), Event-Based Gateways (competing events), and both Interrupting and Non-Interrupting Boundary Events.</a:t>
             </a:r>
           </a:p>
           <a:p>
@@ -5873,7 +6827,7 @@
                   <a:srgbClr val="F8FAFC"/>
                 </a:solidFill>
               </a:rPr>
-              <a:t>✔ Production-Ready Governance: </a:t>
+              <a:t>✔ Production-Ready Engineering: </a:t>
             </a:r>
             <a:r>
               <a:rPr sz="1000">
@@ -5881,7 +6835,7 @@
                   <a:srgbClr val="94A3B8"/>
                 </a:solidFill>
               </a:rPr>
-              <a:t>Delivered an auditable, executable BPMN 2.0 XML specification supported by detailed Failure Path Registers and Task Type Justification documentation.</a:t>
+              <a:t>Delivered validated BPMN 2.0 XML files, comprehensive Failure Path Registers, and full Task/Gateway Justification documents.</a:t>
             </a:r>
           </a:p>
         </p:txBody>
@@ -6054,7 +7008,7 @@
         <p:spPr>
           <a:xfrm>
             <a:off x="731520" y="365760"/>
-            <a:ext cx="3108960" cy="292608"/>
+            <a:ext cx="3840480" cy="292608"/>
           </a:xfrm>
           <a:prstGeom prst="roundRect">
             <a:avLst/>
@@ -6131,7 +7085,7 @@
               </a:defRPr>
             </a:pPr>
             <a:r>
-              <a:t>Problem Statement &amp; Process Objectives</a:t>
+              <a:t>Problem Statements &amp; Engineering Objectives</a:t>
             </a:r>
           </a:p>
         </p:txBody>
@@ -6144,8 +7098,8 @@
         </p:nvSpPr>
         <p:spPr>
           <a:xfrm>
-            <a:off x="731520" y="1463040"/>
-            <a:ext cx="5212080" cy="4846320"/>
+            <a:off x="731520" y="1371600"/>
+            <a:ext cx="5212080" cy="4937760"/>
           </a:xfrm>
           <a:prstGeom prst="roundRect">
             <a:avLst/>
@@ -6179,108 +7133,111 @@
           <a:p>
             <a:pPr algn="ctr">
               <a:spcAft>
-                <a:spcPts val="1000"/>
-              </a:spcAft>
-              <a:defRPr sz="1200" b="1">
-                <a:solidFill>
-                  <a:srgbClr val="F87171"/>
-                </a:solidFill>
-              </a:defRPr>
-            </a:pPr>
-            <a:r>
-              <a:t>THE REAL-WORLD BANKING CHALLENGE</a:t>
-            </a:r>
-          </a:p>
-          <a:p>
-            <a:pPr>
-              <a:spcAft>
-                <a:spcPts val="1000"/>
-              </a:spcAft>
-            </a:pPr>
-            <a:r>
-              <a:rPr b="1" sz="1100">
+                <a:spcPts val="800"/>
+              </a:spcAft>
+              <a:defRPr sz="1150" b="1">
+                <a:solidFill>
+                  <a:srgbClr val="00D2EB"/>
+                </a:solidFill>
+              </a:defRPr>
+            </a:pPr>
+            <a:r>
+              <a:t>QUESTION 1: STUDENT PROJECT APPROVAL SYSTEM</a:t>
+            </a:r>
+          </a:p>
+          <a:p>
+            <a:pPr>
+              <a:spcAft>
+                <a:spcPts val="800"/>
+              </a:spcAft>
+            </a:pPr>
+            <a:r>
+              <a:rPr b="1" sz="1050">
                 <a:solidFill>
                   <a:srgbClr val="F8FAFC"/>
                 </a:solidFill>
               </a:rPr>
-              <a:t>• High Drop-off &amp; Documentation Latency: </a:t>
-            </a:r>
-            <a:r>
-              <a:rPr sz="1100">
+              <a:t>• The Academic Challenge: </a:t>
+            </a:r>
+            <a:r>
+              <a:rPr sz="1000">
                 <a:solidFill>
                   <a:srgbClr val="94A3B8"/>
                 </a:solidFill>
               </a:rPr>
-              <a:t>Retail loan applicants face long cycle times due to repeated missing document exchanges and lack of automated validation schemas.</a:t>
-            </a:r>
-          </a:p>
-          <a:p>
-            <a:pPr>
-              <a:spcAft>
-                <a:spcPts val="1000"/>
-              </a:spcAft>
-            </a:pPr>
-            <a:r>
-              <a:rPr b="1" sz="1100">
+              <a:t>University departments manage hundreds of final-year capstone proposals. Manual paper flows lead to lost forms, plagiarism oversights, revision deadlocks, and guide workload imbalances.</a:t>
+            </a:r>
+          </a:p>
+          <a:p>
+            <a:pPr>
+              <a:spcAft>
+                <a:spcPts val="800"/>
+              </a:spcAft>
+            </a:pPr>
+            <a:r>
+              <a:rPr b="1" sz="1050">
                 <a:solidFill>
                   <a:srgbClr val="F8FAFC"/>
                 </a:solidFill>
               </a:rPr>
-              <a:t>• Multi-Departmental Silos: </a:t>
-            </a:r>
-            <a:r>
-              <a:rPr sz="1100">
+              <a:t>• Key Participants (5 Lanes): </a:t>
+            </a:r>
+            <a:r>
+              <a:rPr sz="1000">
                 <a:solidFill>
                   <a:srgbClr val="94A3B8"/>
                 </a:solidFill>
               </a:rPr>
-              <a:t>Underwriters, compliance teams, loan officers, and core banking operations frequently communicate through unstructured channels, causing compliance blindspots.</a:t>
-            </a:r>
-          </a:p>
-          <a:p>
-            <a:pPr>
-              <a:spcAft>
-                <a:spcPts val="1000"/>
-              </a:spcAft>
-            </a:pPr>
-            <a:r>
-              <a:rPr b="1" sz="1100">
+              <a:t>Student/Team, Project Coordinator, Review Committee (incl. HoD), Faculty Guide, and Project Management System.</a:t>
+            </a:r>
+          </a:p>
+          <a:p>
+            <a:pPr>
+              <a:spcAft>
+                <a:spcPts val="800"/>
+              </a:spcAft>
+            </a:pPr>
+            <a:r>
+              <a:rPr b="1" sz="1050">
                 <a:solidFill>
                   <a:srgbClr val="F8FAFC"/>
                 </a:solidFill>
               </a:rPr>
-              <a:t>• Strict Regulatory Mandates: </a:t>
-            </a:r>
-            <a:r>
-              <a:rPr sz="1100">
+              <a:t>• Core Objectives: </a:t>
+            </a:r>
+            <a:r>
+              <a:rPr sz="1000">
                 <a:solidFill>
                   <a:srgbClr val="94A3B8"/>
                 </a:solidFill>
               </a:rPr>
-              <a:t>Zero-tolerance requirements for KYC identity matching and AML watchlist screening necessitate deterministic, auditable gatekeeping before loan commitment.</a:t>
-            </a:r>
-          </a:p>
-          <a:p>
-            <a:pPr>
-              <a:spcAft>
-                <a:spcPts val="1000"/>
-              </a:spcAft>
-            </a:pPr>
-            <a:r>
-              <a:rPr b="1" sz="1100">
+              <a:t>• Automate completeness &amp; team rule validation.
+• Implement similarity/duplicate topic check gate.
+• Manage iterative committee revision cycles (SLA timers).
+• Rule-based faculty guide workload allocation.</a:t>
+            </a:r>
+          </a:p>
+          <a:p>
+            <a:pPr>
+              <a:spcAft>
+                <a:spcPts val="800"/>
+              </a:spcAft>
+            </a:pPr>
+            <a:r>
+              <a:rPr b="1" sz="1050">
                 <a:solidFill>
                   <a:srgbClr val="F8FAFC"/>
                 </a:solidFill>
               </a:rPr>
-              <a:t>• External Dependency Fragility: </a:t>
-            </a:r>
-            <a:r>
-              <a:rPr sz="1100">
+              <a:t>• Why BPMN 2.0: </a:t>
+            </a:r>
+            <a:r>
+              <a:rPr sz="1000">
                 <a:solidFill>
                   <a:srgbClr val="94A3B8"/>
                 </a:solidFill>
               </a:rPr>
-              <a:t>Credit bureau APIs frequently experience network timeouts, requiring structured non-blocking retry mechanisms rather than stalling the application.</a:t>
+              <a:t>BPMN swimlanes eliminate ambiguity between student submissions, coordinator screening, and committee academic evaluation.</a:t>
             </a:r>
           </a:p>
         </p:txBody>
@@ -6293,8 +7250,8 @@
         </p:nvSpPr>
         <p:spPr>
           <a:xfrm>
-            <a:off x="6217920" y="1463040"/>
-            <a:ext cx="5212080" cy="2377440"/>
+            <a:off x="6217920" y="1371600"/>
+            <a:ext cx="5212080" cy="4937760"/>
           </a:xfrm>
           <a:prstGeom prst="roundRect">
             <a:avLst/>
@@ -6330,200 +7287,109 @@
               <a:spcAft>
                 <a:spcPts val="800"/>
               </a:spcAft>
-              <a:defRPr sz="1200" b="1">
+              <a:defRPr sz="1150" b="1">
                 <a:solidFill>
                   <a:srgbClr val="34D399"/>
                 </a:solidFill>
               </a:defRPr>
             </a:pPr>
             <a:r>
-              <a:t>PROCESS DESIGN OBJECTIVES</a:t>
-            </a:r>
-          </a:p>
-          <a:p>
-            <a:pPr>
-              <a:spcAft>
-                <a:spcPts val="600"/>
-              </a:spcAft>
-              <a:defRPr sz="1100">
+              <a:t>QUESTION 2: LOAN ORIGINATION &amp; APPROVAL SYSTEM</a:t>
+            </a:r>
+          </a:p>
+          <a:p>
+            <a:pPr>
+              <a:spcAft>
+                <a:spcPts val="800"/>
+              </a:spcAft>
+            </a:pPr>
+            <a:r>
+              <a:rPr b="1" sz="1050">
                 <a:solidFill>
                   <a:srgbClr val="F8FAFC"/>
                 </a:solidFill>
-              </a:defRPr>
-            </a:pPr>
-            <a:r>
-              <a:t>1. Model End-to-End Orchestration: From applicant document submission to NEFT/RTGS disbursement.</a:t>
-            </a:r>
-          </a:p>
-          <a:p>
-            <a:pPr>
-              <a:spcAft>
-                <a:spcPts val="600"/>
-              </a:spcAft>
-              <a:defRPr sz="1100">
+              </a:rPr>
+              <a:t>• The Banking Challenge: </a:t>
+            </a:r>
+            <a:r>
+              <a:rPr sz="1000">
+                <a:solidFill>
+                  <a:srgbClr val="94A3B8"/>
+                </a:solidFill>
+              </a:rPr>
+              <a:t>Commercial lending workflows suffer from long processing times, customer abandonment, regulatory KYC/AML violations, external API downtime, and core banking transaction failures.</a:t>
+            </a:r>
+          </a:p>
+          <a:p>
+            <a:pPr>
+              <a:spcAft>
+                <a:spcPts val="800"/>
+              </a:spcAft>
+            </a:pPr>
+            <a:r>
+              <a:rPr b="1" sz="1050">
                 <a:solidFill>
                   <a:srgbClr val="F8FAFC"/>
                 </a:solidFill>
-              </a:defRPr>
-            </a:pPr>
-            <a:r>
-              <a:t>2. Parallelize Background Checks: Execute KYC/AML, Credit Bureau scoring, and DTI ratio checks simultaneously.</a:t>
-            </a:r>
-          </a:p>
-          <a:p>
-            <a:pPr>
-              <a:spcAft>
-                <a:spcPts val="600"/>
-              </a:spcAft>
-              <a:defRPr sz="1100">
+              </a:rPr>
+              <a:t>• Key Participants (7 Lanes/Pools): </a:t>
+            </a:r>
+            <a:r>
+              <a:rPr sz="1000">
+                <a:solidFill>
+                  <a:srgbClr val="94A3B8"/>
+                </a:solidFill>
+              </a:rPr>
+              <a:t>Applicant, Loan Officer, Underwriter, Compliance Team, Core Banking, Operations, and External Credit Bureau Pool.</a:t>
+            </a:r>
+          </a:p>
+          <a:p>
+            <a:pPr>
+              <a:spcAft>
+                <a:spcPts val="800"/>
+              </a:spcAft>
+            </a:pPr>
+            <a:r>
+              <a:rPr b="1" sz="1050">
                 <a:solidFill>
                   <a:srgbClr val="F8FAFC"/>
                 </a:solidFill>
-              </a:defRPr>
-            </a:pPr>
-            <a:r>
-              <a:t>3. Resilient Failure Containment: Provide explicit recovery or terminal paths for all 12 potential failure triggers.</a:t>
-            </a:r>
-          </a:p>
-          <a:p>
-            <a:pPr>
-              <a:spcAft>
-                <a:spcPts val="600"/>
-              </a:spcAft>
-              <a:defRPr sz="1100">
+              </a:rPr>
+              <a:t>• Core Objectives: </a:t>
+            </a:r>
+            <a:r>
+              <a:rPr sz="1000">
+                <a:solidFill>
+                  <a:srgbClr val="94A3B8"/>
+                </a:solidFill>
+              </a:rPr>
+              <a:t>• Concurrently execute KYC/AML, Credit Bureau, and DTI checks.
+• Enable underwriter manual review &amp; collateral re-valuation.
+• Enforce 7-day offer acceptance expiry and 48-hour e-sign SLAs.
+• Contain technical errors during NEFT/RTGS disbursement.</a:t>
+            </a:r>
+          </a:p>
+          <a:p>
+            <a:pPr>
+              <a:spcAft>
+                <a:spcPts val="800"/>
+              </a:spcAft>
+            </a:pPr>
+            <a:r>
+              <a:rPr b="1" sz="1050">
                 <a:solidFill>
                   <a:srgbClr val="F8FAFC"/>
                 </a:solidFill>
-              </a:defRPr>
-            </a:pPr>
-            <a:r>
-              <a:t>4. Enforce SLA Compliance: Introduce timer-based offer expirations and non-blocking e-signature follow-ups.</a:t>
-            </a:r>
-          </a:p>
-        </p:txBody>
-      </p:sp>
-      <p:sp>
-        <p:nvSpPr>
-          <p:cNvPr id="7" name="Rounded Rectangle 6"/>
-          <p:cNvSpPr/>
-          <p:nvPr/>
-        </p:nvSpPr>
-        <p:spPr>
-          <a:xfrm>
-            <a:off x="6217920" y="3977639"/>
-            <a:ext cx="5212080" cy="2331720"/>
-          </a:xfrm>
-          <a:prstGeom prst="roundRect">
-            <a:avLst/>
-          </a:prstGeom>
-          <a:solidFill>
-            <a:srgbClr val="18263E"/>
-          </a:solidFill>
-          <a:ln w="12700">
-            <a:solidFill>
-              <a:srgbClr val="2D4466"/>
-            </a:solidFill>
-          </a:ln>
-        </p:spPr>
-        <p:style>
-          <a:lnRef idx="1">
-            <a:schemeClr val="accent1"/>
-          </a:lnRef>
-          <a:fillRef idx="3">
-            <a:schemeClr val="accent1"/>
-          </a:fillRef>
-          <a:effectRef idx="2">
-            <a:schemeClr val="accent1"/>
-          </a:effectRef>
-          <a:fontRef idx="minor">
-            <a:schemeClr val="lt1"/>
-          </a:fontRef>
-        </p:style>
-        <p:txBody>
-          <a:bodyPr rtlCol="0" anchor="ctr" wrap="square"/>
-          <a:lstStyle/>
-          <a:p>
-            <a:pPr algn="ctr">
-              <a:spcAft>
-                <a:spcPts val="800"/>
-              </a:spcAft>
-              <a:defRPr sz="1200" b="1">
-                <a:solidFill>
-                  <a:srgbClr val="00D2EB"/>
-                </a:solidFill>
-              </a:defRPr>
-            </a:pPr>
-            <a:r>
-              <a:t>WHY BPMN 2.0 IS THE SUPERIOR MODELLING STANDARD</a:t>
-            </a:r>
-          </a:p>
-          <a:p>
-            <a:pPr>
-              <a:spcAft>
-                <a:spcPts val="600"/>
-              </a:spcAft>
-            </a:pPr>
-            <a:r>
-              <a:rPr b="1" sz="1050">
-                <a:solidFill>
-                  <a:srgbClr val="F8FAFC"/>
-                </a:solidFill>
-              </a:rPr>
-              <a:t>✔ Standardized Semantics: </a:t>
-            </a:r>
-            <a:r>
-              <a:rPr sz="1050">
+              </a:rPr>
+              <a:t>• Why BPMN 2.0: </a:t>
+            </a:r>
+            <a:r>
+              <a:rPr sz="1000">
                 <a:solidFill>
                   <a:srgbClr val="94A3B8"/>
                 </a:solidFill>
               </a:rPr>
-              <a:t>Unlike basic flowcharts, BPMN 2.0 distinguishes User, Service, and Send tasks with unambiguous execution semantics.</a:t>
-            </a:r>
-          </a:p>
-          <a:p>
-            <a:pPr>
-              <a:spcAft>
-                <a:spcPts val="600"/>
-              </a:spcAft>
-            </a:pPr>
-            <a:r>
-              <a:rPr b="1" sz="1050">
-                <a:solidFill>
-                  <a:srgbClr val="F8FAFC"/>
-                </a:solidFill>
-              </a:rPr>
-              <a:t>✔ Pools vs Lanes Rigor: </a:t>
-            </a:r>
-            <a:r>
-              <a:rPr sz="1050">
-                <a:solidFill>
-                  <a:srgbClr val="94A3B8"/>
-                </a:solidFill>
-              </a:rPr>
-              <a:t>Enforces strict organizational boundary isolation (Sequence Flows strictly within a Pool; Message Flows between Pools).</a:t>
-            </a:r>
-          </a:p>
-          <a:p>
-            <a:pPr>
-              <a:spcAft>
-                <a:spcPts val="600"/>
-              </a:spcAft>
-            </a:pPr>
-            <a:r>
-              <a:rPr b="1" sz="1050">
-                <a:solidFill>
-                  <a:srgbClr val="F8FAFC"/>
-                </a:solidFill>
-              </a:rPr>
-              <a:t>✔ Event-Driven Architecture: </a:t>
-            </a:r>
-            <a:r>
-              <a:rPr sz="1050">
-                <a:solidFill>
-                  <a:srgbClr val="94A3B8"/>
-                </a:solidFill>
-              </a:rPr>
-              <a:t>Supports interrupting and non-interrupting boundary events essential for enterprise timeout and technical fault trapping.</a:t>
+              <a:t>BPMN 2.0 provides formal pool separation for external partners and event boundaries for transaction safety.</a:t>
             </a:r>
           </a:p>
         </p:txBody>
@@ -6598,7 +7464,7 @@
         <p:spPr>
           <a:xfrm>
             <a:off x="731520" y="365760"/>
-            <a:ext cx="3108960" cy="292608"/>
+            <a:ext cx="3840480" cy="292608"/>
           </a:xfrm>
           <a:prstGeom prst="roundRect">
             <a:avLst/>
@@ -6639,7 +7505,7 @@
               </a:defRPr>
             </a:pPr>
             <a:r>
-              <a:t>SYSTEM ARCHITECTURE</a:t>
+              <a:t>SYSTEM ARCHITECTURE — Q1</a:t>
             </a:r>
           </a:p>
         </p:txBody>
@@ -6675,7 +7541,382 @@
               </a:defRPr>
             </a:pPr>
             <a:r>
-              <a:t>Overall BPMN 2.0 Architecture &amp; Process Topology</a:t>
+              <a:t>Question 1: Student Project Approval Architecture</a:t>
+            </a:r>
+          </a:p>
+        </p:txBody>
+      </p:sp>
+      <p:sp>
+        <p:nvSpPr>
+          <p:cNvPr id="5" name="Rounded Rectangle 4"/>
+          <p:cNvSpPr/>
+          <p:nvPr/>
+        </p:nvSpPr>
+        <p:spPr>
+          <a:xfrm>
+            <a:off x="731520" y="1371600"/>
+            <a:ext cx="7132320" cy="4937760"/>
+          </a:xfrm>
+          <a:prstGeom prst="roundRect">
+            <a:avLst/>
+          </a:prstGeom>
+          <a:solidFill>
+            <a:srgbClr val="18263E"/>
+          </a:solidFill>
+          <a:ln w="12700">
+            <a:solidFill>
+              <a:srgbClr val="2D4466"/>
+            </a:solidFill>
+          </a:ln>
+        </p:spPr>
+        <p:style>
+          <a:lnRef idx="1">
+            <a:schemeClr val="accent1"/>
+          </a:lnRef>
+          <a:fillRef idx="3">
+            <a:schemeClr val="accent1"/>
+          </a:fillRef>
+          <a:effectRef idx="2">
+            <a:schemeClr val="accent1"/>
+          </a:effectRef>
+          <a:fontRef idx="minor">
+            <a:schemeClr val="lt1"/>
+          </a:fontRef>
+        </p:style>
+        <p:txBody>
+          <a:bodyPr rtlCol="0" anchor="ctr"/>
+          <a:lstStyle/>
+          <a:p>
+            <a:pPr algn="ctr"/>
+          </a:p>
+        </p:txBody>
+      </p:sp>
+      <p:pic>
+        <p:nvPicPr>
+          <p:cNvPr id="6" name="Picture 5" descr="Assignment1_BPMN_Diagram.png"/>
+          <p:cNvPicPr>
+            <a:picLocks noChangeAspect="1"/>
+          </p:cNvPicPr>
+          <p:nvPr/>
+        </p:nvPicPr>
+        <p:blipFill>
+          <a:blip r:embed="rId2"/>
+          <a:stretch>
+            <a:fillRect/>
+          </a:stretch>
+        </p:blipFill>
+        <p:spPr>
+          <a:xfrm>
+            <a:off x="822960" y="1463040"/>
+            <a:ext cx="6949440" cy="4754880"/>
+          </a:xfrm>
+          <a:prstGeom prst="rect">
+            <a:avLst/>
+          </a:prstGeom>
+        </p:spPr>
+      </p:pic>
+      <p:sp>
+        <p:nvSpPr>
+          <p:cNvPr id="7" name="Rounded Rectangle 6"/>
+          <p:cNvSpPr/>
+          <p:nvPr/>
+        </p:nvSpPr>
+        <p:spPr>
+          <a:xfrm>
+            <a:off x="8046720" y="1371600"/>
+            <a:ext cx="3383280" cy="4937760"/>
+          </a:xfrm>
+          <a:prstGeom prst="roundRect">
+            <a:avLst/>
+          </a:prstGeom>
+          <a:solidFill>
+            <a:srgbClr val="18263E"/>
+          </a:solidFill>
+          <a:ln w="12700">
+            <a:solidFill>
+              <a:srgbClr val="2D4466"/>
+            </a:solidFill>
+          </a:ln>
+        </p:spPr>
+        <p:style>
+          <a:lnRef idx="1">
+            <a:schemeClr val="accent1"/>
+          </a:lnRef>
+          <a:fillRef idx="3">
+            <a:schemeClr val="accent1"/>
+          </a:fillRef>
+          <a:effectRef idx="2">
+            <a:schemeClr val="accent1"/>
+          </a:effectRef>
+          <a:fontRef idx="minor">
+            <a:schemeClr val="lt1"/>
+          </a:fontRef>
+        </p:style>
+        <p:txBody>
+          <a:bodyPr rtlCol="0" anchor="ctr" wrap="square"/>
+          <a:lstStyle/>
+          <a:p>
+            <a:pPr algn="ctr">
+              <a:spcAft>
+                <a:spcPts val="800"/>
+              </a:spcAft>
+              <a:defRPr sz="1100" b="1">
+                <a:solidFill>
+                  <a:srgbClr val="00D2EB"/>
+                </a:solidFill>
+              </a:defRPr>
+            </a:pPr>
+            <a:r>
+              <a:t>Q1 ARCHITECTURAL SUMMARY</a:t>
+            </a:r>
+          </a:p>
+          <a:p>
+            <a:pPr>
+              <a:spcAft>
+                <a:spcPts val="600"/>
+              </a:spcAft>
+            </a:pPr>
+            <a:r>
+              <a:rPr b="1" sz="950">
+                <a:solidFill>
+                  <a:srgbClr val="F8FAFC"/>
+                </a:solidFill>
+              </a:rPr>
+              <a:t>✔ Swimlanes (5): </a:t>
+            </a:r>
+            <a:r>
+              <a:rPr sz="900">
+                <a:solidFill>
+                  <a:srgbClr val="94A3B8"/>
+                </a:solidFill>
+              </a:rPr>
+              <a:t>Student/Team, Project Coordinator, Project Management System, Review Committee, Faculty Guide.</a:t>
+            </a:r>
+          </a:p>
+          <a:p>
+            <a:pPr>
+              <a:spcAft>
+                <a:spcPts val="600"/>
+              </a:spcAft>
+            </a:pPr>
+            <a:r>
+              <a:rPr b="1" sz="950">
+                <a:solidFill>
+                  <a:srgbClr val="F8FAFC"/>
+                </a:solidFill>
+              </a:rPr>
+              <a:t>✔ Process Boundaries: </a:t>
+            </a:r>
+            <a:r>
+              <a:rPr sz="900">
+                <a:solidFill>
+                  <a:srgbClr val="94A3B8"/>
+                </a:solidFill>
+              </a:rPr>
+              <a:t>Starts when student team submits proposal. Ends when guide is allocated &amp; confirmed, or proposal rejected/lapsed.</a:t>
+            </a:r>
+          </a:p>
+          <a:p>
+            <a:pPr>
+              <a:spcAft>
+                <a:spcPts val="600"/>
+              </a:spcAft>
+            </a:pPr>
+            <a:r>
+              <a:rPr b="1" sz="950">
+                <a:solidFill>
+                  <a:srgbClr val="F8FAFC"/>
+                </a:solidFill>
+              </a:rPr>
+              <a:t>✔ Key Decision Gates: </a:t>
+            </a:r>
+            <a:r>
+              <a:rPr sz="900">
+                <a:solidFill>
+                  <a:srgbClr val="94A3B8"/>
+                </a:solidFill>
+              </a:rPr>
+              <a:t>1. Document Completeness (System)
+2. Team Rule Verification (System)
+3. Similarity / Plagiarism Gate (System)
+4. Committee Decision (Approve / Revise / Reject)
+5. Guide Availability Match (DMN)
+6. Guide Acceptance (Message / Timeout).</a:t>
+            </a:r>
+          </a:p>
+          <a:p>
+            <a:pPr>
+              <a:spcAft>
+                <a:spcPts val="600"/>
+              </a:spcAft>
+            </a:pPr>
+            <a:r>
+              <a:rPr b="1" sz="950">
+                <a:solidFill>
+                  <a:srgbClr val="F8FAFC"/>
+                </a:solidFill>
+              </a:rPr>
+              <a:t>✔ Failure End States (6): </a:t>
+            </a:r>
+            <a:r>
+              <a:rPr sz="900">
+                <a:solidFill>
+                  <a:srgbClr val="94A3B8"/>
+                </a:solidFill>
+              </a:rPr>
+              <a:t>Invalid Proposal, Duplicate Topic, Proposal Lapsed, Proposal Rejected, No Guide Available, System Failure.</a:t>
+            </a:r>
+          </a:p>
+        </p:txBody>
+      </p:sp>
+    </p:spTree>
+  </p:cSld>
+  <p:clrMapOvr>
+    <a:masterClrMapping/>
+  </p:clrMapOvr>
+</p:sld>
+</file>
+
+<file path=ppt/slides/slide4.xml><?xml version="1.0" encoding="utf-8"?>
+<p:sld xmlns:a="http://schemas.openxmlformats.org/drawingml/2006/main" xmlns:p="http://schemas.openxmlformats.org/presentationml/2006/main" xmlns:r="http://schemas.openxmlformats.org/officeDocument/2006/relationships">
+  <p:cSld>
+    <p:spTree>
+      <p:nvGrpSpPr>
+        <p:cNvPr id="1" name=""/>
+        <p:cNvGrpSpPr/>
+        <p:nvPr/>
+      </p:nvGrpSpPr>
+      <p:grpSpPr/>
+      <p:sp>
+        <p:nvSpPr>
+          <p:cNvPr id="2" name="Rectangle 1"/>
+          <p:cNvSpPr/>
+          <p:nvPr/>
+        </p:nvSpPr>
+        <p:spPr>
+          <a:xfrm>
+            <a:off x="0" y="0"/>
+            <a:ext cx="12191695" cy="6858000"/>
+          </a:xfrm>
+          <a:prstGeom prst="rect">
+            <a:avLst/>
+          </a:prstGeom>
+          <a:solidFill>
+            <a:srgbClr val="0B192C"/>
+          </a:solidFill>
+          <a:ln>
+            <a:noFill/>
+          </a:ln>
+        </p:spPr>
+        <p:style>
+          <a:lnRef idx="1">
+            <a:schemeClr val="accent1"/>
+          </a:lnRef>
+          <a:fillRef idx="3">
+            <a:schemeClr val="accent1"/>
+          </a:fillRef>
+          <a:effectRef idx="2">
+            <a:schemeClr val="accent1"/>
+          </a:effectRef>
+          <a:fontRef idx="minor">
+            <a:schemeClr val="lt1"/>
+          </a:fontRef>
+        </p:style>
+        <p:txBody>
+          <a:bodyPr rtlCol="0" anchor="ctr"/>
+          <a:lstStyle/>
+          <a:p>
+            <a:pPr algn="ctr"/>
+          </a:p>
+        </p:txBody>
+      </p:sp>
+      <p:sp>
+        <p:nvSpPr>
+          <p:cNvPr id="3" name="Rounded Rectangle 2"/>
+          <p:cNvSpPr/>
+          <p:nvPr/>
+        </p:nvSpPr>
+        <p:spPr>
+          <a:xfrm>
+            <a:off x="731520" y="365760"/>
+            <a:ext cx="3840480" cy="292608"/>
+          </a:xfrm>
+          <a:prstGeom prst="roundRect">
+            <a:avLst/>
+          </a:prstGeom>
+          <a:solidFill>
+            <a:srgbClr val="18263E"/>
+          </a:solidFill>
+          <a:ln w="12700">
+            <a:solidFill>
+              <a:srgbClr val="00D2EB"/>
+            </a:solidFill>
+          </a:ln>
+        </p:spPr>
+        <p:style>
+          <a:lnRef idx="1">
+            <a:schemeClr val="accent1"/>
+          </a:lnRef>
+          <a:fillRef idx="3">
+            <a:schemeClr val="accent1"/>
+          </a:fillRef>
+          <a:effectRef idx="2">
+            <a:schemeClr val="accent1"/>
+          </a:effectRef>
+          <a:fontRef idx="minor">
+            <a:schemeClr val="lt1"/>
+          </a:fontRef>
+        </p:style>
+        <p:txBody>
+          <a:bodyPr rtlCol="0" anchor="ctr"/>
+          <a:lstStyle/>
+          <a:p>
+            <a:pPr algn="ctr">
+              <a:defRPr sz="950" b="1">
+                <a:solidFill>
+                  <a:srgbClr val="00D2EB"/>
+                </a:solidFill>
+                <a:latin typeface="Arial"/>
+              </a:defRPr>
+            </a:pPr>
+            <a:r>
+              <a:t>SYSTEM ARCHITECTURE — Q2</a:t>
+            </a:r>
+          </a:p>
+        </p:txBody>
+      </p:sp>
+      <p:sp>
+        <p:nvSpPr>
+          <p:cNvPr id="4" name="TextBox 3"/>
+          <p:cNvSpPr txBox="1"/>
+          <p:nvPr/>
+        </p:nvSpPr>
+        <p:spPr>
+          <a:xfrm>
+            <a:off x="731520" y="713232"/>
+            <a:ext cx="10698480" cy="594360"/>
+          </a:xfrm>
+          <a:prstGeom prst="rect">
+            <a:avLst/>
+          </a:prstGeom>
+          <a:noFill/>
+        </p:spPr>
+        <p:txBody>
+          <a:bodyPr wrap="square">
+            <a:spAutoFit/>
+          </a:bodyPr>
+          <a:lstStyle/>
+          <a:p>
+            <a:pPr>
+              <a:defRPr sz="2200" b="1">
+                <a:solidFill>
+                  <a:srgbClr val="F8FAFC"/>
+                </a:solidFill>
+                <a:latin typeface="Arial"/>
+              </a:defRPr>
+            </a:pPr>
+            <a:r>
+              <a:t>Question 2: Loan Origination &amp; Approval Architecture</a:t>
             </a:r>
           </a:p>
         </p:txBody>
@@ -6758,7 +7999,7 @@
         <p:spPr>
           <a:xfrm>
             <a:off x="8046720" y="1371600"/>
-            <a:ext cx="3383280" cy="2377440"/>
+            <a:ext cx="3383280" cy="4937760"/>
           </a:xfrm>
           <a:prstGeom prst="roundRect">
             <a:avLst/>
@@ -6796,18 +8037,18 @@
               </a:spcAft>
               <a:defRPr sz="1100" b="1">
                 <a:solidFill>
-                  <a:srgbClr val="00D2EB"/>
-                </a:solidFill>
-              </a:defRPr>
-            </a:pPr>
-            <a:r>
-              <a:t>PARTICIPANTS &amp; SWIMLANES (7 TOTAL)</a:t>
-            </a:r>
-          </a:p>
-          <a:p>
-            <a:pPr>
-              <a:spcAft>
-                <a:spcPts val="300"/>
+                  <a:srgbClr val="34D399"/>
+                </a:solidFill>
+              </a:defRPr>
+            </a:pPr>
+            <a:r>
+              <a:t>Q2 ARCHITECTURAL SUMMARY</a:t>
+            </a:r>
+          </a:p>
+          <a:p>
+            <a:pPr>
+              <a:spcAft>
+                <a:spcPts val="600"/>
               </a:spcAft>
             </a:pPr>
             <a:r>
@@ -6816,7 +8057,7 @@
                   <a:srgbClr val="F8FAFC"/>
                 </a:solidFill>
               </a:rPr>
-              <a:t>• Applicant: </a:t>
+              <a:t>✔ Participants &amp; Pools: </a:t>
             </a:r>
             <a:r>
               <a:rPr sz="900">
@@ -6824,13 +8065,13 @@
                   <a:srgbClr val="94A3B8"/>
                 </a:solidFill>
               </a:rPr>
-              <a:t>Submits docs, reviews offer, e-signs agreement</a:t>
-            </a:r>
-          </a:p>
-          <a:p>
-            <a:pPr>
-              <a:spcAft>
-                <a:spcPts val="300"/>
+              <a:t>7 Total: 6 internal bank lanes (Applicant, Loan Officer, Underwriter, Compliance, Core Banking, Operations) + 1 External Pool (Credit Bureau).</a:t>
+            </a:r>
+          </a:p>
+          <a:p>
+            <a:pPr>
+              <a:spcAft>
+                <a:spcPts val="600"/>
               </a:spcAft>
             </a:pPr>
             <a:r>
@@ -6839,7 +8080,7 @@
                   <a:srgbClr val="F8FAFC"/>
                 </a:solidFill>
               </a:rPr>
-              <a:t>• Loan Officer: </a:t>
+              <a:t>✔ Process Boundaries: </a:t>
             </a:r>
             <a:r>
               <a:rPr sz="900">
@@ -6847,13 +8088,13 @@
                   <a:srgbClr val="94A3B8"/>
                 </a:solidFill>
               </a:rPr>
-              <a:t>Screens docs, verifies income, issues offers</a:t>
-            </a:r>
-          </a:p>
-          <a:p>
-            <a:pPr>
-              <a:spcAft>
-                <a:spcPts val="300"/>
+              <a:t>Starts when applicant submits loan form &amp; docs. Ends when loan is disbursed, or rejected/withdrawn/expired/terminated.</a:t>
+            </a:r>
+          </a:p>
+          <a:p>
+            <a:pPr>
+              <a:spcAft>
+                <a:spcPts val="600"/>
               </a:spcAft>
             </a:pPr>
             <a:r>
@@ -6862,7 +8103,7 @@
                   <a:srgbClr val="F8FAFC"/>
                 </a:solidFill>
               </a:rPr>
-              <a:t>• Underwriter: </a:t>
+              <a:t>✔ Key Concurrency Feature: </a:t>
             </a:r>
             <a:r>
               <a:rPr sz="900">
@@ -6870,13 +8111,13 @@
                   <a:srgbClr val="94A3B8"/>
                 </a:solidFill>
               </a:rPr>
-              <a:t>Adjudicates borderline risks &amp; collateral LTV</a:t>
-            </a:r>
-          </a:p>
-          <a:p>
-            <a:pPr>
-              <a:spcAft>
-                <a:spcPts val="300"/>
+              <a:t>Parallel Gateway forks 3 concurrent streams: KYC/AML check, Credit Bureau request, and DTI calculation.</a:t>
+            </a:r>
+          </a:p>
+          <a:p>
+            <a:pPr>
+              <a:spcAft>
+                <a:spcPts val="600"/>
               </a:spcAft>
             </a:pPr>
             <a:r>
@@ -6885,7 +8126,7 @@
                   <a:srgbClr val="F8FAFC"/>
                 </a:solidFill>
               </a:rPr>
-              <a:t>• Compliance Team: </a:t>
+              <a:t>✔ External Message Exchange: </a:t>
             </a:r>
             <a:r>
               <a:rPr sz="900">
@@ -6893,13 +8134,13 @@
                   <a:srgbClr val="94A3B8"/>
                 </a:solidFill>
               </a:rPr>
-              <a:t>Manual KYC adjudication &amp; AML fraud probes</a:t>
-            </a:r>
-          </a:p>
-          <a:p>
-            <a:pPr>
-              <a:spcAft>
-                <a:spcPts val="300"/>
+              <a:t>Message Flows connect Bank Core Banking lane to external Credit Bureau Pool for credit reports.</a:t>
+            </a:r>
+          </a:p>
+          <a:p>
+            <a:pPr>
+              <a:spcAft>
+                <a:spcPts val="600"/>
               </a:spcAft>
             </a:pPr>
             <a:r>
@@ -6908,7 +8149,7 @@
                   <a:srgbClr val="F8FAFC"/>
                 </a:solidFill>
               </a:rPr>
-              <a:t>• Core Banking: </a:t>
+              <a:t>✔ Failure End States (6): </a:t>
             </a:r>
             <a:r>
               <a:rPr sz="900">
@@ -6916,225 +8157,7 @@
                   <a:srgbClr val="94A3B8"/>
                 </a:solidFill>
               </a:rPr>
-              <a:t>Parallel execution, scoring, DTI computation</a:t>
-            </a:r>
-          </a:p>
-          <a:p>
-            <a:pPr>
-              <a:spcAft>
-                <a:spcPts val="300"/>
-              </a:spcAft>
-            </a:pPr>
-            <a:r>
-              <a:rPr b="1" sz="950">
-                <a:solidFill>
-                  <a:srgbClr val="F8FAFC"/>
-                </a:solidFill>
-              </a:rPr>
-              <a:t>• Operations: </a:t>
-            </a:r>
-            <a:r>
-              <a:rPr sz="900">
-                <a:solidFill>
-                  <a:srgbClr val="94A3B8"/>
-                </a:solidFill>
-              </a:rPr>
-              <a:t>Disbursement prep &amp; manual fallback channels</a:t>
-            </a:r>
-          </a:p>
-          <a:p>
-            <a:pPr>
-              <a:spcAft>
-                <a:spcPts val="300"/>
-              </a:spcAft>
-            </a:pPr>
-            <a:r>
-              <a:rPr b="1" sz="950">
-                <a:solidFill>
-                  <a:srgbClr val="F8FAFC"/>
-                </a:solidFill>
-              </a:rPr>
-              <a:t>• Credit Bureau (Pool): </a:t>
-            </a:r>
-            <a:r>
-              <a:rPr sz="900">
-                <a:solidFill>
-                  <a:srgbClr val="94A3B8"/>
-                </a:solidFill>
-              </a:rPr>
-              <a:t>External partner exchanging message flows</a:t>
-            </a:r>
-          </a:p>
-        </p:txBody>
-      </p:sp>
-      <p:sp>
-        <p:nvSpPr>
-          <p:cNvPr id="8" name="Rounded Rectangle 7"/>
-          <p:cNvSpPr/>
-          <p:nvPr/>
-        </p:nvSpPr>
-        <p:spPr>
-          <a:xfrm>
-            <a:off x="8046720" y="3886200"/>
-            <a:ext cx="3383280" cy="2423160"/>
-          </a:xfrm>
-          <a:prstGeom prst="roundRect">
-            <a:avLst/>
-          </a:prstGeom>
-          <a:solidFill>
-            <a:srgbClr val="18263E"/>
-          </a:solidFill>
-          <a:ln w="12700">
-            <a:solidFill>
-              <a:srgbClr val="2D4466"/>
-            </a:solidFill>
-          </a:ln>
-        </p:spPr>
-        <p:style>
-          <a:lnRef idx="1">
-            <a:schemeClr val="accent1"/>
-          </a:lnRef>
-          <a:fillRef idx="3">
-            <a:schemeClr val="accent1"/>
-          </a:fillRef>
-          <a:effectRef idx="2">
-            <a:schemeClr val="accent1"/>
-          </a:effectRef>
-          <a:fontRef idx="minor">
-            <a:schemeClr val="lt1"/>
-          </a:fontRef>
-        </p:style>
-        <p:txBody>
-          <a:bodyPr rtlCol="0" anchor="ctr" wrap="square"/>
-          <a:lstStyle/>
-          <a:p>
-            <a:pPr algn="ctr">
-              <a:spcAft>
-                <a:spcPts val="800"/>
-              </a:spcAft>
-              <a:defRPr sz="1100" b="1">
-                <a:solidFill>
-                  <a:srgbClr val="34D399"/>
-                </a:solidFill>
-              </a:defRPr>
-            </a:pPr>
-            <a:r>
-              <a:t>PROCESS BOUNDARIES &amp; METRICS</a:t>
-            </a:r>
-          </a:p>
-          <a:p>
-            <a:pPr>
-              <a:spcAft>
-                <a:spcPts val="400"/>
-              </a:spcAft>
-            </a:pPr>
-            <a:r>
-              <a:rPr b="1" sz="950">
-                <a:solidFill>
-                  <a:srgbClr val="F8FAFC"/>
-                </a:solidFill>
-              </a:rPr>
-              <a:t>✔ Start Event: </a:t>
-            </a:r>
-            <a:r>
-              <a:rPr sz="900">
-                <a:solidFill>
-                  <a:srgbClr val="94A3B8"/>
-                </a:solidFill>
-              </a:rPr>
-              <a:t>Applicant submits online application &amp; docs</a:t>
-            </a:r>
-          </a:p>
-          <a:p>
-            <a:pPr>
-              <a:spcAft>
-                <a:spcPts val="400"/>
-              </a:spcAft>
-            </a:pPr>
-            <a:r>
-              <a:rPr b="1" sz="950">
-                <a:solidFill>
-                  <a:srgbClr val="F8FAFC"/>
-                </a:solidFill>
-              </a:rPr>
-              <a:t>✔ Happy End Event: </a:t>
-            </a:r>
-            <a:r>
-              <a:rPr sz="900">
-                <a:solidFill>
-                  <a:srgbClr val="94A3B8"/>
-                </a:solidFill>
-              </a:rPr>
-              <a:t>Loan Disbursed &amp; Account Created (Success)</a:t>
-            </a:r>
-          </a:p>
-          <a:p>
-            <a:pPr>
-              <a:spcAft>
-                <a:spcPts val="400"/>
-              </a:spcAft>
-            </a:pPr>
-            <a:r>
-              <a:rPr b="1" sz="950">
-                <a:solidFill>
-                  <a:srgbClr val="F8FAFC"/>
-                </a:solidFill>
-              </a:rPr>
-              <a:t>✔ Failure End States (6): </a:t>
-            </a:r>
-            <a:r>
-              <a:rPr sz="900">
-                <a:solidFill>
-                  <a:srgbClr val="94A3B8"/>
-                </a:solidFill>
-              </a:rPr>
-              <a:t>Rejected, Withdrawn, Lapsed, Expired, Fraud Terminated, Disbursement Failed</a:t>
-            </a:r>
-          </a:p>
-          <a:p>
-            <a:pPr>
-              <a:spcAft>
-                <a:spcPts val="400"/>
-              </a:spcAft>
-            </a:pPr>
-            <a:r>
-              <a:rPr b="1" sz="950">
-                <a:solidFill>
-                  <a:srgbClr val="F8FAFC"/>
-                </a:solidFill>
-              </a:rPr>
-              <a:t>✔ Construct Inventory: </a:t>
-            </a:r>
-            <a:r>
-              <a:rPr sz="900">
-                <a:solidFill>
-                  <a:srgbClr val="94A3B8"/>
-                </a:solidFill>
-              </a:rPr>
-              <a:t>28 Total Flow Nodes, 13 Gateways, 4 Boundary Events, 2 Message Flows</a:t>
-            </a:r>
-          </a:p>
-          <a:p>
-            <a:pPr>
-              <a:spcAft>
-                <a:spcPts val="400"/>
-              </a:spcAft>
-            </a:pPr>
-            <a:r>
-              <a:rPr b="1" sz="950">
-                <a:solidFill>
-                  <a:srgbClr val="F8FAFC"/>
-                </a:solidFill>
-              </a:rPr>
-              <a:t>✔ Schema Conformance: </a:t>
-            </a:r>
-            <a:r>
-              <a:rPr sz="900">
-                <a:solidFill>
-                  <a:srgbClr val="94A3B8"/>
-                </a:solidFill>
-              </a:rPr>
-              <a:t>100% Valid BPMN 2.0 XML (Camunda tested)</a:t>
+              <a:t>Rejected, Withdrawn, Application Lapsed, Offer Expired, Fraud Terminated, Disbursement Failed.</a:t>
             </a:r>
           </a:p>
         </p:txBody>
@@ -7147,7 +8170,7 @@
 </p:sld>
 </file>
 
-<file path=ppt/slides/slide4.xml><?xml version="1.0" encoding="utf-8"?>
+<file path=ppt/slides/slide5.xml><?xml version="1.0" encoding="utf-8"?>
 <p:sld xmlns:a="http://schemas.openxmlformats.org/drawingml/2006/main" xmlns:p="http://schemas.openxmlformats.org/presentationml/2006/main" xmlns:r="http://schemas.openxmlformats.org/officeDocument/2006/relationships">
   <p:cSld>
     <p:spTree>
@@ -7209,7 +8232,7 @@
         <p:spPr>
           <a:xfrm>
             <a:off x="731520" y="365760"/>
-            <a:ext cx="3108960" cy="292608"/>
+            <a:ext cx="3840480" cy="292608"/>
           </a:xfrm>
           <a:prstGeom prst="roundRect">
             <a:avLst/>
@@ -7286,7 +8309,7 @@
               </a:defRPr>
             </a:pPr>
             <a:r>
-              <a:t>Task Types Used &amp; Technical Justification</a:t>
+              <a:t>Task Types Used Across Both BPMN Processes</a:t>
             </a:r>
           </a:p>
         </p:txBody>
@@ -7334,9 +8357,9 @@
           <a:p>
             <a:pPr algn="ctr">
               <a:spcAft>
-                <a:spcPts val="1000"/>
-              </a:spcAft>
-              <a:defRPr sz="1300" b="1">
+                <a:spcPts val="400"/>
+              </a:spcAft>
+              <a:defRPr sz="1200" b="1">
                 <a:solidFill>
                   <a:srgbClr val="00D2EB"/>
                 </a:solidFill>
@@ -7348,92 +8371,81 @@
           </a:p>
           <a:p>
             <a:pPr>
-              <a:defRPr sz="950" b="1">
+              <a:spcAft>
+                <a:spcPts val="600"/>
+              </a:spcAft>
+              <a:defRPr sz="900">
                 <a:solidFill>
                   <a:srgbClr val="94A3B8"/>
                 </a:solidFill>
               </a:defRPr>
             </a:pPr>
             <a:r>
-              <a:t>DEFINITION:</a:t>
-            </a:r>
-          </a:p>
-          <a:p>
-            <a:pPr>
-              <a:spcAft>
-                <a:spcPts val="1000"/>
-              </a:spcAft>
-              <a:defRPr sz="1000">
+              <a:t>Def: Human interaction supported by UI</a:t>
+            </a:r>
+          </a:p>
+          <a:p>
+            <a:pPr>
+              <a:spcAft>
+                <a:spcPts val="800"/>
+              </a:spcAft>
+              <a:defRPr sz="850">
                 <a:solidFill>
                   <a:srgbClr val="F8FAFC"/>
                 </a:solidFill>
               </a:defRPr>
             </a:pPr>
             <a:r>
-              <a:t>Human interaction supported by a graphical user interface</a:t>
-            </a:r>
-          </a:p>
-          <a:p>
-            <a:pPr>
-              <a:defRPr sz="950" b="1">
-                <a:solidFill>
-                  <a:srgbClr val="00D2EB"/>
-                </a:solidFill>
-              </a:defRPr>
-            </a:pPr>
-            <a:r>
-              <a:t>PROJECT EXAMPLES:</a:t>
-            </a:r>
-          </a:p>
-          <a:p>
-            <a:pPr>
-              <a:spcAft>
-                <a:spcPts val="1000"/>
-              </a:spcAft>
-              <a:defRPr sz="950">
+              <a:t>Q1 Examples:</a:t>
+            </a:r>
+            <a:br/>
+            <a:r>
+              <a:t>• Prepare &amp; Submit Proposal (Student)</a:t>
+            </a:r>
+            <a:br/>
+            <a:r>
+              <a:t>• Screen Proposal (Coordinator)</a:t>
+            </a:r>
+            <a:br/>
+            <a:r>
+              <a:t>• Evaluate Proposal (Committee)</a:t>
+            </a:r>
+            <a:br/>
+            <a:r>
+              <a:t>• Manual Guide Allocation (Coordinator)</a:t>
+            </a:r>
+            <a:br/>
+            <a:br/>
+            <a:r>
+              <a:t>Q2 Examples:</a:t>
+            </a:r>
+            <a:br/>
+            <a:r>
+              <a:t>• Submit Application (Applicant)</a:t>
+            </a:r>
+            <a:br/>
+            <a:r>
+              <a:t>• Verify Income &amp; Employment (Officer)</a:t>
+            </a:r>
+            <a:br/>
+            <a:r>
+              <a:t>• Underwriter Full Review (Underwriter)</a:t>
+            </a:r>
+            <a:br/>
+            <a:r>
+              <a:t>• E-Sign Loan Agreement (Applicant)</a:t>
+            </a:r>
+          </a:p>
+          <a:p>
+            <a:pPr>
+              <a:defRPr sz="850">
                 <a:solidFill>
                   <a:srgbClr val="94A3B8"/>
                 </a:solidFill>
               </a:defRPr>
             </a:pPr>
             <a:r>
-              <a:t>• Submit Loan Application (Applicant)</a:t>
-            </a:r>
-            <a:br/>
-            <a:r>
-              <a:t>• Underwriter Full Manual Review (Underwriter)</a:t>
-            </a:r>
-            <a:br/>
-            <a:r>
-              <a:t>• E-Sign Loan Agreement (Applicant)</a:t>
-            </a:r>
-            <a:br/>
-            <a:r>
-              <a:t>• Verify Income &amp; Employment (Loan Officer)</a:t>
-            </a:r>
-          </a:p>
-          <a:p>
-            <a:pPr>
-              <a:defRPr sz="950" b="1">
-                <a:solidFill>
-                  <a:srgbClr val="94A3B8"/>
-                </a:solidFill>
-              </a:defRPr>
-            </a:pPr>
-            <a:r>
-              <a:t>WHY THIS TYPE?:</a:t>
-            </a:r>
-          </a:p>
-          <a:p>
-            <a:pPr>
-              <a:defRPr sz="950">
-                <a:solidFill>
-                  <a:srgbClr val="F8FAFC"/>
-                </a:solidFill>
-              </a:defRPr>
-            </a:pPr>
-            <a:r>
-              <a:t>Requires human cognition, subjective judgement, or digital signature input. Cannot be fully automated by a script or API.</a:t>
+              <a:t>Why Chosen? Selected whenever task completion requires human judgement, evaluation, negotiation, or manual form inputs. Cannot be executed by an automated script.</a:t>
             </a:r>
           </a:p>
         </p:txBody>
@@ -7481,9 +8493,9 @@
           <a:p>
             <a:pPr algn="ctr">
               <a:spcAft>
-                <a:spcPts val="1000"/>
-              </a:spcAft>
-              <a:defRPr sz="1300" b="1">
+                <a:spcPts val="400"/>
+              </a:spcAft>
+              <a:defRPr sz="1200" b="1">
                 <a:solidFill>
                   <a:srgbClr val="34D399"/>
                 </a:solidFill>
@@ -7495,96 +8507,81 @@
           </a:p>
           <a:p>
             <a:pPr>
-              <a:defRPr sz="950" b="1">
+              <a:spcAft>
+                <a:spcPts val="600"/>
+              </a:spcAft>
+              <a:defRPr sz="900">
                 <a:solidFill>
                   <a:srgbClr val="94A3B8"/>
                 </a:solidFill>
               </a:defRPr>
             </a:pPr>
             <a:r>
-              <a:t>DEFINITION:</a:t>
-            </a:r>
-          </a:p>
-          <a:p>
-            <a:pPr>
-              <a:spcAft>
-                <a:spcPts val="1000"/>
-              </a:spcAft>
-              <a:defRPr sz="1000">
+              <a:t>Def: Automated system execution</a:t>
+            </a:r>
+          </a:p>
+          <a:p>
+            <a:pPr>
+              <a:spcAft>
+                <a:spcPts val="800"/>
+              </a:spcAft>
+              <a:defRPr sz="850">
                 <a:solidFill>
                   <a:srgbClr val="F8FAFC"/>
                 </a:solidFill>
               </a:defRPr>
             </a:pPr>
             <a:r>
-              <a:t>Automated software execution without human intervention</a:t>
-            </a:r>
-          </a:p>
-          <a:p>
-            <a:pPr>
-              <a:defRPr sz="950" b="1">
-                <a:solidFill>
-                  <a:srgbClr val="34D399"/>
-                </a:solidFill>
-              </a:defRPr>
-            </a:pPr>
-            <a:r>
-              <a:t>PROJECT EXAMPLES:</a:t>
-            </a:r>
-          </a:p>
-          <a:p>
-            <a:pPr>
-              <a:spcAft>
-                <a:spcPts val="1000"/>
-              </a:spcAft>
-              <a:defRPr sz="950">
+              <a:t>Q1 Examples:</a:t>
+            </a:r>
+            <a:br/>
+            <a:r>
+              <a:t>• Validate Document Completeness</a:t>
+            </a:r>
+            <a:br/>
+            <a:r>
+              <a:t>• Validate Team Composition Rules</a:t>
+            </a:r>
+            <a:br/>
+            <a:r>
+              <a:t>• Similarity &amp; Duplicate Topic Check</a:t>
+            </a:r>
+            <a:br/>
+            <a:r>
+              <a:t>• Auto-Allocate Guide</a:t>
+            </a:r>
+            <a:br/>
+            <a:br/>
+            <a:r>
+              <a:t>Q2 Examples:</a:t>
+            </a:r>
+            <a:br/>
+            <a:r>
+              <a:t>• KYC Identity Verification API</a:t>
+            </a:r>
+            <a:br/>
+            <a:r>
+              <a:t>• AML Watchlist Screening API</a:t>
+            </a:r>
+            <a:br/>
+            <a:r>
+              <a:t>• Automated DTI Calculation</a:t>
+            </a:r>
+            <a:br/>
+            <a:r>
+              <a:t>• Disburse Loan Funds (Core Banking)</a:t>
+            </a:r>
+          </a:p>
+          <a:p>
+            <a:pPr>
+              <a:defRPr sz="850">
                 <a:solidFill>
                   <a:srgbClr val="94A3B8"/>
                 </a:solidFill>
               </a:defRPr>
             </a:pPr>
             <a:r>
-              <a:t>• Check Document Completeness</a:t>
-            </a:r>
-            <a:br/>
-            <a:r>
-              <a:t>• KYC Identity Verification API</a:t>
-            </a:r>
-            <a:br/>
-            <a:r>
-              <a:t>• AML Watchlist Screening</a:t>
-            </a:r>
-            <a:br/>
-            <a:r>
-              <a:t>• Calculate Eligibility &amp; Risk Score</a:t>
-            </a:r>
-            <a:br/>
-            <a:r>
-              <a:t>• Disburse Loan Funds (Core Banking)</a:t>
-            </a:r>
-          </a:p>
-          <a:p>
-            <a:pPr>
-              <a:defRPr sz="950" b="1">
-                <a:solidFill>
-                  <a:srgbClr val="94A3B8"/>
-                </a:solidFill>
-              </a:defRPr>
-            </a:pPr>
-            <a:r>
-              <a:t>WHY THIS TYPE?:</a:t>
-            </a:r>
-          </a:p>
-          <a:p>
-            <a:pPr>
-              <a:defRPr sz="950">
-                <a:solidFill>
-                  <a:srgbClr val="F8FAFC"/>
-                </a:solidFill>
-              </a:defRPr>
-            </a:pPr>
-            <a:r>
-              <a:t>Executes deterministic computational logic, external REST/SOAP API calls, or database operations with immediate automated return.</a:t>
+              <a:t>Why Chosen? Selected for deterministic computational logic, API integrations, and database operations without human intervention. Ensures instant SLA execution.</a:t>
             </a:r>
           </a:p>
         </p:txBody>
@@ -7632,102 +8629,87 @@
           <a:p>
             <a:pPr algn="ctr">
               <a:spcAft>
-                <a:spcPts val="1000"/>
-              </a:spcAft>
-              <a:defRPr sz="1300" b="1">
+                <a:spcPts val="400"/>
+              </a:spcAft>
+              <a:defRPr sz="1200" b="1">
                 <a:solidFill>
                   <a:srgbClr val="60A5FA"/>
                 </a:solidFill>
               </a:defRPr>
             </a:pPr>
             <a:r>
-              <a:t>✉️  SEND TASK</a:t>
-            </a:r>
-          </a:p>
-          <a:p>
-            <a:pPr>
-              <a:defRPr sz="950" b="1">
+              <a:t>✉️ / 📥  SEND TASK &amp; CATCH</a:t>
+            </a:r>
+          </a:p>
+          <a:p>
+            <a:pPr>
+              <a:spcAft>
+                <a:spcPts val="600"/>
+              </a:spcAft>
+              <a:defRPr sz="900">
                 <a:solidFill>
                   <a:srgbClr val="94A3B8"/>
                 </a:solidFill>
               </a:defRPr>
             </a:pPr>
             <a:r>
-              <a:t>DEFINITION:</a:t>
-            </a:r>
-          </a:p>
-          <a:p>
-            <a:pPr>
-              <a:spcAft>
-                <a:spcPts val="1000"/>
-              </a:spcAft>
-              <a:defRPr sz="1000">
+              <a:t>Def: Outbound message dispatch &amp; asynchronous catch</a:t>
+            </a:r>
+          </a:p>
+          <a:p>
+            <a:pPr>
+              <a:spcAft>
+                <a:spcPts val="800"/>
+              </a:spcAft>
+              <a:defRPr sz="850">
                 <a:solidFill>
                   <a:srgbClr val="F8FAFC"/>
                 </a:solidFill>
               </a:defRPr>
             </a:pPr>
             <a:r>
-              <a:t>Outbound message dispatch to an external pool or participant</a:t>
-            </a:r>
-          </a:p>
-          <a:p>
-            <a:pPr>
-              <a:defRPr sz="950" b="1">
-                <a:solidFill>
-                  <a:srgbClr val="60A5FA"/>
-                </a:solidFill>
-              </a:defRPr>
-            </a:pPr>
-            <a:r>
-              <a:t>PROJECT EXAMPLES:</a:t>
-            </a:r>
-          </a:p>
-          <a:p>
-            <a:pPr>
-              <a:spcAft>
-                <a:spcPts val="1000"/>
-              </a:spcAft>
-              <a:defRPr sz="950">
+              <a:t>Q1 Examples:</a:t>
+            </a:r>
+            <a:br/>
+            <a:r>
+              <a:t>• Send Task: Guide Allocation Request</a:t>
+            </a:r>
+            <a:br/>
+            <a:r>
+              <a:t>• Send Task: Revision Feedback</a:t>
+            </a:r>
+            <a:br/>
+            <a:r>
+              <a:t>• Message Catch: Receive Guide Acceptance</a:t>
+            </a:r>
+            <a:br/>
+            <a:br/>
+            <a:r>
+              <a:t>Q2 Examples:</a:t>
+            </a:r>
+            <a:br/>
+            <a:r>
+              <a:t>• Send Task: Request Credit Report</a:t>
+            </a:r>
+            <a:br/>
+            <a:r>
+              <a:t>• Message Catch: Receive Credit Report</a:t>
+            </a:r>
+            <a:br/>
+            <a:r>
+              <a:t>• Send Task: Send Loan Offer Letter</a:t>
+            </a:r>
+          </a:p>
+          <a:p>
+            <a:pPr>
+              <a:defRPr sz="850">
                 <a:solidFill>
                   <a:srgbClr val="94A3B8"/>
                 </a:solidFill>
               </a:defRPr>
             </a:pPr>
             <a:r>
-              <a:t>• Request Credit Report (dispatched to Credit Bureau external pool)</a:t>
-            </a:r>
-            <a:br/>
-            <a:r>
-              <a:t>• Send Loan Offer to Applicant</a:t>
-            </a:r>
-            <a:br/>
-            <a:r>
-              <a:t>• Notify Applicant of Disbursement</a:t>
-            </a:r>
-          </a:p>
-          <a:p>
-            <a:pPr>
-              <a:defRPr sz="950" b="1">
-                <a:solidFill>
-                  <a:srgbClr val="94A3B8"/>
-                </a:solidFill>
-              </a:defRPr>
-            </a:pPr>
-            <a:r>
-              <a:t>WHY THIS TYPE?:</a:t>
-            </a:r>
-          </a:p>
-          <a:p>
-            <a:pPr>
-              <a:defRPr sz="950">
-                <a:solidFill>
-                  <a:srgbClr val="F8FAFC"/>
-                </a:solidFill>
-              </a:defRPr>
-            </a:pPr>
-            <a:r>
-              <a:t>Models active dispatch of asynchronous communications crossing participant boundaries. Decouples sender execution from recipient processing.</a:t>
+              <a:t>Why Chosen? Selected to model active dispatch and asynchronous waiting states across organizational or participant boundaries without thread-blocking.</a:t>
             </a:r>
           </a:p>
         </p:txBody>
@@ -7775,94 +8757,80 @@
           <a:p>
             <a:pPr algn="ctr">
               <a:spcAft>
-                <a:spcPts val="1000"/>
-              </a:spcAft>
-              <a:defRPr sz="1300" b="1">
+                <a:spcPts val="400"/>
+              </a:spcAft>
+              <a:defRPr sz="1200" b="1">
                 <a:solidFill>
                   <a:srgbClr val="C084FC"/>
                 </a:solidFill>
               </a:defRPr>
             </a:pPr>
             <a:r>
-              <a:t>📥  RECEIVE TASK / CATCH</a:t>
-            </a:r>
-          </a:p>
-          <a:p>
-            <a:pPr>
-              <a:defRPr sz="950" b="1">
+              <a:t>📊 / 📜  BUSINESS RULE &amp; SCRIPT</a:t>
+            </a:r>
+          </a:p>
+          <a:p>
+            <a:pPr>
+              <a:spcAft>
+                <a:spcPts val="600"/>
+              </a:spcAft>
+              <a:defRPr sz="900">
                 <a:solidFill>
                   <a:srgbClr val="94A3B8"/>
                 </a:solidFill>
               </a:defRPr>
             </a:pPr>
             <a:r>
-              <a:t>DEFINITION:</a:t>
-            </a:r>
-          </a:p>
-          <a:p>
-            <a:pPr>
-              <a:spcAft>
-                <a:spcPts val="1000"/>
-              </a:spcAft>
-              <a:defRPr sz="1000">
+              <a:t>Def: Decision tables and procedural utilities</a:t>
+            </a:r>
+          </a:p>
+          <a:p>
+            <a:pPr>
+              <a:spcAft>
+                <a:spcPts val="800"/>
+              </a:spcAft>
+              <a:defRPr sz="850">
                 <a:solidFill>
                   <a:srgbClr val="F8FAFC"/>
                 </a:solidFill>
               </a:defRPr>
             </a:pPr>
             <a:r>
-              <a:t>Waiting state for incoming message from an external pool</a:t>
-            </a:r>
-          </a:p>
-          <a:p>
-            <a:pPr>
-              <a:defRPr sz="950" b="1">
-                <a:solidFill>
-                  <a:srgbClr val="C084FC"/>
-                </a:solidFill>
-              </a:defRPr>
-            </a:pPr>
-            <a:r>
-              <a:t>PROJECT EXAMPLES:</a:t>
-            </a:r>
-          </a:p>
-          <a:p>
-            <a:pPr>
-              <a:spcAft>
-                <a:spcPts val="1000"/>
-              </a:spcAft>
-              <a:defRPr sz="950">
+              <a:t>Q1 Business Rule Task:</a:t>
+            </a:r>
+            <a:br/>
+            <a:r>
+              <a:t>• Check Guide Availability, Workload &amp; Domain Match (Evaluates DMN decision table)</a:t>
+            </a:r>
+            <a:br/>
+            <a:br/>
+            <a:r>
+              <a:t>Q1 Script Task:</a:t>
+            </a:r>
+            <a:br/>
+            <a:r>
+              <a:t>• Log Withdrawal &amp; Release Guide Pre-Assignment (Internal compensation cleanup)</a:t>
+            </a:r>
+            <a:br/>
+            <a:br/>
+            <a:r>
+              <a:t>Q2 Service Scoring:</a:t>
+            </a:r>
+            <a:br/>
+            <a:r>
+              <a:t>• Calculate Eligibility Score (Engine API)</a:t>
+            </a:r>
+          </a:p>
+          <a:p>
+            <a:pPr>
+              <a:defRPr sz="850">
                 <a:solidFill>
                   <a:srgbClr val="94A3B8"/>
                 </a:solidFill>
               </a:defRPr>
             </a:pPr>
             <a:r>
-              <a:t>• Receive Credit Report (Core Banking lane catches response from Credit Bureau pool)</a:t>
-            </a:r>
-          </a:p>
-          <a:p>
-            <a:pPr>
-              <a:defRPr sz="950" b="1">
-                <a:solidFill>
-                  <a:srgbClr val="94A3B8"/>
-                </a:solidFill>
-              </a:defRPr>
-            </a:pPr>
-            <a:r>
-              <a:t>WHY THIS TYPE?:</a:t>
-            </a:r>
-          </a:p>
-          <a:p>
-            <a:pPr>
-              <a:defRPr sz="950">
-                <a:solidFill>
-                  <a:srgbClr val="F8FAFC"/>
-                </a:solidFill>
-              </a:defRPr>
-            </a:pPr>
-            <a:r>
-              <a:t>Halts sequence flow progression until a correlated message payload arrives from an independent external system. Non-polling asynchronous wait.</a:t>
+              <a:t>Why Chosen? Business Rule Tasks decouple dynamic business policy (faculty workload limits) from process code. Script tasks perform rapid local memory cleanups.</a:t>
             </a:r>
           </a:p>
         </p:txBody>
@@ -7875,7 +8843,7 @@
 </p:sld>
 </file>
 
-<file path=ppt/slides/slide5.xml><?xml version="1.0" encoding="utf-8"?>
+<file path=ppt/slides/slide6.xml><?xml version="1.0" encoding="utf-8"?>
 <p:sld xmlns:a="http://schemas.openxmlformats.org/drawingml/2006/main" xmlns:p="http://schemas.openxmlformats.org/presentationml/2006/main" xmlns:r="http://schemas.openxmlformats.org/officeDocument/2006/relationships">
   <p:cSld>
     <p:spTree>
@@ -7937,7 +8905,7 @@
         <p:spPr>
           <a:xfrm>
             <a:off x="731520" y="365760"/>
-            <a:ext cx="3108960" cy="292608"/>
+            <a:ext cx="3840480" cy="292608"/>
           </a:xfrm>
           <a:prstGeom prst="roundRect">
             <a:avLst/>
@@ -8014,7 +8982,1295 @@
               </a:defRPr>
             </a:pPr>
             <a:r>
-              <a:t>Gateways Architecture &amp; Concurrency Control</a:t>
+              <a:t>Gateways &amp; Concurrency Control (Q1 vs. Q2)</a:t>
+            </a:r>
+          </a:p>
+        </p:txBody>
+      </p:sp>
+      <p:sp>
+        <p:nvSpPr>
+          <p:cNvPr id="5" name="Rounded Rectangle 4"/>
+          <p:cNvSpPr/>
+          <p:nvPr/>
+        </p:nvSpPr>
+        <p:spPr>
+          <a:xfrm>
+            <a:off x="731520" y="1371600"/>
+            <a:ext cx="3447288" cy="4937760"/>
+          </a:xfrm>
+          <a:prstGeom prst="roundRect">
+            <a:avLst/>
+          </a:prstGeom>
+          <a:solidFill>
+            <a:srgbClr val="18263E"/>
+          </a:solidFill>
+          <a:ln w="12700">
+            <a:solidFill>
+              <a:srgbClr val="2D4466"/>
+            </a:solidFill>
+          </a:ln>
+        </p:spPr>
+        <p:style>
+          <a:lnRef idx="1">
+            <a:schemeClr val="accent1"/>
+          </a:lnRef>
+          <a:fillRef idx="3">
+            <a:schemeClr val="accent1"/>
+          </a:fillRef>
+          <a:effectRef idx="2">
+            <a:schemeClr val="accent1"/>
+          </a:effectRef>
+          <a:fontRef idx="minor">
+            <a:schemeClr val="lt1"/>
+          </a:fontRef>
+        </p:style>
+        <p:txBody>
+          <a:bodyPr rtlCol="0" anchor="ctr" wrap="square"/>
+          <a:lstStyle/>
+          <a:p>
+            <a:pPr algn="ctr">
+              <a:spcAft>
+                <a:spcPts val="200"/>
+              </a:spcAft>
+              <a:defRPr sz="1150" b="1">
+                <a:solidFill>
+                  <a:srgbClr val="00D2EB"/>
+                </a:solidFill>
+              </a:defRPr>
+            </a:pPr>
+            <a:r>
+              <a:t>EXCLUSIVE GATEWAY (XOR ✕)</a:t>
+            </a:r>
+          </a:p>
+          <a:p>
+            <a:pPr>
+              <a:spcAft>
+                <a:spcPts val="600"/>
+              </a:spcAft>
+              <a:defRPr sz="950" b="1">
+                <a:solidFill>
+                  <a:srgbClr val="94A3B8"/>
+                </a:solidFill>
+              </a:defRPr>
+            </a:pPr>
+            <a:r>
+              <a:t>Decision Routing (Both Q1 &amp; Q2)</a:t>
+            </a:r>
+          </a:p>
+          <a:p>
+            <a:pPr>
+              <a:spcAft>
+                <a:spcPts val="800"/>
+              </a:spcAft>
+              <a:defRPr sz="900">
+                <a:solidFill>
+                  <a:srgbClr val="F8FAFC"/>
+                </a:solidFill>
+              </a:defRPr>
+            </a:pPr>
+            <a:r>
+              <a:t>Semantics: Evaluates condition expressions and activates EXACTLY ONE outgoing branch. On merge, passes any arriving token immediately.</a:t>
+            </a:r>
+          </a:p>
+          <a:p>
+            <a:pPr>
+              <a:spcAft>
+                <a:spcPts val="800"/>
+              </a:spcAft>
+              <a:defRPr sz="850">
+                <a:solidFill>
+                  <a:srgbClr val="94A3B8"/>
+                </a:solidFill>
+              </a:defRPr>
+            </a:pPr>
+            <a:r>
+              <a:t>• Q1: 'Proposal Valid?' (Valid vs Incomplete)</a:t>
+            </a:r>
+            <a:br/>
+            <a:r>
+              <a:t>• Q1: 'Committee Decision' (Approve / Revise / Reject)</a:t>
+            </a:r>
+            <a:br/>
+            <a:r>
+              <a:t>• Q1: 'Guide Available?' (Found vs Manual Allocation)</a:t>
+            </a:r>
+            <a:br/>
+            <a:r>
+              <a:t>• Q2: 'KYC Passed?' (Pass vs Manual Review vs Terminate)</a:t>
+            </a:r>
+            <a:br/>
+            <a:r>
+              <a:t>• Q2: 'Eligibility Decision' (Auto-Approve / Underwriter / Reject)</a:t>
+            </a:r>
+            <a:br/>
+            <a:r>
+              <a:t>• Q2: 'Underwriter Decision' (Approve / Collateral / Reject)</a:t>
+            </a:r>
+            <a:br/>
+            <a:r>
+              <a:t>• Q2: 'Offer Decision' (Accept / Counter / Withdraw)</a:t>
+            </a:r>
+          </a:p>
+          <a:p>
+            <a:pPr>
+              <a:defRPr sz="850">
+                <a:solidFill>
+                  <a:srgbClr val="F8FAFC"/>
+                </a:solidFill>
+              </a:defRPr>
+            </a:pPr>
+            <a:r>
+              <a:t>Why Used? Loan decisions and proposal verdicts are mutually exclusive; an application cannot be simultaneously approved and rejected. XOR ensures deterministic execution.</a:t>
+            </a:r>
+          </a:p>
+        </p:txBody>
+      </p:sp>
+      <p:sp>
+        <p:nvSpPr>
+          <p:cNvPr id="6" name="Rounded Rectangle 5"/>
+          <p:cNvSpPr/>
+          <p:nvPr/>
+        </p:nvSpPr>
+        <p:spPr>
+          <a:xfrm>
+            <a:off x="4361688" y="1371600"/>
+            <a:ext cx="3447288" cy="4937760"/>
+          </a:xfrm>
+          <a:prstGeom prst="roundRect">
+            <a:avLst/>
+          </a:prstGeom>
+          <a:solidFill>
+            <a:srgbClr val="18263E"/>
+          </a:solidFill>
+          <a:ln w="12700">
+            <a:solidFill>
+              <a:srgbClr val="2D4466"/>
+            </a:solidFill>
+          </a:ln>
+        </p:spPr>
+        <p:style>
+          <a:lnRef idx="1">
+            <a:schemeClr val="accent1"/>
+          </a:lnRef>
+          <a:fillRef idx="3">
+            <a:schemeClr val="accent1"/>
+          </a:fillRef>
+          <a:effectRef idx="2">
+            <a:schemeClr val="accent1"/>
+          </a:effectRef>
+          <a:fontRef idx="minor">
+            <a:schemeClr val="lt1"/>
+          </a:fontRef>
+        </p:style>
+        <p:txBody>
+          <a:bodyPr rtlCol="0" anchor="ctr" wrap="square"/>
+          <a:lstStyle/>
+          <a:p>
+            <a:pPr algn="ctr">
+              <a:spcAft>
+                <a:spcPts val="200"/>
+              </a:spcAft>
+              <a:defRPr sz="1150" b="1">
+                <a:solidFill>
+                  <a:srgbClr val="34D399"/>
+                </a:solidFill>
+              </a:defRPr>
+            </a:pPr>
+            <a:r>
+              <a:t>PARALLEL GATEWAY (AND ✛)</a:t>
+            </a:r>
+          </a:p>
+          <a:p>
+            <a:pPr>
+              <a:spcAft>
+                <a:spcPts val="600"/>
+              </a:spcAft>
+              <a:defRPr sz="950" b="1">
+                <a:solidFill>
+                  <a:srgbClr val="94A3B8"/>
+                </a:solidFill>
+              </a:defRPr>
+            </a:pPr>
+            <a:r>
+              <a:t>Concurrency Synchronization (Q2)</a:t>
+            </a:r>
+          </a:p>
+          <a:p>
+            <a:pPr>
+              <a:spcAft>
+                <a:spcPts val="800"/>
+              </a:spcAft>
+              <a:defRPr sz="900">
+                <a:solidFill>
+                  <a:srgbClr val="F8FAFC"/>
+                </a:solidFill>
+              </a:defRPr>
+            </a:pPr>
+            <a:r>
+              <a:t>Semantics: Forks one incoming path into multiple concurrent branches without conditions. The join waits for ALL incoming paths before proceeding.</a:t>
+            </a:r>
+          </a:p>
+          <a:p>
+            <a:pPr>
+              <a:spcAft>
+                <a:spcPts val="800"/>
+              </a:spcAft>
+              <a:defRPr sz="850">
+                <a:solidFill>
+                  <a:srgbClr val="94A3B8"/>
+                </a:solidFill>
+              </a:defRPr>
+            </a:pPr>
+            <a:r>
+              <a:t>• Q2 Fork: 'Start Parallel Verification Checks'</a:t>
+            </a:r>
+            <a:br/>
+            <a:r>
+              <a:t>  - Branch 1: KYC Identity &amp; AML Screening</a:t>
+            </a:r>
+            <a:br/>
+            <a:r>
+              <a:t>  - Branch 2: Credit Bureau Score Retrieval</a:t>
+            </a:r>
+            <a:br/>
+            <a:r>
+              <a:t>  - Branch 3: Debt-to-Income (DTI) Calculation</a:t>
+            </a:r>
+            <a:br/>
+            <a:r>
+              <a:t>• Q2 Join: 'All Parallel Checks Complete'</a:t>
+            </a:r>
+            <a:br/>
+            <a:r>
+              <a:t>  - Synchronizes all 3 branches before income verification.</a:t>
+            </a:r>
+          </a:p>
+          <a:p>
+            <a:pPr>
+              <a:defRPr sz="850">
+                <a:solidFill>
+                  <a:srgbClr val="F8FAFC"/>
+                </a:solidFill>
+              </a:defRPr>
+            </a:pPr>
+            <a:r>
+              <a:t>Why Used? Running checks serially creates additive cycle time. Parallel execution cuts processing latency while the synchronized join prevents token race conditions.</a:t>
+            </a:r>
+          </a:p>
+        </p:txBody>
+      </p:sp>
+      <p:sp>
+        <p:nvSpPr>
+          <p:cNvPr id="7" name="Rounded Rectangle 6"/>
+          <p:cNvSpPr/>
+          <p:nvPr/>
+        </p:nvSpPr>
+        <p:spPr>
+          <a:xfrm>
+            <a:off x="7991856" y="1371600"/>
+            <a:ext cx="3447288" cy="4937760"/>
+          </a:xfrm>
+          <a:prstGeom prst="roundRect">
+            <a:avLst/>
+          </a:prstGeom>
+          <a:solidFill>
+            <a:srgbClr val="18263E"/>
+          </a:solidFill>
+          <a:ln w="12700">
+            <a:solidFill>
+              <a:srgbClr val="2D4466"/>
+            </a:solidFill>
+          </a:ln>
+        </p:spPr>
+        <p:style>
+          <a:lnRef idx="1">
+            <a:schemeClr val="accent1"/>
+          </a:lnRef>
+          <a:fillRef idx="3">
+            <a:schemeClr val="accent1"/>
+          </a:fillRef>
+          <a:effectRef idx="2">
+            <a:schemeClr val="accent1"/>
+          </a:effectRef>
+          <a:fontRef idx="minor">
+            <a:schemeClr val="lt1"/>
+          </a:fontRef>
+        </p:style>
+        <p:txBody>
+          <a:bodyPr rtlCol="0" anchor="ctr" wrap="square"/>
+          <a:lstStyle/>
+          <a:p>
+            <a:pPr algn="ctr">
+              <a:spcAft>
+                <a:spcPts val="200"/>
+              </a:spcAft>
+              <a:defRPr sz="1150" b="1">
+                <a:solidFill>
+                  <a:srgbClr val="FB923C"/>
+                </a:solidFill>
+              </a:defRPr>
+            </a:pPr>
+            <a:r>
+              <a:t>EVENT-BASED GATEWAY (⬡)</a:t>
+            </a:r>
+          </a:p>
+          <a:p>
+            <a:pPr>
+              <a:spcAft>
+                <a:spcPts val="600"/>
+              </a:spcAft>
+              <a:defRPr sz="950" b="1">
+                <a:solidFill>
+                  <a:srgbClr val="94A3B8"/>
+                </a:solidFill>
+              </a:defRPr>
+            </a:pPr>
+            <a:r>
+              <a:t>Competing Event Selection (Q1)</a:t>
+            </a:r>
+          </a:p>
+          <a:p>
+            <a:pPr>
+              <a:spcAft>
+                <a:spcPts val="800"/>
+              </a:spcAft>
+              <a:defRPr sz="900">
+                <a:solidFill>
+                  <a:srgbClr val="F8FAFC"/>
+                </a:solidFill>
+              </a:defRPr>
+            </a:pPr>
+            <a:r>
+              <a:t>Semantics: Routes based on whichever external event occurs first, rather than evaluated data expressions.</a:t>
+            </a:r>
+          </a:p>
+          <a:p>
+            <a:pPr>
+              <a:spcAft>
+                <a:spcPts val="800"/>
+              </a:spcAft>
+              <a:defRPr sz="850">
+                <a:solidFill>
+                  <a:srgbClr val="94A3B8"/>
+                </a:solidFill>
+              </a:defRPr>
+            </a:pPr>
+            <a:r>
+              <a:t>• Q1: 'Wait for Guide Acceptance or Timeout'</a:t>
+            </a:r>
+            <a:br/>
+            <a:r>
+              <a:t>  - Branch A: Intermediate Message Catch ('Guide Accepts Request')</a:t>
+            </a:r>
+            <a:br/>
+            <a:r>
+              <a:t>  - Branch B: Intermediate Timer Event ('3-Day Guide Response Timeout')</a:t>
+            </a:r>
+            <a:br/>
+            <a:r>
+              <a:t>  - Result: If guide accepts, proceeds to record allocation; if 3 days elapse, diverts to Coordinator Manual Allocation.</a:t>
+            </a:r>
+          </a:p>
+          <a:p>
+            <a:pPr>
+              <a:defRPr sz="850">
+                <a:solidFill>
+                  <a:srgbClr val="F8FAFC"/>
+                </a:solidFill>
+              </a:defRPr>
+            </a:pPr>
+            <a:r>
+              <a:t>Why Used? Models real-world asynchronous competition: the process cannot know in advance whether the faculty member will accept or ignore the request.</a:t>
+            </a:r>
+          </a:p>
+        </p:txBody>
+      </p:sp>
+    </p:spTree>
+  </p:cSld>
+  <p:clrMapOvr>
+    <a:masterClrMapping/>
+  </p:clrMapOvr>
+</p:sld>
+</file>
+
+<file path=ppt/slides/slide7.xml><?xml version="1.0" encoding="utf-8"?>
+<p:sld xmlns:a="http://schemas.openxmlformats.org/drawingml/2006/main" xmlns:p="http://schemas.openxmlformats.org/presentationml/2006/main" xmlns:r="http://schemas.openxmlformats.org/officeDocument/2006/relationships">
+  <p:cSld>
+    <p:spTree>
+      <p:nvGrpSpPr>
+        <p:cNvPr id="1" name=""/>
+        <p:cNvGrpSpPr/>
+        <p:nvPr/>
+      </p:nvGrpSpPr>
+      <p:grpSpPr/>
+      <p:sp>
+        <p:nvSpPr>
+          <p:cNvPr id="2" name="Rectangle 1"/>
+          <p:cNvSpPr/>
+          <p:nvPr/>
+        </p:nvSpPr>
+        <p:spPr>
+          <a:xfrm>
+            <a:off x="0" y="0"/>
+            <a:ext cx="12191695" cy="6858000"/>
+          </a:xfrm>
+          <a:prstGeom prst="rect">
+            <a:avLst/>
+          </a:prstGeom>
+          <a:solidFill>
+            <a:srgbClr val="0B192C"/>
+          </a:solidFill>
+          <a:ln>
+            <a:noFill/>
+          </a:ln>
+        </p:spPr>
+        <p:style>
+          <a:lnRef idx="1">
+            <a:schemeClr val="accent1"/>
+          </a:lnRef>
+          <a:fillRef idx="3">
+            <a:schemeClr val="accent1"/>
+          </a:fillRef>
+          <a:effectRef idx="2">
+            <a:schemeClr val="accent1"/>
+          </a:effectRef>
+          <a:fontRef idx="minor">
+            <a:schemeClr val="lt1"/>
+          </a:fontRef>
+        </p:style>
+        <p:txBody>
+          <a:bodyPr rtlCol="0" anchor="ctr"/>
+          <a:lstStyle/>
+          <a:p>
+            <a:pPr algn="ctr"/>
+          </a:p>
+        </p:txBody>
+      </p:sp>
+      <p:sp>
+        <p:nvSpPr>
+          <p:cNvPr id="3" name="Rounded Rectangle 2"/>
+          <p:cNvSpPr/>
+          <p:nvPr/>
+        </p:nvSpPr>
+        <p:spPr>
+          <a:xfrm>
+            <a:off x="731520" y="365760"/>
+            <a:ext cx="3840480" cy="292608"/>
+          </a:xfrm>
+          <a:prstGeom prst="roundRect">
+            <a:avLst/>
+          </a:prstGeom>
+          <a:solidFill>
+            <a:srgbClr val="18263E"/>
+          </a:solidFill>
+          <a:ln w="12700">
+            <a:solidFill>
+              <a:srgbClr val="00D2EB"/>
+            </a:solidFill>
+          </a:ln>
+        </p:spPr>
+        <p:style>
+          <a:lnRef idx="1">
+            <a:schemeClr val="accent1"/>
+          </a:lnRef>
+          <a:fillRef idx="3">
+            <a:schemeClr val="accent1"/>
+          </a:fillRef>
+          <a:effectRef idx="2">
+            <a:schemeClr val="accent1"/>
+          </a:effectRef>
+          <a:fontRef idx="minor">
+            <a:schemeClr val="lt1"/>
+          </a:fontRef>
+        </p:style>
+        <p:txBody>
+          <a:bodyPr rtlCol="0" anchor="ctr"/>
+          <a:lstStyle/>
+          <a:p>
+            <a:pPr algn="ctr">
+              <a:defRPr sz="950" b="1">
+                <a:solidFill>
+                  <a:srgbClr val="00D2EB"/>
+                </a:solidFill>
+                <a:latin typeface="Arial"/>
+              </a:defRPr>
+            </a:pPr>
+            <a:r>
+              <a:t>EVENT ARCHITECTURE</a:t>
+            </a:r>
+          </a:p>
+        </p:txBody>
+      </p:sp>
+      <p:sp>
+        <p:nvSpPr>
+          <p:cNvPr id="4" name="TextBox 3"/>
+          <p:cNvSpPr txBox="1"/>
+          <p:nvPr/>
+        </p:nvSpPr>
+        <p:spPr>
+          <a:xfrm>
+            <a:off x="731520" y="713232"/>
+            <a:ext cx="10698480" cy="594360"/>
+          </a:xfrm>
+          <a:prstGeom prst="rect">
+            <a:avLst/>
+          </a:prstGeom>
+          <a:noFill/>
+        </p:spPr>
+        <p:txBody>
+          <a:bodyPr wrap="square">
+            <a:spAutoFit/>
+          </a:bodyPr>
+          <a:lstStyle/>
+          <a:p>
+            <a:pPr>
+              <a:defRPr sz="2200" b="1">
+                <a:solidFill>
+                  <a:srgbClr val="F8FAFC"/>
+                </a:solidFill>
+                <a:latin typeface="Arial"/>
+              </a:defRPr>
+            </a:pPr>
+            <a:r>
+              <a:t>Intermediate &amp; Boundary Events Deep-Dive</a:t>
+            </a:r>
+          </a:p>
+        </p:txBody>
+      </p:sp>
+      <p:sp>
+        <p:nvSpPr>
+          <p:cNvPr id="5" name="Rounded Rectangle 4"/>
+          <p:cNvSpPr/>
+          <p:nvPr/>
+        </p:nvSpPr>
+        <p:spPr>
+          <a:xfrm>
+            <a:off x="731520" y="1371600"/>
+            <a:ext cx="10698480" cy="777240"/>
+          </a:xfrm>
+          <a:prstGeom prst="roundRect">
+            <a:avLst/>
+          </a:prstGeom>
+          <a:solidFill>
+            <a:srgbClr val="18263E"/>
+          </a:solidFill>
+          <a:ln w="12700">
+            <a:solidFill>
+              <a:srgbClr val="2D4466"/>
+            </a:solidFill>
+          </a:ln>
+        </p:spPr>
+        <p:style>
+          <a:lnRef idx="1">
+            <a:schemeClr val="accent1"/>
+          </a:lnRef>
+          <a:fillRef idx="3">
+            <a:schemeClr val="accent1"/>
+          </a:fillRef>
+          <a:effectRef idx="2">
+            <a:schemeClr val="accent1"/>
+          </a:effectRef>
+          <a:fontRef idx="minor">
+            <a:schemeClr val="lt1"/>
+          </a:fontRef>
+        </p:style>
+        <p:txBody>
+          <a:bodyPr rtlCol="0" anchor="ctr" wrap="square"/>
+          <a:lstStyle/>
+          <a:p>
+            <a:pPr algn="ctr">
+              <a:defRPr sz="1050" b="1">
+                <a:solidFill>
+                  <a:srgbClr val="00D2EB"/>
+                </a:solidFill>
+              </a:defRPr>
+            </a:pPr>
+            <a:r>
+              <a:t>CRITICAL DISTINCTION: INLINE INTERMEDIATE EVENTS VS. TASK BOUNDARY EVENTS</a:t>
+            </a:r>
+          </a:p>
+          <a:p>
+            <a:pPr>
+              <a:defRPr sz="950">
+                <a:solidFill>
+                  <a:srgbClr val="F8FAFC"/>
+                </a:solidFill>
+              </a:defRPr>
+            </a:pPr>
+            <a:r>
+              <a:t>• Inline Intermediate Events sit in the sequence flow and pause token progress until an external trigger arrives.</a:t>
+            </a:r>
+            <a:br/>
+            <a:r>
+              <a:t>• Boundary Events attach to task perimeters; they monitor active execution and catch external timeouts, faults, or cancellations.</a:t>
+            </a:r>
+          </a:p>
+        </p:txBody>
+      </p:sp>
+      <p:sp>
+        <p:nvSpPr>
+          <p:cNvPr id="6" name="Rounded Rectangle 5"/>
+          <p:cNvSpPr/>
+          <p:nvPr/>
+        </p:nvSpPr>
+        <p:spPr>
+          <a:xfrm>
+            <a:off x="731520" y="2286000"/>
+            <a:ext cx="2542032" cy="4023360"/>
+          </a:xfrm>
+          <a:prstGeom prst="roundRect">
+            <a:avLst/>
+          </a:prstGeom>
+          <a:solidFill>
+            <a:srgbClr val="18263E"/>
+          </a:solidFill>
+          <a:ln w="12700">
+            <a:solidFill>
+              <a:srgbClr val="2D4466"/>
+            </a:solidFill>
+          </a:ln>
+        </p:spPr>
+        <p:style>
+          <a:lnRef idx="1">
+            <a:schemeClr val="accent1"/>
+          </a:lnRef>
+          <a:fillRef idx="3">
+            <a:schemeClr val="accent1"/>
+          </a:fillRef>
+          <a:effectRef idx="2">
+            <a:schemeClr val="accent1"/>
+          </a:effectRef>
+          <a:fontRef idx="minor">
+            <a:schemeClr val="lt1"/>
+          </a:fontRef>
+        </p:style>
+        <p:txBody>
+          <a:bodyPr rtlCol="0" anchor="ctr" wrap="square"/>
+          <a:lstStyle/>
+          <a:p>
+            <a:pPr algn="ctr">
+              <a:spcAft>
+                <a:spcPts val="200"/>
+              </a:spcAft>
+              <a:defRPr sz="1100" b="1">
+                <a:solidFill>
+                  <a:srgbClr val="00D2EB"/>
+                </a:solidFill>
+              </a:defRPr>
+            </a:pPr>
+            <a:r>
+              <a:t>INLINE MESSAGE CATCH</a:t>
+            </a:r>
+          </a:p>
+          <a:p>
+            <a:pPr>
+              <a:defRPr sz="900" b="1">
+                <a:solidFill>
+                  <a:srgbClr val="94A3B8"/>
+                </a:solidFill>
+              </a:defRPr>
+            </a:pPr>
+            <a:r>
+              <a:t>Symbol: ✉️ (Catch)</a:t>
+            </a:r>
+          </a:p>
+          <a:p>
+            <a:pPr>
+              <a:spcAft>
+                <a:spcPts val="600"/>
+              </a:spcAft>
+              <a:defRPr sz="900">
+                <a:solidFill>
+                  <a:srgbClr val="F8FAFC"/>
+                </a:solidFill>
+              </a:defRPr>
+            </a:pPr>
+            <a:r>
+              <a:t>Type: Sequence Flow Intermediate Event</a:t>
+            </a:r>
+          </a:p>
+          <a:p>
+            <a:pPr>
+              <a:spcAft>
+                <a:spcPts val="600"/>
+              </a:spcAft>
+              <a:defRPr sz="850">
+                <a:solidFill>
+                  <a:srgbClr val="94A3B8"/>
+                </a:solidFill>
+              </a:defRPr>
+            </a:pPr>
+            <a:r>
+              <a:t>Q1: 'Receive Revision Request'</a:t>
+            </a:r>
+            <a:br/>
+            <a:r>
+              <a:t>Student waits for committee feedback.</a:t>
+            </a:r>
+            <a:br/>
+            <a:r>
+              <a:t>Q1: 'Receive Guide Acceptance'</a:t>
+            </a:r>
+            <a:br/>
+            <a:r>
+              <a:t>System waits for guide response.</a:t>
+            </a:r>
+            <a:br/>
+            <a:r>
+              <a:t>Q2: 'Receive Credit Report'</a:t>
+            </a:r>
+            <a:br/>
+            <a:r>
+              <a:t>Core Banking waits for Credit Bureau report.</a:t>
+            </a:r>
+          </a:p>
+          <a:p>
+            <a:pPr>
+              <a:defRPr sz="850">
+                <a:solidFill>
+                  <a:srgbClr val="F8FAFC"/>
+                </a:solidFill>
+              </a:defRPr>
+            </a:pPr>
+            <a:r>
+              <a:t>Why Needed? Models non-polling asynchronous waiting. Decouples collaborating parties.</a:t>
+            </a:r>
+          </a:p>
+        </p:txBody>
+      </p:sp>
+      <p:sp>
+        <p:nvSpPr>
+          <p:cNvPr id="7" name="Rounded Rectangle 6"/>
+          <p:cNvSpPr/>
+          <p:nvPr/>
+        </p:nvSpPr>
+        <p:spPr>
+          <a:xfrm>
+            <a:off x="3456432" y="2286000"/>
+            <a:ext cx="2542032" cy="4023360"/>
+          </a:xfrm>
+          <a:prstGeom prst="roundRect">
+            <a:avLst/>
+          </a:prstGeom>
+          <a:solidFill>
+            <a:srgbClr val="18263E"/>
+          </a:solidFill>
+          <a:ln w="12700">
+            <a:solidFill>
+              <a:srgbClr val="2D4466"/>
+            </a:solidFill>
+          </a:ln>
+        </p:spPr>
+        <p:style>
+          <a:lnRef idx="1">
+            <a:schemeClr val="accent1"/>
+          </a:lnRef>
+          <a:fillRef idx="3">
+            <a:schemeClr val="accent1"/>
+          </a:fillRef>
+          <a:effectRef idx="2">
+            <a:schemeClr val="accent1"/>
+          </a:effectRef>
+          <a:fontRef idx="minor">
+            <a:schemeClr val="lt1"/>
+          </a:fontRef>
+        </p:style>
+        <p:txBody>
+          <a:bodyPr rtlCol="0" anchor="ctr" wrap="square"/>
+          <a:lstStyle/>
+          <a:p>
+            <a:pPr algn="ctr">
+              <a:spcAft>
+                <a:spcPts val="200"/>
+              </a:spcAft>
+              <a:defRPr sz="1100" b="1">
+                <a:solidFill>
+                  <a:srgbClr val="60A5FA"/>
+                </a:solidFill>
+              </a:defRPr>
+            </a:pPr>
+            <a:r>
+              <a:t>NON-INTERRUPTING TIMER</a:t>
+            </a:r>
+          </a:p>
+          <a:p>
+            <a:pPr>
+              <a:defRPr sz="900" b="1">
+                <a:solidFill>
+                  <a:srgbClr val="94A3B8"/>
+                </a:solidFill>
+              </a:defRPr>
+            </a:pPr>
+            <a:r>
+              <a:t>Symbol: ⏱️ (Dashed Ring)</a:t>
+            </a:r>
+          </a:p>
+          <a:p>
+            <a:pPr>
+              <a:spcAft>
+                <a:spcPts val="600"/>
+              </a:spcAft>
+              <a:defRPr sz="900">
+                <a:solidFill>
+                  <a:srgbClr val="F8FAFC"/>
+                </a:solidFill>
+              </a:defRPr>
+            </a:pPr>
+            <a:r>
+              <a:t>Type: Boundary Event on Task</a:t>
+            </a:r>
+          </a:p>
+          <a:p>
+            <a:pPr>
+              <a:spcAft>
+                <a:spcPts val="600"/>
+              </a:spcAft>
+              <a:defRPr sz="850">
+                <a:solidFill>
+                  <a:srgbClr val="94A3B8"/>
+                </a:solidFill>
+              </a:defRPr>
+            </a:pPr>
+            <a:r>
+              <a:t>Q1: '10-Day Review SLA Timer'</a:t>
+            </a:r>
+            <a:br/>
+            <a:r>
+              <a:t>Fires HoD escalation reminder on committee.</a:t>
+            </a:r>
+            <a:br/>
+            <a:r>
+              <a:t>Q2: '24-Hour Credit Bureau Timer'</a:t>
+            </a:r>
+            <a:br/>
+            <a:r>
+              <a:t>Fires automated retry request.</a:t>
+            </a:r>
+            <a:br/>
+            <a:r>
+              <a:t>Q2: '48-Hour E-Sign SLA Timer'</a:t>
+            </a:r>
+            <a:br/>
+            <a:r>
+              <a:t>Triggers wet-signature alert to operations.</a:t>
+            </a:r>
+          </a:p>
+          <a:p>
+            <a:pPr>
+              <a:defRPr sz="850">
+                <a:solidFill>
+                  <a:srgbClr val="F8FAFC"/>
+                </a:solidFill>
+              </a:defRPr>
+            </a:pPr>
+            <a:r>
+              <a:t>Why Needed? Fires parallel escalations without aborting or cancelling the primary active user task.</a:t>
+            </a:r>
+          </a:p>
+        </p:txBody>
+      </p:sp>
+      <p:sp>
+        <p:nvSpPr>
+          <p:cNvPr id="8" name="Rounded Rectangle 7"/>
+          <p:cNvSpPr/>
+          <p:nvPr/>
+        </p:nvSpPr>
+        <p:spPr>
+          <a:xfrm>
+            <a:off x="6181344" y="2286000"/>
+            <a:ext cx="2542032" cy="4023360"/>
+          </a:xfrm>
+          <a:prstGeom prst="roundRect">
+            <a:avLst/>
+          </a:prstGeom>
+          <a:solidFill>
+            <a:srgbClr val="18263E"/>
+          </a:solidFill>
+          <a:ln w="12700">
+            <a:solidFill>
+              <a:srgbClr val="2D4466"/>
+            </a:solidFill>
+          </a:ln>
+        </p:spPr>
+        <p:style>
+          <a:lnRef idx="1">
+            <a:schemeClr val="accent1"/>
+          </a:lnRef>
+          <a:fillRef idx="3">
+            <a:schemeClr val="accent1"/>
+          </a:fillRef>
+          <a:effectRef idx="2">
+            <a:schemeClr val="accent1"/>
+          </a:effectRef>
+          <a:fontRef idx="minor">
+            <a:schemeClr val="lt1"/>
+          </a:fontRef>
+        </p:style>
+        <p:txBody>
+          <a:bodyPr rtlCol="0" anchor="ctr" wrap="square"/>
+          <a:lstStyle/>
+          <a:p>
+            <a:pPr algn="ctr">
+              <a:spcAft>
+                <a:spcPts val="200"/>
+              </a:spcAft>
+              <a:defRPr sz="1100" b="1">
+                <a:solidFill>
+                  <a:srgbClr val="FB923C"/>
+                </a:solidFill>
+              </a:defRPr>
+            </a:pPr>
+            <a:r>
+              <a:t>INTERRUPTING TIMER</a:t>
+            </a:r>
+          </a:p>
+          <a:p>
+            <a:pPr>
+              <a:defRPr sz="900" b="1">
+                <a:solidFill>
+                  <a:srgbClr val="94A3B8"/>
+                </a:solidFill>
+              </a:defRPr>
+            </a:pPr>
+            <a:r>
+              <a:t>Symbol: ⏱️ (Solid Ring)</a:t>
+            </a:r>
+          </a:p>
+          <a:p>
+            <a:pPr>
+              <a:spcAft>
+                <a:spcPts val="600"/>
+              </a:spcAft>
+              <a:defRPr sz="900">
+                <a:solidFill>
+                  <a:srgbClr val="F8FAFC"/>
+                </a:solidFill>
+              </a:defRPr>
+            </a:pPr>
+            <a:r>
+              <a:t>Type: Boundary Event on Task</a:t>
+            </a:r>
+          </a:p>
+          <a:p>
+            <a:pPr>
+              <a:spcAft>
+                <a:spcPts val="600"/>
+              </a:spcAft>
+              <a:defRPr sz="850">
+                <a:solidFill>
+                  <a:srgbClr val="94A3B8"/>
+                </a:solidFill>
+              </a:defRPr>
+            </a:pPr>
+            <a:r>
+              <a:t>Q1: '14-Day Submission Deadline'</a:t>
+            </a:r>
+            <a:br/>
+            <a:r>
+              <a:t>Cancels proposal prep → EndEvent: Lapsed.</a:t>
+            </a:r>
+            <a:br/>
+            <a:r>
+              <a:t>Q1: '7-Day Revision Deadline'</a:t>
+            </a:r>
+            <a:br/>
+            <a:r>
+              <a:t>Limits student revision window.</a:t>
+            </a:r>
+            <a:br/>
+            <a:r>
+              <a:t>Q2: '7-Day Offer Validity Timer'</a:t>
+            </a:r>
+            <a:br/>
+            <a:r>
+              <a:t>Cancels offer review → EndEvent: Offer Expired.</a:t>
+            </a:r>
+          </a:p>
+          <a:p>
+            <a:pPr>
+              <a:defRPr sz="850">
+                <a:solidFill>
+                  <a:srgbClr val="F8FAFC"/>
+                </a:solidFill>
+              </a:defRPr>
+            </a:pPr>
+            <a:r>
+              <a:t>Why Needed? Enforces hard deadlines. Instantly cancels the underlying task and diverts flow to expiry end.</a:t>
+            </a:r>
+          </a:p>
+        </p:txBody>
+      </p:sp>
+      <p:sp>
+        <p:nvSpPr>
+          <p:cNvPr id="9" name="Rounded Rectangle 8"/>
+          <p:cNvSpPr/>
+          <p:nvPr/>
+        </p:nvSpPr>
+        <p:spPr>
+          <a:xfrm>
+            <a:off x="8906256" y="2286000"/>
+            <a:ext cx="2542032" cy="4023360"/>
+          </a:xfrm>
+          <a:prstGeom prst="roundRect">
+            <a:avLst/>
+          </a:prstGeom>
+          <a:solidFill>
+            <a:srgbClr val="18263E"/>
+          </a:solidFill>
+          <a:ln w="12700">
+            <a:solidFill>
+              <a:srgbClr val="2D4466"/>
+            </a:solidFill>
+          </a:ln>
+        </p:spPr>
+        <p:style>
+          <a:lnRef idx="1">
+            <a:schemeClr val="accent1"/>
+          </a:lnRef>
+          <a:fillRef idx="3">
+            <a:schemeClr val="accent1"/>
+          </a:fillRef>
+          <a:effectRef idx="2">
+            <a:schemeClr val="accent1"/>
+          </a:effectRef>
+          <a:fontRef idx="minor">
+            <a:schemeClr val="lt1"/>
+          </a:fontRef>
+        </p:style>
+        <p:txBody>
+          <a:bodyPr rtlCol="0" anchor="ctr" wrap="square"/>
+          <a:lstStyle/>
+          <a:p>
+            <a:pPr algn="ctr">
+              <a:spcAft>
+                <a:spcPts val="200"/>
+              </a:spcAft>
+              <a:defRPr sz="1100" b="1">
+                <a:solidFill>
+                  <a:srgbClr val="F87171"/>
+                </a:solidFill>
+              </a:defRPr>
+            </a:pPr>
+            <a:r>
+              <a:t>INTERRUPTING ERROR BOUNDARY</a:t>
+            </a:r>
+          </a:p>
+          <a:p>
+            <a:pPr>
+              <a:defRPr sz="900" b="1">
+                <a:solidFill>
+                  <a:srgbClr val="94A3B8"/>
+                </a:solidFill>
+              </a:defRPr>
+            </a:pPr>
+            <a:r>
+              <a:t>Symbol: ⚡ (Solid Ring)</a:t>
+            </a:r>
+          </a:p>
+          <a:p>
+            <a:pPr>
+              <a:spcAft>
+                <a:spcPts val="600"/>
+              </a:spcAft>
+              <a:defRPr sz="900">
+                <a:solidFill>
+                  <a:srgbClr val="F8FAFC"/>
+                </a:solidFill>
+              </a:defRPr>
+            </a:pPr>
+            <a:r>
+              <a:t>Type: Boundary Event on Task</a:t>
+            </a:r>
+          </a:p>
+          <a:p>
+            <a:pPr>
+              <a:spcAft>
+                <a:spcPts val="600"/>
+              </a:spcAft>
+              <a:defRPr sz="850">
+                <a:solidFill>
+                  <a:srgbClr val="94A3B8"/>
+                </a:solidFill>
+              </a:defRPr>
+            </a:pPr>
+            <a:r>
+              <a:t>Q1: 'Notification Delivery Failure'</a:t>
+            </a:r>
+            <a:br/>
+            <a:r>
+              <a:t>Catches portal/SMS outage → IT recovery.</a:t>
+            </a:r>
+            <a:br/>
+            <a:r>
+              <a:t>Q2: 'Core Banking Disbursement Fault'</a:t>
+            </a:r>
+            <a:br/>
+            <a:r>
+              <a:t>Catches NEFT/RTGS transaction failure on Disburse Funds task → Operations retry.</a:t>
+            </a:r>
+          </a:p>
+          <a:p>
+            <a:pPr>
+              <a:defRPr sz="850">
+                <a:solidFill>
+                  <a:srgbClr val="F8FAFC"/>
+                </a:solidFill>
+              </a:defRPr>
+            </a:pPr>
+            <a:r>
+              <a:t>Why Needed? Traps technical and transaction exceptions, preventing untracked financial or system states.</a:t>
+            </a:r>
+          </a:p>
+        </p:txBody>
+      </p:sp>
+    </p:spTree>
+  </p:cSld>
+  <p:clrMapOvr>
+    <a:masterClrMapping/>
+  </p:clrMapOvr>
+</p:sld>
+</file>
+
+<file path=ppt/slides/slide8.xml><?xml version="1.0" encoding="utf-8"?>
+<p:sld xmlns:a="http://schemas.openxmlformats.org/drawingml/2006/main" xmlns:p="http://schemas.openxmlformats.org/presentationml/2006/main" xmlns:r="http://schemas.openxmlformats.org/officeDocument/2006/relationships">
+  <p:cSld>
+    <p:spTree>
+      <p:nvGrpSpPr>
+        <p:cNvPr id="1" name=""/>
+        <p:cNvGrpSpPr/>
+        <p:nvPr/>
+      </p:nvGrpSpPr>
+      <p:grpSpPr/>
+      <p:sp>
+        <p:nvSpPr>
+          <p:cNvPr id="2" name="Rectangle 1"/>
+          <p:cNvSpPr/>
+          <p:nvPr/>
+        </p:nvSpPr>
+        <p:spPr>
+          <a:xfrm>
+            <a:off x="0" y="0"/>
+            <a:ext cx="12191695" cy="6858000"/>
+          </a:xfrm>
+          <a:prstGeom prst="rect">
+            <a:avLst/>
+          </a:prstGeom>
+          <a:solidFill>
+            <a:srgbClr val="0B192C"/>
+          </a:solidFill>
+          <a:ln>
+            <a:noFill/>
+          </a:ln>
+        </p:spPr>
+        <p:style>
+          <a:lnRef idx="1">
+            <a:schemeClr val="accent1"/>
+          </a:lnRef>
+          <a:fillRef idx="3">
+            <a:schemeClr val="accent1"/>
+          </a:fillRef>
+          <a:effectRef idx="2">
+            <a:schemeClr val="accent1"/>
+          </a:effectRef>
+          <a:fontRef idx="minor">
+            <a:schemeClr val="lt1"/>
+          </a:fontRef>
+        </p:style>
+        <p:txBody>
+          <a:bodyPr rtlCol="0" anchor="ctr"/>
+          <a:lstStyle/>
+          <a:p>
+            <a:pPr algn="ctr"/>
+          </a:p>
+        </p:txBody>
+      </p:sp>
+      <p:sp>
+        <p:nvSpPr>
+          <p:cNvPr id="3" name="Rounded Rectangle 2"/>
+          <p:cNvSpPr/>
+          <p:nvPr/>
+        </p:nvSpPr>
+        <p:spPr>
+          <a:xfrm>
+            <a:off x="731520" y="365760"/>
+            <a:ext cx="3840480" cy="292608"/>
+          </a:xfrm>
+          <a:prstGeom prst="roundRect">
+            <a:avLst/>
+          </a:prstGeom>
+          <a:solidFill>
+            <a:srgbClr val="18263E"/>
+          </a:solidFill>
+          <a:ln w="12700">
+            <a:solidFill>
+              <a:srgbClr val="00D2EB"/>
+            </a:solidFill>
+          </a:ln>
+        </p:spPr>
+        <p:style>
+          <a:lnRef idx="1">
+            <a:schemeClr val="accent1"/>
+          </a:lnRef>
+          <a:fillRef idx="3">
+            <a:schemeClr val="accent1"/>
+          </a:fillRef>
+          <a:effectRef idx="2">
+            <a:schemeClr val="accent1"/>
+          </a:effectRef>
+          <a:fontRef idx="minor">
+            <a:schemeClr val="lt1"/>
+          </a:fontRef>
+        </p:style>
+        <p:txBody>
+          <a:bodyPr rtlCol="0" anchor="ctr"/>
+          <a:lstStyle/>
+          <a:p>
+            <a:pPr algn="ctr">
+              <a:defRPr sz="950" b="1">
+                <a:solidFill>
+                  <a:srgbClr val="00D2EB"/>
+                </a:solidFill>
+                <a:latin typeface="Arial"/>
+              </a:defRPr>
+            </a:pPr>
+            <a:r>
+              <a:t>EXECUTION LIFECYCLE</a:t>
+            </a:r>
+          </a:p>
+        </p:txBody>
+      </p:sp>
+      <p:sp>
+        <p:nvSpPr>
+          <p:cNvPr id="4" name="TextBox 3"/>
+          <p:cNvSpPr txBox="1"/>
+          <p:nvPr/>
+        </p:nvSpPr>
+        <p:spPr>
+          <a:xfrm>
+            <a:off x="731520" y="713232"/>
+            <a:ext cx="10698480" cy="594360"/>
+          </a:xfrm>
+          <a:prstGeom prst="rect">
+            <a:avLst/>
+          </a:prstGeom>
+          <a:noFill/>
+        </p:spPr>
+        <p:txBody>
+          <a:bodyPr wrap="square">
+            <a:spAutoFit/>
+          </a:bodyPr>
+          <a:lstStyle/>
+          <a:p>
+            <a:pPr>
+              <a:defRPr sz="2200" b="1">
+                <a:solidFill>
+                  <a:srgbClr val="F8FAFC"/>
+                </a:solidFill>
+                <a:latin typeface="Arial"/>
+              </a:defRPr>
+            </a:pPr>
+            <a:r>
+              <a:t>Happy Path &amp; Business-Critical Flows (Q1 vs. Q2)</a:t>
             </a:r>
           </a:p>
         </p:txBody>
@@ -8062,126 +10318,226 @@
           <a:p>
             <a:pPr algn="ctr">
               <a:spcAft>
-                <a:spcPts val="800"/>
-              </a:spcAft>
-              <a:defRPr sz="1200" b="1">
-                <a:solidFill>
-                  <a:srgbClr val="34D399"/>
-                </a:solidFill>
-              </a:defRPr>
-            </a:pPr>
-            <a:r>
-              <a:t>✛  PARALLEL GATEWAY (AND) — CONCURRENCY</a:t>
-            </a:r>
-          </a:p>
-          <a:p>
-            <a:pPr>
-              <a:spcAft>
-                <a:spcPts val="1000"/>
-              </a:spcAft>
-              <a:defRPr sz="1000">
-                <a:solidFill>
-                  <a:srgbClr val="94A3B8"/>
-                </a:solidFill>
-              </a:defRPr>
-            </a:pPr>
-            <a:r>
-              <a:t>BPMN Symbol: Diamond with plus sign (+) marker</a:t>
-            </a:r>
-          </a:p>
-          <a:p>
-            <a:pPr>
-              <a:spcAft>
-                <a:spcPts val="800"/>
-              </a:spcAft>
-            </a:pPr>
-            <a:r>
-              <a:rPr b="1" sz="1050">
+                <a:spcPts val="600"/>
+              </a:spcAft>
+              <a:defRPr sz="1100" b="1">
+                <a:solidFill>
+                  <a:srgbClr val="00D2EB"/>
+                </a:solidFill>
+              </a:defRPr>
+            </a:pPr>
+            <a:r>
+              <a:t>QUESTION 1 HAPPY PATH (ACADEMIC ALLOCATION)</a:t>
+            </a:r>
+          </a:p>
+          <a:p>
+            <a:pPr>
+              <a:spcAft>
+                <a:spcPts val="200"/>
+              </a:spcAft>
+              <a:defRPr sz="850">
                 <a:solidFill>
                   <a:srgbClr val="F8FAFC"/>
                 </a:solidFill>
-              </a:rPr>
-              <a:t>Purpose &amp; Semantics: </a:t>
-            </a:r>
-            <a:r>
-              <a:rPr sz="1000">
-                <a:solidFill>
-                  <a:srgbClr val="94A3B8"/>
-                </a:solidFill>
-              </a:rPr>
-              <a:t>Forks one incoming sequence flow into multiple concurrent execution paths without condition evaluation. The join waits for ALL incoming paths to complete before continuing.</a:t>
-            </a:r>
-          </a:p>
-          <a:p>
-            <a:pPr>
-              <a:spcAft>
-                <a:spcPts val="800"/>
-              </a:spcAft>
-            </a:pPr>
-            <a:r>
-              <a:rPr b="1" sz="1050">
+              </a:defRPr>
+            </a:pPr>
+            <a:r>
+              <a:t>1. Start Event: Student prepares and submits proposal form.</a:t>
+            </a:r>
+          </a:p>
+          <a:p>
+            <a:pPr>
+              <a:spcAft>
+                <a:spcPts val="200"/>
+              </a:spcAft>
+              <a:defRPr sz="850">
                 <a:solidFill>
                   <a:srgbClr val="F8FAFC"/>
                 </a:solidFill>
-              </a:rPr>
-              <a:t>Exact Model Location: </a:t>
-            </a:r>
-            <a:r>
-              <a:rPr sz="1000">
-                <a:solidFill>
-                  <a:srgbClr val="94A3B8"/>
-                </a:solidFill>
-              </a:rPr>
-              <a:t>Fork: 'Start Parallel Verification Checks'
-Join: 'All Parallel Checks Complete'</a:t>
-            </a:r>
-          </a:p>
-          <a:p>
-            <a:pPr>
-              <a:spcAft>
-                <a:spcPts val="800"/>
-              </a:spcAft>
-            </a:pPr>
-            <a:r>
-              <a:rPr b="1" sz="1050">
+              </a:defRPr>
+            </a:pPr>
+            <a:r>
+              <a:t>2. Service Task: System validates document completeness.</a:t>
+            </a:r>
+          </a:p>
+          <a:p>
+            <a:pPr>
+              <a:spcAft>
+                <a:spcPts val="200"/>
+              </a:spcAft>
+              <a:defRPr sz="850">
                 <a:solidFill>
                   <a:srgbClr val="F8FAFC"/>
                 </a:solidFill>
-              </a:rPr>
-              <a:t>The Three Concurrent Branches: </a:t>
-            </a:r>
-            <a:r>
-              <a:rPr sz="1000">
-                <a:solidFill>
-                  <a:srgbClr val="94A3B8"/>
-                </a:solidFill>
-              </a:rPr>
-              <a:t>1. Fraud &amp; Compliance Lane: Automated KYC &amp; AML screening.
-2. Core Banking Lane: Outbound Credit Bureau request &amp; catch.
-3. Core Banking Lane: Automated DTI ratio calculation.</a:t>
-            </a:r>
-          </a:p>
-          <a:p>
-            <a:pPr>
-              <a:spcAft>
-                <a:spcPts val="800"/>
-              </a:spcAft>
-            </a:pPr>
-            <a:r>
-              <a:rPr b="1" sz="1050">
+              </a:defRPr>
+            </a:pPr>
+            <a:r>
+              <a:t>3. Service Task: System verifies team composition rules.</a:t>
+            </a:r>
+          </a:p>
+          <a:p>
+            <a:pPr>
+              <a:spcAft>
+                <a:spcPts val="200"/>
+              </a:spcAft>
+              <a:defRPr sz="850">
                 <a:solidFill>
                   <a:srgbClr val="F8FAFC"/>
                 </a:solidFill>
-              </a:rPr>
-              <a:t>Why AND is Mandatory Here: </a:t>
-            </a:r>
-            <a:r>
-              <a:rPr sz="1000">
-                <a:solidFill>
-                  <a:srgbClr val="94A3B8"/>
-                </a:solidFill>
-              </a:rPr>
-              <a:t>If these checks ran sequentially, total onboarding time would be additive (SLA penalty). Running them in parallel drastically reduces latency. Synchronizing them at the join ensures the loan officer has complete data before manual underwriting begins.</a:t>
+              </a:defRPr>
+            </a:pPr>
+            <a:r>
+              <a:t>4. User Task: Coordinator screens proposal for eligibility.</a:t>
+            </a:r>
+          </a:p>
+          <a:p>
+            <a:pPr>
+              <a:spcAft>
+                <a:spcPts val="200"/>
+              </a:spcAft>
+              <a:defRPr sz="850">
+                <a:solidFill>
+                  <a:srgbClr val="F8FAFC"/>
+                </a:solidFill>
+              </a:defRPr>
+            </a:pPr>
+            <a:r>
+              <a:t>5. Service Task: System executes similarity / duplicate check.</a:t>
+            </a:r>
+          </a:p>
+          <a:p>
+            <a:pPr>
+              <a:spcAft>
+                <a:spcPts val="200"/>
+              </a:spcAft>
+              <a:defRPr sz="850">
+                <a:solidFill>
+                  <a:srgbClr val="F8FAFC"/>
+                </a:solidFill>
+              </a:defRPr>
+            </a:pPr>
+            <a:r>
+              <a:t>6. User Task: Review Committee evaluates and APPROVES proposal.</a:t>
+            </a:r>
+          </a:p>
+          <a:p>
+            <a:pPr>
+              <a:spcAft>
+                <a:spcPts val="200"/>
+              </a:spcAft>
+              <a:defRPr sz="850">
+                <a:solidFill>
+                  <a:srgbClr val="F8FAFC"/>
+                </a:solidFill>
+              </a:defRPr>
+            </a:pPr>
+            <a:r>
+              <a:t>7. Business Rule Task: DMN checks guide workload and domain.</a:t>
+            </a:r>
+          </a:p>
+          <a:p>
+            <a:pPr>
+              <a:spcAft>
+                <a:spcPts val="200"/>
+              </a:spcAft>
+              <a:defRPr sz="850">
+                <a:solidFill>
+                  <a:srgbClr val="F8FAFC"/>
+                </a:solidFill>
+              </a:defRPr>
+            </a:pPr>
+            <a:r>
+              <a:t>8. Service Task: System executes automated guide allocation.</a:t>
+            </a:r>
+          </a:p>
+          <a:p>
+            <a:pPr>
+              <a:spcAft>
+                <a:spcPts val="200"/>
+              </a:spcAft>
+              <a:defRPr sz="850">
+                <a:solidFill>
+                  <a:srgbClr val="F8FAFC"/>
+                </a:solidFill>
+              </a:defRPr>
+            </a:pPr>
+            <a:r>
+              <a:t>9. Send Task: System dispatches allocation request to guide.</a:t>
+            </a:r>
+          </a:p>
+          <a:p>
+            <a:pPr>
+              <a:spcAft>
+                <a:spcPts val="200"/>
+              </a:spcAft>
+              <a:defRPr sz="850">
+                <a:solidFill>
+                  <a:srgbClr val="F8FAFC"/>
+                </a:solidFill>
+              </a:defRPr>
+            </a:pPr>
+            <a:r>
+              <a:t>10. Event Catch: Guide accepts request within 3-day SLA.</a:t>
+            </a:r>
+          </a:p>
+          <a:p>
+            <a:pPr>
+              <a:spcAft>
+                <a:spcPts val="200"/>
+              </a:spcAft>
+              <a:defRPr sz="850">
+                <a:solidFill>
+                  <a:srgbClr val="F8FAFC"/>
+                </a:solidFill>
+              </a:defRPr>
+            </a:pPr>
+            <a:r>
+              <a:t>11. Service Task: System formally records allocation in DB.</a:t>
+            </a:r>
+          </a:p>
+          <a:p>
+            <a:pPr>
+              <a:spcAft>
+                <a:spcPts val="200"/>
+              </a:spcAft>
+              <a:defRPr sz="850">
+                <a:solidFill>
+                  <a:srgbClr val="F8FAFC"/>
+                </a:solidFill>
+              </a:defRPr>
+            </a:pPr>
+            <a:r>
+              <a:t>12. Send Task: System dispatches confirmation to student team.</a:t>
+            </a:r>
+          </a:p>
+          <a:p>
+            <a:pPr>
+              <a:spcAft>
+                <a:spcPts val="200"/>
+              </a:spcAft>
+              <a:defRPr sz="850">
+                <a:solidFill>
+                  <a:srgbClr val="F8FAFC"/>
+                </a:solidFill>
+              </a:defRPr>
+            </a:pPr>
+            <a:r>
+              <a:t>13. User Task: Student acknowledges guide assignment.</a:t>
+            </a:r>
+          </a:p>
+          <a:p>
+            <a:pPr>
+              <a:spcAft>
+                <a:spcPts val="200"/>
+              </a:spcAft>
+              <a:defRPr sz="850">
+                <a:solidFill>
+                  <a:srgbClr val="F8FAFC"/>
+                </a:solidFill>
+              </a:defRPr>
+            </a:pPr>
+            <a:r>
+              <a:t>14. SUCCESS END: Project Allocated &amp; Guide Confirmed.</a:t>
             </a:r>
           </a:p>
         </p:txBody>
@@ -8229,104 +10585,226 @@
           <a:p>
             <a:pPr algn="ctr">
               <a:spcAft>
-                <a:spcPts val="800"/>
-              </a:spcAft>
-              <a:defRPr sz="1200" b="1">
-                <a:solidFill>
-                  <a:srgbClr val="00D2EB"/>
-                </a:solidFill>
-              </a:defRPr>
-            </a:pPr>
-            <a:r>
-              <a:t>✕  EXCLUSIVE GATEWAY (XOR) — DECISION ROUTING</a:t>
-            </a:r>
-          </a:p>
-          <a:p>
-            <a:pPr>
-              <a:spcAft>
-                <a:spcPts val="1000"/>
-              </a:spcAft>
-              <a:defRPr sz="1000">
+                <a:spcPts val="600"/>
+              </a:spcAft>
+              <a:defRPr sz="1100" b="1">
+                <a:solidFill>
+                  <a:srgbClr val="34D399"/>
+                </a:solidFill>
+              </a:defRPr>
+            </a:pPr>
+            <a:r>
+              <a:t>QUESTION 2 HAPPY PATH &amp; TERMINOLOGY DEFENCE</a:t>
+            </a:r>
+          </a:p>
+          <a:p>
+            <a:pPr>
+              <a:spcAft>
+                <a:spcPts val="200"/>
+              </a:spcAft>
+              <a:defRPr sz="850">
+                <a:solidFill>
+                  <a:srgbClr val="F8FAFC"/>
+                </a:solidFill>
+              </a:defRPr>
+            </a:pPr>
+            <a:r>
+              <a:t>1. Start Event: Applicant submits loan application &amp; documents.</a:t>
+            </a:r>
+          </a:p>
+          <a:p>
+            <a:pPr>
+              <a:spcAft>
+                <a:spcPts val="200"/>
+              </a:spcAft>
+              <a:defRPr sz="850">
+                <a:solidFill>
+                  <a:srgbClr val="F8FAFC"/>
+                </a:solidFill>
+              </a:defRPr>
+            </a:pPr>
+            <a:r>
+              <a:t>2. Service Task: Completeness check validates document schema.</a:t>
+            </a:r>
+          </a:p>
+          <a:p>
+            <a:pPr>
+              <a:spcAft>
+                <a:spcPts val="200"/>
+              </a:spcAft>
+              <a:defRPr sz="850">
+                <a:solidFill>
+                  <a:srgbClr val="F8FAFC"/>
+                </a:solidFill>
+              </a:defRPr>
+            </a:pPr>
+            <a:r>
+              <a:t>3. Parallel Split: Triggers KYC/AML, Credit Bureau &amp; DTI checks.</a:t>
+            </a:r>
+          </a:p>
+          <a:p>
+            <a:pPr>
+              <a:spcAft>
+                <a:spcPts val="200"/>
+              </a:spcAft>
+              <a:defRPr sz="850">
+                <a:solidFill>
+                  <a:srgbClr val="F8FAFC"/>
+                </a:solidFill>
+              </a:defRPr>
+            </a:pPr>
+            <a:r>
+              <a:t>4. Parallel Join: Synchronizes all 3 successful background checks.</a:t>
+            </a:r>
+          </a:p>
+          <a:p>
+            <a:pPr>
+              <a:spcAft>
+                <a:spcPts val="200"/>
+              </a:spcAft>
+              <a:defRPr sz="850">
+                <a:solidFill>
+                  <a:srgbClr val="F8FAFC"/>
+                </a:solidFill>
+              </a:defRPr>
+            </a:pPr>
+            <a:r>
+              <a:t>5. User Task: Loan Officer verifies income &amp; employment.</a:t>
+            </a:r>
+          </a:p>
+          <a:p>
+            <a:pPr>
+              <a:spcAft>
+                <a:spcPts val="200"/>
+              </a:spcAft>
+              <a:defRPr sz="850">
+                <a:solidFill>
+                  <a:srgbClr val="F8FAFC"/>
+                </a:solidFill>
+              </a:defRPr>
+            </a:pPr>
+            <a:r>
+              <a:t>6. Service Task: Scoring engine calculates Auto-Approval score.</a:t>
+            </a:r>
+          </a:p>
+          <a:p>
+            <a:pPr>
+              <a:spcAft>
+                <a:spcPts val="200"/>
+              </a:spcAft>
+              <a:defRPr sz="850">
+                <a:solidFill>
+                  <a:srgbClr val="F8FAFC"/>
+                </a:solidFill>
+              </a:defRPr>
+            </a:pPr>
+            <a:r>
+              <a:t>7. Send Task: Officer generates &amp; dispatches loan offer letter.</a:t>
+            </a:r>
+          </a:p>
+          <a:p>
+            <a:pPr>
+              <a:spcAft>
+                <a:spcPts val="200"/>
+              </a:spcAft>
+              <a:defRPr sz="850">
+                <a:solidFill>
+                  <a:srgbClr val="F8FAFC"/>
+                </a:solidFill>
+              </a:defRPr>
+            </a:pPr>
+            <a:r>
+              <a:t>8. User Task: Applicant reviews &amp; ACCEPTS offer within 7 days.</a:t>
+            </a:r>
+          </a:p>
+          <a:p>
+            <a:pPr>
+              <a:spcAft>
+                <a:spcPts val="200"/>
+              </a:spcAft>
+              <a:defRPr sz="850">
+                <a:solidFill>
+                  <a:srgbClr val="F8FAFC"/>
+                </a:solidFill>
+              </a:defRPr>
+            </a:pPr>
+            <a:r>
+              <a:t>9. User Task: Applicant e-signs digital loan agreement.</a:t>
+            </a:r>
+          </a:p>
+          <a:p>
+            <a:pPr>
+              <a:spcAft>
+                <a:spcPts val="200"/>
+              </a:spcAft>
+              <a:defRPr sz="850">
+                <a:solidFill>
+                  <a:srgbClr val="F8FAFC"/>
+                </a:solidFill>
+              </a:defRPr>
+            </a:pPr>
+            <a:r>
+              <a:t>10. Service Task &amp; End: Core Banking disburses funds via NEFT/RTGS.</a:t>
+            </a:r>
+          </a:p>
+          <a:p>
+            <a:pPr>
+              <a:spcAft>
+                <a:spcPts val="200"/>
+              </a:spcAft>
+              <a:defRPr sz="850" b="1">
+                <a:solidFill>
+                  <a:srgbClr val="FB923C"/>
+                </a:solidFill>
+              </a:defRPr>
+            </a:pPr>
+            <a:r>
+              <a:t>--- ACADEMIC CLARIFICATION ON CRITICAL PATH ---</a:t>
+            </a:r>
+          </a:p>
+          <a:p>
+            <a:pPr>
+              <a:spcAft>
+                <a:spcPts val="200"/>
+              </a:spcAft>
+              <a:defRPr sz="850">
                 <a:solidFill>
                   <a:srgbClr val="94A3B8"/>
                 </a:solidFill>
               </a:defRPr>
             </a:pPr>
             <a:r>
-              <a:t>BPMN Symbol: Diamond with an 'X' marker (or empty diamond)</a:t>
-            </a:r>
-          </a:p>
-          <a:p>
-            <a:pPr>
-              <a:spcAft>
-                <a:spcPts val="800"/>
-              </a:spcAft>
-            </a:pPr>
-            <a:r>
-              <a:rPr b="1" sz="1050">
-                <a:solidFill>
-                  <a:srgbClr val="F8FAFC"/>
-                </a:solidFill>
-              </a:rPr>
-              <a:t>Purpose &amp; Semantics: </a:t>
-            </a:r>
-            <a:r>
-              <a:rPr sz="1000">
+              <a:t>• Happy Path = Ideal sequence with zero rework or failures.</a:t>
+            </a:r>
+          </a:p>
+          <a:p>
+            <a:pPr>
+              <a:spcAft>
+                <a:spcPts val="200"/>
+              </a:spcAft>
+              <a:defRPr sz="850">
                 <a:solidFill>
                   <a:srgbClr val="94A3B8"/>
                 </a:solidFill>
-              </a:rPr>
-              <a:t>Evaluates condition expressions and selects EXACTLY ONE outgoing branch. In alternative joining, it passes the first token that arrives without synchronization.</a:t>
-            </a:r>
-          </a:p>
-          <a:p>
-            <a:pPr>
-              <a:spcAft>
-                <a:spcPts val="800"/>
-              </a:spcAft>
-            </a:pPr>
-            <a:r>
-              <a:rPr b="1" sz="1050">
-                <a:solidFill>
-                  <a:srgbClr val="F8FAFC"/>
-                </a:solidFill>
-              </a:rPr>
-              <a:t>Key Decision Points in Model: </a:t>
-            </a:r>
-            <a:r>
-              <a:rPr sz="1000">
+              </a:defRPr>
+            </a:pPr>
+            <a:r>
+              <a:t>• Critical Path Method (CPM) = Longest duration path with zero slack in operations research. It requires empirical task durations (PERT distributions).</a:t>
+            </a:r>
+          </a:p>
+          <a:p>
+            <a:pPr>
+              <a:spcAft>
+                <a:spcPts val="200"/>
+              </a:spcAft>
+              <a:defRPr sz="850">
                 <a:solidFill>
                   <a:srgbClr val="94A3B8"/>
                 </a:solidFill>
-              </a:rPr>
-              <a:t>• 'Documents Complete?': Incomplete → return loop; Complete → proceed.
-• 'KYC Passed?': Pass → AML; Fail → Manual KYC; Unresolvable → Terminate.
-• 'Eligibility Decision': Score ≥ 750 → Auto-Approve; 600-749 → Manual Review; &lt; 600 → Reject.
-• 'Underwriter Decision': Approve / Collateral Required / Reject.
-• 'Applicant Decision': Accept Offer / Counter-Offer / Withdraw.</a:t>
-            </a:r>
-          </a:p>
-          <a:p>
-            <a:pPr>
-              <a:spcAft>
-                <a:spcPts val="800"/>
-              </a:spcAft>
-            </a:pPr>
-            <a:r>
-              <a:rPr b="1" sz="1050">
-                <a:solidFill>
-                  <a:srgbClr val="F8FAFC"/>
-                </a:solidFill>
-              </a:rPr>
-              <a:t>Why Inclusive Gateways (OR) Were Avoided: </a:t>
-            </a:r>
-            <a:r>
-              <a:rPr sz="1000">
-                <a:solidFill>
-                  <a:srgbClr val="94A3B8"/>
-                </a:solidFill>
-              </a:rPr>
-              <a:t>An Inclusive Gateway allows 1 to N branches to fire based on non-exclusive criteria. In our loan process, outcomes like 'Approve' and 'Reject' are mutually exclusive; an application cannot be simultaneously approved and rejected. Using XOR guarantees deterministic, bug-free execution.</a:t>
+              </a:defRPr>
+            </a:pPr>
+            <a:r>
+              <a:t>• Academic Stance: We do NOT invent artificial task durations. We model the Happy Path as the 'Business-Critical Flow'.</a:t>
             </a:r>
           </a:p>
         </p:txBody>
@@ -8339,7 +10817,7 @@
 </p:sld>
 </file>
 
-<file path=ppt/slides/slide6.xml><?xml version="1.0" encoding="utf-8"?>
+<file path=ppt/slides/slide9.xml><?xml version="1.0" encoding="utf-8"?>
 <p:sld xmlns:a="http://schemas.openxmlformats.org/drawingml/2006/main" xmlns:p="http://schemas.openxmlformats.org/presentationml/2006/main" xmlns:r="http://schemas.openxmlformats.org/officeDocument/2006/relationships">
   <p:cSld>
     <p:spTree>
@@ -8401,7 +10879,7 @@
         <p:spPr>
           <a:xfrm>
             <a:off x="731520" y="365760"/>
-            <a:ext cx="3108960" cy="292608"/>
+            <a:ext cx="3840480" cy="292608"/>
           </a:xfrm>
           <a:prstGeom prst="roundRect">
             <a:avLst/>
@@ -8442,7 +10920,7 @@
               </a:defRPr>
             </a:pPr>
             <a:r>
-              <a:t>EVENT ARCHITECTURE</a:t>
+              <a:t>FAILURE REGISTER — Q1</a:t>
             </a:r>
           </a:p>
         </p:txBody>
@@ -8478,1224 +10956,7 @@
               </a:defRPr>
             </a:pPr>
             <a:r>
-              <a:t>Intermediate &amp; Boundary Events Deep-Dive</a:t>
-            </a:r>
-          </a:p>
-        </p:txBody>
-      </p:sp>
-      <p:sp>
-        <p:nvSpPr>
-          <p:cNvPr id="5" name="Rounded Rectangle 4"/>
-          <p:cNvSpPr/>
-          <p:nvPr/>
-        </p:nvSpPr>
-        <p:spPr>
-          <a:xfrm>
-            <a:off x="731520" y="1371600"/>
-            <a:ext cx="10698480" cy="822960"/>
-          </a:xfrm>
-          <a:prstGeom prst="roundRect">
-            <a:avLst/>
-          </a:prstGeom>
-          <a:solidFill>
-            <a:srgbClr val="18263E"/>
-          </a:solidFill>
-          <a:ln w="12700">
-            <a:solidFill>
-              <a:srgbClr val="2D4466"/>
-            </a:solidFill>
-          </a:ln>
-        </p:spPr>
-        <p:style>
-          <a:lnRef idx="1">
-            <a:schemeClr val="accent1"/>
-          </a:lnRef>
-          <a:fillRef idx="3">
-            <a:schemeClr val="accent1"/>
-          </a:fillRef>
-          <a:effectRef idx="2">
-            <a:schemeClr val="accent1"/>
-          </a:effectRef>
-          <a:fontRef idx="minor">
-            <a:schemeClr val="lt1"/>
-          </a:fontRef>
-        </p:style>
-        <p:txBody>
-          <a:bodyPr rtlCol="0" anchor="ctr" wrap="square"/>
-          <a:lstStyle/>
-          <a:p>
-            <a:pPr algn="ctr">
-              <a:defRPr sz="1050" b="1">
-                <a:solidFill>
-                  <a:srgbClr val="00D2EB"/>
-                </a:solidFill>
-              </a:defRPr>
-            </a:pPr>
-            <a:r>
-              <a:t>CRITICAL BPMN DISTINCTION: INLINE INTERMEDIATE EVENTS VS. BOUNDARY EVENTS</a:t>
-            </a:r>
-          </a:p>
-          <a:p>
-            <a:pPr>
-              <a:defRPr sz="950">
-                <a:solidFill>
-                  <a:srgbClr val="F8FAFC"/>
-                </a:solidFill>
-              </a:defRPr>
-            </a:pPr>
-            <a:r>
-              <a:t>• Inline Intermediate Events sit directly on sequence flows and pause normal flow progression until triggered.</a:t>
-            </a:r>
-            <a:br/>
-            <a:r>
-              <a:t>• Boundary Events attach to task perimeters; they monitor active task execution and handle external exceptions, deadlines, or faults.</a:t>
-            </a:r>
-          </a:p>
-        </p:txBody>
-      </p:sp>
-      <p:sp>
-        <p:nvSpPr>
-          <p:cNvPr id="6" name="Rounded Rectangle 5"/>
-          <p:cNvSpPr/>
-          <p:nvPr/>
-        </p:nvSpPr>
-        <p:spPr>
-          <a:xfrm>
-            <a:off x="731520" y="2331720"/>
-            <a:ext cx="2542032" cy="3977639"/>
-          </a:xfrm>
-          <a:prstGeom prst="roundRect">
-            <a:avLst/>
-          </a:prstGeom>
-          <a:solidFill>
-            <a:srgbClr val="18263E"/>
-          </a:solidFill>
-          <a:ln w="12700">
-            <a:solidFill>
-              <a:srgbClr val="2D4466"/>
-            </a:solidFill>
-          </a:ln>
-        </p:spPr>
-        <p:style>
-          <a:lnRef idx="1">
-            <a:schemeClr val="accent1"/>
-          </a:lnRef>
-          <a:fillRef idx="3">
-            <a:schemeClr val="accent1"/>
-          </a:fillRef>
-          <a:effectRef idx="2">
-            <a:schemeClr val="accent1"/>
-          </a:effectRef>
-          <a:fontRef idx="minor">
-            <a:schemeClr val="lt1"/>
-          </a:fontRef>
-        </p:style>
-        <p:txBody>
-          <a:bodyPr rtlCol="0" anchor="ctr" wrap="square"/>
-          <a:lstStyle/>
-          <a:p>
-            <a:pPr algn="ctr">
-              <a:spcAft>
-                <a:spcPts val="400"/>
-              </a:spcAft>
-              <a:defRPr sz="1100" b="1">
-                <a:solidFill>
-                  <a:srgbClr val="00D2EB"/>
-                </a:solidFill>
-              </a:defRPr>
-            </a:pPr>
-            <a:r>
-              <a:t>INTERMEDIATE MESSAGE CATCH</a:t>
-            </a:r>
-          </a:p>
-          <a:p>
-            <a:pPr>
-              <a:defRPr sz="950" b="1">
-                <a:solidFill>
-                  <a:srgbClr val="94A3B8"/>
-                </a:solidFill>
-              </a:defRPr>
-            </a:pPr>
-            <a:r>
-              <a:t>Symbol: ✉️ (Catch)</a:t>
-            </a:r>
-          </a:p>
-          <a:p>
-            <a:pPr>
-              <a:spcAft>
-                <a:spcPts val="800"/>
-              </a:spcAft>
-              <a:defRPr sz="950">
-                <a:solidFill>
-                  <a:srgbClr val="F8FAFC"/>
-                </a:solidFill>
-              </a:defRPr>
-            </a:pPr>
-            <a:r>
-              <a:t>Category: Inline Intermediate Event</a:t>
-            </a:r>
-          </a:p>
-          <a:p>
-            <a:pPr>
-              <a:defRPr sz="950">
-                <a:solidFill>
-                  <a:srgbClr val="94A3B8"/>
-                </a:solidFill>
-              </a:defRPr>
-            </a:pPr>
-            <a:r>
-              <a:t>Trigger: Asynchronous incoming payload from Credit Bureau external pool.</a:t>
-            </a:r>
-            <a:br/>
-            <a:r>
-              <a:t>Location: Core Banking Lane ('Receive Credit Report').</a:t>
-            </a:r>
-            <a:br/>
-            <a:r>
-              <a:t>Action: Unblocks sequence flow and passes credit report data into the scoring engine.</a:t>
-            </a:r>
-            <a:br/>
-            <a:r>
-              <a:t>Why Needed: Models non-polling, asynchronous inter-organizational communication.</a:t>
-            </a:r>
-          </a:p>
-        </p:txBody>
-      </p:sp>
-      <p:sp>
-        <p:nvSpPr>
-          <p:cNvPr id="7" name="Rounded Rectangle 6"/>
-          <p:cNvSpPr/>
-          <p:nvPr/>
-        </p:nvSpPr>
-        <p:spPr>
-          <a:xfrm>
-            <a:off x="3456432" y="2331720"/>
-            <a:ext cx="2542032" cy="3977639"/>
-          </a:xfrm>
-          <a:prstGeom prst="roundRect">
-            <a:avLst/>
-          </a:prstGeom>
-          <a:solidFill>
-            <a:srgbClr val="18263E"/>
-          </a:solidFill>
-          <a:ln w="12700">
-            <a:solidFill>
-              <a:srgbClr val="2D4466"/>
-            </a:solidFill>
-          </a:ln>
-        </p:spPr>
-        <p:style>
-          <a:lnRef idx="1">
-            <a:schemeClr val="accent1"/>
-          </a:lnRef>
-          <a:fillRef idx="3">
-            <a:schemeClr val="accent1"/>
-          </a:fillRef>
-          <a:effectRef idx="2">
-            <a:schemeClr val="accent1"/>
-          </a:effectRef>
-          <a:fontRef idx="minor">
-            <a:schemeClr val="lt1"/>
-          </a:fontRef>
-        </p:style>
-        <p:txBody>
-          <a:bodyPr rtlCol="0" anchor="ctr" wrap="square"/>
-          <a:lstStyle/>
-          <a:p>
-            <a:pPr algn="ctr">
-              <a:spcAft>
-                <a:spcPts val="400"/>
-              </a:spcAft>
-              <a:defRPr sz="1100" b="1">
-                <a:solidFill>
-                  <a:srgbClr val="60A5FA"/>
-                </a:solidFill>
-              </a:defRPr>
-            </a:pPr>
-            <a:r>
-              <a:t>NON-INTERRUPTING TIMER</a:t>
-            </a:r>
-          </a:p>
-          <a:p>
-            <a:pPr>
-              <a:defRPr sz="950" b="1">
-                <a:solidFill>
-                  <a:srgbClr val="94A3B8"/>
-                </a:solidFill>
-              </a:defRPr>
-            </a:pPr>
-            <a:r>
-              <a:t>Symbol: ⏱️ (Dashed Double Ring)</a:t>
-            </a:r>
-          </a:p>
-          <a:p>
-            <a:pPr>
-              <a:spcAft>
-                <a:spcPts val="800"/>
-              </a:spcAft>
-              <a:defRPr sz="950">
-                <a:solidFill>
-                  <a:srgbClr val="F8FAFC"/>
-                </a:solidFill>
-              </a:defRPr>
-            </a:pPr>
-            <a:r>
-              <a:t>Category: Boundary Event on Task</a:t>
-            </a:r>
-          </a:p>
-          <a:p>
-            <a:pPr>
-              <a:defRPr sz="950">
-                <a:solidFill>
-                  <a:srgbClr val="94A3B8"/>
-                </a:solidFill>
-              </a:defRPr>
-            </a:pPr>
-            <a:r>
-              <a:t>Trigger: 24-Hour SLA expiry on Credit Bureau request; 48-Hour SLA on e-signature.</a:t>
-            </a:r>
-            <a:br/>
-            <a:r>
-              <a:t>Location: 'Request Credit Report' &amp; 'E-Sign Agreement'.</a:t>
-            </a:r>
-            <a:br/>
-            <a:r>
-              <a:t>Action: Fires a parallel recovery path (retry request / manual wet-signature alert) WITHOUT cancelling the main task.</a:t>
-            </a:r>
-            <a:br/>
-            <a:r>
-              <a:t>Why Needed: Prevents application stall while preserving customer self-service window.</a:t>
-            </a:r>
-          </a:p>
-        </p:txBody>
-      </p:sp>
-      <p:sp>
-        <p:nvSpPr>
-          <p:cNvPr id="8" name="Rounded Rectangle 7"/>
-          <p:cNvSpPr/>
-          <p:nvPr/>
-        </p:nvSpPr>
-        <p:spPr>
-          <a:xfrm>
-            <a:off x="6181344" y="2331720"/>
-            <a:ext cx="2542032" cy="3977639"/>
-          </a:xfrm>
-          <a:prstGeom prst="roundRect">
-            <a:avLst/>
-          </a:prstGeom>
-          <a:solidFill>
-            <a:srgbClr val="18263E"/>
-          </a:solidFill>
-          <a:ln w="12700">
-            <a:solidFill>
-              <a:srgbClr val="2D4466"/>
-            </a:solidFill>
-          </a:ln>
-        </p:spPr>
-        <p:style>
-          <a:lnRef idx="1">
-            <a:schemeClr val="accent1"/>
-          </a:lnRef>
-          <a:fillRef idx="3">
-            <a:schemeClr val="accent1"/>
-          </a:fillRef>
-          <a:effectRef idx="2">
-            <a:schemeClr val="accent1"/>
-          </a:effectRef>
-          <a:fontRef idx="minor">
-            <a:schemeClr val="lt1"/>
-          </a:fontRef>
-        </p:style>
-        <p:txBody>
-          <a:bodyPr rtlCol="0" anchor="ctr" wrap="square"/>
-          <a:lstStyle/>
-          <a:p>
-            <a:pPr algn="ctr">
-              <a:spcAft>
-                <a:spcPts val="400"/>
-              </a:spcAft>
-              <a:defRPr sz="1100" b="1">
-                <a:solidFill>
-                  <a:srgbClr val="FB923C"/>
-                </a:solidFill>
-              </a:defRPr>
-            </a:pPr>
-            <a:r>
-              <a:t>INTERRUPTING TIMER</a:t>
-            </a:r>
-          </a:p>
-          <a:p>
-            <a:pPr>
-              <a:defRPr sz="950" b="1">
-                <a:solidFill>
-                  <a:srgbClr val="94A3B8"/>
-                </a:solidFill>
-              </a:defRPr>
-            </a:pPr>
-            <a:r>
-              <a:t>Symbol: ⏱️ (Solid Double Ring)</a:t>
-            </a:r>
-          </a:p>
-          <a:p>
-            <a:pPr>
-              <a:spcAft>
-                <a:spcPts val="800"/>
-              </a:spcAft>
-              <a:defRPr sz="950">
-                <a:solidFill>
-                  <a:srgbClr val="F8FAFC"/>
-                </a:solidFill>
-              </a:defRPr>
-            </a:pPr>
-            <a:r>
-              <a:t>Category: Boundary Event on Task</a:t>
-            </a:r>
-          </a:p>
-          <a:p>
-            <a:pPr>
-              <a:defRPr sz="950">
-                <a:solidFill>
-                  <a:srgbClr val="94A3B8"/>
-                </a:solidFill>
-              </a:defRPr>
-            </a:pPr>
-            <a:r>
-              <a:t>Trigger: 7-Day deadline expiry on loan offer.</a:t>
-            </a:r>
-            <a:br/>
-            <a:r>
-              <a:t>Location: Attached to 'Review Loan Offer' (Applicant).</a:t>
-            </a:r>
-            <a:br/>
-            <a:r>
-              <a:t>Action: Immediately CANCELS the active offer review task and diverts the token to 'EndEvent: Loan Offer Expired'.</a:t>
-            </a:r>
-            <a:br/>
-            <a:r>
-              <a:t>Why Needed: Enforces commercial and regulatory validity; banks cannot leave interest rates open indefinitely.</a:t>
-            </a:r>
-          </a:p>
-        </p:txBody>
-      </p:sp>
-      <p:sp>
-        <p:nvSpPr>
-          <p:cNvPr id="9" name="Rounded Rectangle 8"/>
-          <p:cNvSpPr/>
-          <p:nvPr/>
-        </p:nvSpPr>
-        <p:spPr>
-          <a:xfrm>
-            <a:off x="8906256" y="2331720"/>
-            <a:ext cx="2542032" cy="3977639"/>
-          </a:xfrm>
-          <a:prstGeom prst="roundRect">
-            <a:avLst/>
-          </a:prstGeom>
-          <a:solidFill>
-            <a:srgbClr val="18263E"/>
-          </a:solidFill>
-          <a:ln w="12700">
-            <a:solidFill>
-              <a:srgbClr val="2D4466"/>
-            </a:solidFill>
-          </a:ln>
-        </p:spPr>
-        <p:style>
-          <a:lnRef idx="1">
-            <a:schemeClr val="accent1"/>
-          </a:lnRef>
-          <a:fillRef idx="3">
-            <a:schemeClr val="accent1"/>
-          </a:fillRef>
-          <a:effectRef idx="2">
-            <a:schemeClr val="accent1"/>
-          </a:effectRef>
-          <a:fontRef idx="minor">
-            <a:schemeClr val="lt1"/>
-          </a:fontRef>
-        </p:style>
-        <p:txBody>
-          <a:bodyPr rtlCol="0" anchor="ctr" wrap="square"/>
-          <a:lstStyle/>
-          <a:p>
-            <a:pPr algn="ctr">
-              <a:spcAft>
-                <a:spcPts val="400"/>
-              </a:spcAft>
-              <a:defRPr sz="1100" b="1">
-                <a:solidFill>
-                  <a:srgbClr val="F87171"/>
-                </a:solidFill>
-              </a:defRPr>
-            </a:pPr>
-            <a:r>
-              <a:t>INTERRUPTING ERROR BOUNDARY</a:t>
-            </a:r>
-          </a:p>
-          <a:p>
-            <a:pPr>
-              <a:defRPr sz="950" b="1">
-                <a:solidFill>
-                  <a:srgbClr val="94A3B8"/>
-                </a:solidFill>
-              </a:defRPr>
-            </a:pPr>
-            <a:r>
-              <a:t>Symbol: ⚡ (Solid Double Ring)</a:t>
-            </a:r>
-          </a:p>
-          <a:p>
-            <a:pPr>
-              <a:spcAft>
-                <a:spcPts val="800"/>
-              </a:spcAft>
-              <a:defRPr sz="950">
-                <a:solidFill>
-                  <a:srgbClr val="F8FAFC"/>
-                </a:solidFill>
-              </a:defRPr>
-            </a:pPr>
-            <a:r>
-              <a:t>Category: Boundary Event on Task</a:t>
-            </a:r>
-          </a:p>
-          <a:p>
-            <a:pPr>
-              <a:defRPr sz="950">
-                <a:solidFill>
-                  <a:srgbClr val="94A3B8"/>
-                </a:solidFill>
-              </a:defRPr>
-            </a:pPr>
-            <a:r>
-              <a:t>Trigger: System fault thrown by core banking (NEFT/RTGS API failure, frozen account).</a:t>
-            </a:r>
-            <a:br/>
-            <a:r>
-              <a:t>Location: Attached to 'Disburse Loan Funds' Service Task.</a:t>
-            </a:r>
-            <a:br/>
-            <a:r>
-              <a:t>Action: Traps the technical exception, halts auto-disbursement, and routes to Operations for manual fallback retry.</a:t>
-            </a:r>
-            <a:br/>
-            <a:r>
-              <a:t>Why Needed: Isolates financial transaction faults; prevents silent system failures.</a:t>
-            </a:r>
-          </a:p>
-        </p:txBody>
-      </p:sp>
-    </p:spTree>
-  </p:cSld>
-  <p:clrMapOvr>
-    <a:masterClrMapping/>
-  </p:clrMapOvr>
-</p:sld>
-</file>
-
-<file path=ppt/slides/slide7.xml><?xml version="1.0" encoding="utf-8"?>
-<p:sld xmlns:a="http://schemas.openxmlformats.org/drawingml/2006/main" xmlns:p="http://schemas.openxmlformats.org/presentationml/2006/main" xmlns:r="http://schemas.openxmlformats.org/officeDocument/2006/relationships">
-  <p:cSld>
-    <p:spTree>
-      <p:nvGrpSpPr>
-        <p:cNvPr id="1" name=""/>
-        <p:cNvGrpSpPr/>
-        <p:nvPr/>
-      </p:nvGrpSpPr>
-      <p:grpSpPr/>
-      <p:sp>
-        <p:nvSpPr>
-          <p:cNvPr id="2" name="Rectangle 1"/>
-          <p:cNvSpPr/>
-          <p:nvPr/>
-        </p:nvSpPr>
-        <p:spPr>
-          <a:xfrm>
-            <a:off x="0" y="0"/>
-            <a:ext cx="12191695" cy="6858000"/>
-          </a:xfrm>
-          <a:prstGeom prst="rect">
-            <a:avLst/>
-          </a:prstGeom>
-          <a:solidFill>
-            <a:srgbClr val="0B192C"/>
-          </a:solidFill>
-          <a:ln>
-            <a:noFill/>
-          </a:ln>
-        </p:spPr>
-        <p:style>
-          <a:lnRef idx="1">
-            <a:schemeClr val="accent1"/>
-          </a:lnRef>
-          <a:fillRef idx="3">
-            <a:schemeClr val="accent1"/>
-          </a:fillRef>
-          <a:effectRef idx="2">
-            <a:schemeClr val="accent1"/>
-          </a:effectRef>
-          <a:fontRef idx="minor">
-            <a:schemeClr val="lt1"/>
-          </a:fontRef>
-        </p:style>
-        <p:txBody>
-          <a:bodyPr rtlCol="0" anchor="ctr"/>
-          <a:lstStyle/>
-          <a:p>
-            <a:pPr algn="ctr"/>
-          </a:p>
-        </p:txBody>
-      </p:sp>
-      <p:sp>
-        <p:nvSpPr>
-          <p:cNvPr id="3" name="Rounded Rectangle 2"/>
-          <p:cNvSpPr/>
-          <p:nvPr/>
-        </p:nvSpPr>
-        <p:spPr>
-          <a:xfrm>
-            <a:off x="731520" y="365760"/>
-            <a:ext cx="3108960" cy="292608"/>
-          </a:xfrm>
-          <a:prstGeom prst="roundRect">
-            <a:avLst/>
-          </a:prstGeom>
-          <a:solidFill>
-            <a:srgbClr val="18263E"/>
-          </a:solidFill>
-          <a:ln w="12700">
-            <a:solidFill>
-              <a:srgbClr val="00D2EB"/>
-            </a:solidFill>
-          </a:ln>
-        </p:spPr>
-        <p:style>
-          <a:lnRef idx="1">
-            <a:schemeClr val="accent1"/>
-          </a:lnRef>
-          <a:fillRef idx="3">
-            <a:schemeClr val="accent1"/>
-          </a:fillRef>
-          <a:effectRef idx="2">
-            <a:schemeClr val="accent1"/>
-          </a:effectRef>
-          <a:fontRef idx="minor">
-            <a:schemeClr val="lt1"/>
-          </a:fontRef>
-        </p:style>
-        <p:txBody>
-          <a:bodyPr rtlCol="0" anchor="ctr"/>
-          <a:lstStyle/>
-          <a:p>
-            <a:pPr algn="ctr">
-              <a:defRPr sz="950" b="1">
-                <a:solidFill>
-                  <a:srgbClr val="00D2EB"/>
-                </a:solidFill>
-                <a:latin typeface="Arial"/>
-              </a:defRPr>
-            </a:pPr>
-            <a:r>
-              <a:t>EXECUTION LIFECYCLE</a:t>
-            </a:r>
-          </a:p>
-        </p:txBody>
-      </p:sp>
-      <p:sp>
-        <p:nvSpPr>
-          <p:cNvPr id="4" name="TextBox 3"/>
-          <p:cNvSpPr txBox="1"/>
-          <p:nvPr/>
-        </p:nvSpPr>
-        <p:spPr>
-          <a:xfrm>
-            <a:off x="731520" y="713232"/>
-            <a:ext cx="10698480" cy="594360"/>
-          </a:xfrm>
-          <a:prstGeom prst="rect">
-            <a:avLst/>
-          </a:prstGeom>
-          <a:noFill/>
-        </p:spPr>
-        <p:txBody>
-          <a:bodyPr wrap="square">
-            <a:spAutoFit/>
-          </a:bodyPr>
-          <a:lstStyle/>
-          <a:p>
-            <a:pPr>
-              <a:defRPr sz="2200" b="1">
-                <a:solidFill>
-                  <a:srgbClr val="F8FAFC"/>
-                </a:solidFill>
-                <a:latin typeface="Arial"/>
-              </a:defRPr>
-            </a:pPr>
-            <a:r>
-              <a:t>The Happy Path &amp; Business-Critical Flow</a:t>
-            </a:r>
-          </a:p>
-        </p:txBody>
-      </p:sp>
-      <p:sp>
-        <p:nvSpPr>
-          <p:cNvPr id="5" name="Rounded Rectangle 4"/>
-          <p:cNvSpPr/>
-          <p:nvPr/>
-        </p:nvSpPr>
-        <p:spPr>
-          <a:xfrm>
-            <a:off x="731520" y="1371600"/>
-            <a:ext cx="7132320" cy="4937760"/>
-          </a:xfrm>
-          <a:prstGeom prst="roundRect">
-            <a:avLst/>
-          </a:prstGeom>
-          <a:solidFill>
-            <a:srgbClr val="18263E"/>
-          </a:solidFill>
-          <a:ln w="12700">
-            <a:solidFill>
-              <a:srgbClr val="2D4466"/>
-            </a:solidFill>
-          </a:ln>
-        </p:spPr>
-        <p:style>
-          <a:lnRef idx="1">
-            <a:schemeClr val="accent1"/>
-          </a:lnRef>
-          <a:fillRef idx="3">
-            <a:schemeClr val="accent1"/>
-          </a:fillRef>
-          <a:effectRef idx="2">
-            <a:schemeClr val="accent1"/>
-          </a:effectRef>
-          <a:fontRef idx="minor">
-            <a:schemeClr val="lt1"/>
-          </a:fontRef>
-        </p:style>
-        <p:txBody>
-          <a:bodyPr rtlCol="0" anchor="ctr" wrap="square"/>
-          <a:lstStyle/>
-          <a:p>
-            <a:pPr algn="ctr">
-              <a:spcAft>
-                <a:spcPts val="800"/>
-              </a:spcAft>
-              <a:defRPr sz="1200" b="1">
-                <a:solidFill>
-                  <a:srgbClr val="34D399"/>
-                </a:solidFill>
-              </a:defRPr>
-            </a:pPr>
-            <a:r>
-              <a:t>THE 15-STEP SEQUENTIAL HAPPY PATH</a:t>
-            </a:r>
-          </a:p>
-          <a:p>
-            <a:pPr>
-              <a:spcAft>
-                <a:spcPts val="200"/>
-              </a:spcAft>
-              <a:defRPr sz="950">
-                <a:solidFill>
-                  <a:srgbClr val="F8FAFC"/>
-                </a:solidFill>
-              </a:defRPr>
-            </a:pPr>
-            <a:r>
-              <a:t>1. Start Event: Applicant prepares and submits online loan application and KYC/income documents.</a:t>
-            </a:r>
-          </a:p>
-          <a:p>
-            <a:pPr>
-              <a:spcAft>
-                <a:spcPts val="200"/>
-              </a:spcAft>
-              <a:defRPr sz="950">
-                <a:solidFill>
-                  <a:srgbClr val="F8FAFC"/>
-                </a:solidFill>
-              </a:defRPr>
-            </a:pPr>
-            <a:r>
-              <a:t>2. Service Task: System validates document schema completeness (ID, pay slips, statements present).</a:t>
-            </a:r>
-          </a:p>
-          <a:p>
-            <a:pPr>
-              <a:spcAft>
-                <a:spcPts val="200"/>
-              </a:spcAft>
-              <a:defRPr sz="950">
-                <a:solidFill>
-                  <a:srgbClr val="F8FAFC"/>
-                </a:solidFill>
-              </a:defRPr>
-            </a:pPr>
-            <a:r>
-              <a:t>3. Parallel Split: Concurrently triggers KYC/AML screening, Credit Bureau request, and DTI computation.</a:t>
-            </a:r>
-          </a:p>
-          <a:p>
-            <a:pPr>
-              <a:spcAft>
-                <a:spcPts val="200"/>
-              </a:spcAft>
-              <a:defRPr sz="950">
-                <a:solidFill>
-                  <a:srgbClr val="F8FAFC"/>
-                </a:solidFill>
-              </a:defRPr>
-            </a:pPr>
-            <a:r>
-              <a:t>4. Fraud &amp; Compliance: KYC identity matches government database; AML screening returns zero watchlist hits.</a:t>
-            </a:r>
-          </a:p>
-          <a:p>
-            <a:pPr>
-              <a:spcAft>
-                <a:spcPts val="200"/>
-              </a:spcAft>
-              <a:defRPr sz="950">
-                <a:solidFill>
-                  <a:srgbClr val="F8FAFC"/>
-                </a:solidFill>
-              </a:defRPr>
-            </a:pPr>
-            <a:r>
-              <a:t>5. External Credit Bureau: Returns credit score above threshold (Score ≥ 750) via Message Flow.</a:t>
-            </a:r>
-          </a:p>
-          <a:p>
-            <a:pPr>
-              <a:spcAft>
-                <a:spcPts val="200"/>
-              </a:spcAft>
-              <a:defRPr sz="950">
-                <a:solidFill>
-                  <a:srgbClr val="F8FAFC"/>
-                </a:solidFill>
-              </a:defRPr>
-            </a:pPr>
-            <a:r>
-              <a:t>6. Core Banking: Calculates DTI ratio within policy limit (DTI &lt; 40%).</a:t>
-            </a:r>
-          </a:p>
-          <a:p>
-            <a:pPr>
-              <a:spcAft>
-                <a:spcPts val="200"/>
-              </a:spcAft>
-              <a:defRPr sz="950">
-                <a:solidFill>
-                  <a:srgbClr val="F8FAFC"/>
-                </a:solidFill>
-              </a:defRPr>
-            </a:pPr>
-            <a:r>
-              <a:t>7. Parallel Join: Synchronizes all three successful background streams.</a:t>
-            </a:r>
-          </a:p>
-          <a:p>
-            <a:pPr>
-              <a:spcAft>
-                <a:spcPts val="200"/>
-              </a:spcAft>
-              <a:defRPr sz="950">
-                <a:solidFill>
-                  <a:srgbClr val="F8FAFC"/>
-                </a:solidFill>
-              </a:defRPr>
-            </a:pPr>
-            <a:r>
-              <a:t>8. User Task: Loan Officer verifies submitted salary slips and employer standing.</a:t>
-            </a:r>
-          </a:p>
-          <a:p>
-            <a:pPr>
-              <a:spcAft>
-                <a:spcPts val="200"/>
-              </a:spcAft>
-              <a:defRPr sz="950">
-                <a:solidFill>
-                  <a:srgbClr val="F8FAFC"/>
-                </a:solidFill>
-              </a:defRPr>
-            </a:pPr>
-            <a:r>
-              <a:t>9. Service Task: Scoring engine calculates composite risk score → qualifies for Auto-Approval.</a:t>
-            </a:r>
-          </a:p>
-          <a:p>
-            <a:pPr>
-              <a:spcAft>
-                <a:spcPts val="200"/>
-              </a:spcAft>
-              <a:defRPr sz="950">
-                <a:solidFill>
-                  <a:srgbClr val="F8FAFC"/>
-                </a:solidFill>
-              </a:defRPr>
-            </a:pPr>
-            <a:r>
-              <a:t>10. User Task: Loan Officer generates standard loan offer letter with approved interest rate.</a:t>
-            </a:r>
-          </a:p>
-          <a:p>
-            <a:pPr>
-              <a:spcAft>
-                <a:spcPts val="200"/>
-              </a:spcAft>
-              <a:defRPr sz="950">
-                <a:solidFill>
-                  <a:srgbClr val="F8FAFC"/>
-                </a:solidFill>
-              </a:defRPr>
-            </a:pPr>
-            <a:r>
-              <a:t>11. Send Task: System dispatches formal offer letter to applicant portal &amp; registered email.</a:t>
-            </a:r>
-          </a:p>
-          <a:p>
-            <a:pPr>
-              <a:spcAft>
-                <a:spcPts val="200"/>
-              </a:spcAft>
-              <a:defRPr sz="950">
-                <a:solidFill>
-                  <a:srgbClr val="F8FAFC"/>
-                </a:solidFill>
-              </a:defRPr>
-            </a:pPr>
-            <a:r>
-              <a:t>12. User Task: Applicant reviews terms and selects 'Accept Offer' within 7-day validity window.</a:t>
-            </a:r>
-          </a:p>
-          <a:p>
-            <a:pPr>
-              <a:spcAft>
-                <a:spcPts val="200"/>
-              </a:spcAft>
-              <a:defRPr sz="950">
-                <a:solidFill>
-                  <a:srgbClr val="F8FAFC"/>
-                </a:solidFill>
-              </a:defRPr>
-            </a:pPr>
-            <a:r>
-              <a:t>13. User Task: Applicant digitally e-signs loan agreement via integrated platform.</a:t>
-            </a:r>
-          </a:p>
-          <a:p>
-            <a:pPr>
-              <a:spcAft>
-                <a:spcPts val="200"/>
-              </a:spcAft>
-              <a:defRPr sz="950">
-                <a:solidFill>
-                  <a:srgbClr val="F8FAFC"/>
-                </a:solidFill>
-              </a:defRPr>
-            </a:pPr>
-            <a:r>
-              <a:t>14. User Task: Operations team verifies disbursement instructions and linked bank account.</a:t>
-            </a:r>
-          </a:p>
-          <a:p>
-            <a:pPr>
-              <a:spcAft>
-                <a:spcPts val="200"/>
-              </a:spcAft>
-              <a:defRPr sz="950">
-                <a:solidFill>
-                  <a:srgbClr val="F8FAFC"/>
-                </a:solidFill>
-              </a:defRPr>
-            </a:pPr>
-            <a:r>
-              <a:t>15. Service Task &amp; End: Core Banking executes NEFT/RTGS transfer, creates loan account → Loan Disbursed!</a:t>
-            </a:r>
-          </a:p>
-        </p:txBody>
-      </p:sp>
-      <p:sp>
-        <p:nvSpPr>
-          <p:cNvPr id="6" name="Rounded Rectangle 5"/>
-          <p:cNvSpPr/>
-          <p:nvPr/>
-        </p:nvSpPr>
-        <p:spPr>
-          <a:xfrm>
-            <a:off x="8046720" y="1371600"/>
-            <a:ext cx="3383280" cy="4937760"/>
-          </a:xfrm>
-          <a:prstGeom prst="roundRect">
-            <a:avLst/>
-          </a:prstGeom>
-          <a:solidFill>
-            <a:srgbClr val="18263E"/>
-          </a:solidFill>
-          <a:ln w="12700">
-            <a:solidFill>
-              <a:srgbClr val="2D4466"/>
-            </a:solidFill>
-          </a:ln>
-        </p:spPr>
-        <p:style>
-          <a:lnRef idx="1">
-            <a:schemeClr val="accent1"/>
-          </a:lnRef>
-          <a:fillRef idx="3">
-            <a:schemeClr val="accent1"/>
-          </a:fillRef>
-          <a:effectRef idx="2">
-            <a:schemeClr val="accent1"/>
-          </a:effectRef>
-          <a:fontRef idx="minor">
-            <a:schemeClr val="lt1"/>
-          </a:fontRef>
-        </p:style>
-        <p:txBody>
-          <a:bodyPr rtlCol="0" anchor="ctr" wrap="square"/>
-          <a:lstStyle/>
-          <a:p>
-            <a:pPr algn="ctr">
-              <a:spcAft>
-                <a:spcPts val="800"/>
-              </a:spcAft>
-              <a:defRPr sz="1100" b="1">
-                <a:solidFill>
-                  <a:srgbClr val="00D2EB"/>
-                </a:solidFill>
-              </a:defRPr>
-            </a:pPr>
-            <a:r>
-              <a:t>CRITICAL BPMN TERMINOLOGY CLARIFICATION</a:t>
-            </a:r>
-          </a:p>
-          <a:p>
-            <a:pPr>
-              <a:spcAft>
-                <a:spcPts val="800"/>
-              </a:spcAft>
-            </a:pPr>
-            <a:r>
-              <a:rPr b="1" sz="1000">
-                <a:solidFill>
-                  <a:srgbClr val="F8FAFC"/>
-                </a:solidFill>
-              </a:rPr>
-              <a:t>Happy Path vs Critical Path: </a:t>
-            </a:r>
-            <a:r>
-              <a:rPr sz="950">
-                <a:solidFill>
-                  <a:srgbClr val="94A3B8"/>
-                </a:solidFill>
-              </a:rPr>
-              <a:t>In academic workflow modelling, the 'Happy Path' describes the optimal successful business execution with zero rework or failures. It should NOT be confused with the mathematically calculated Critical Path Method (CPM).</a:t>
-            </a:r>
-          </a:p>
-          <a:p>
-            <a:pPr>
-              <a:spcAft>
-                <a:spcPts val="800"/>
-              </a:spcAft>
-            </a:pPr>
-            <a:r>
-              <a:rPr b="1" sz="1000">
-                <a:solidFill>
-                  <a:srgbClr val="F8FAFC"/>
-                </a:solidFill>
-              </a:rPr>
-              <a:t>Why CPM is Not Inferred: </a:t>
-            </a:r>
-            <a:r>
-              <a:rPr sz="950">
-                <a:solidFill>
-                  <a:srgbClr val="94A3B8"/>
-                </a:solidFill>
-              </a:rPr>
-              <a:t>CPM requires deterministic task duration distributions (earliest/latest start and slack). BPMN defines behavioral control-flow semantics. Inventing arbitrary durations without empirical log data is academically unsound.</a:t>
-            </a:r>
-          </a:p>
-          <a:p>
-            <a:pPr>
-              <a:spcAft>
-                <a:spcPts val="800"/>
-              </a:spcAft>
-            </a:pPr>
-            <a:r>
-              <a:rPr b="1" sz="1000">
-                <a:solidFill>
-                  <a:srgbClr val="F8FAFC"/>
-                </a:solidFill>
-              </a:rPr>
-              <a:t>Business-Critical Milestones: </a:t>
-            </a:r>
-            <a:r>
-              <a:rPr sz="950">
-                <a:solidFill>
-                  <a:srgbClr val="94A3B8"/>
-                </a:solidFill>
-              </a:rPr>
-              <a:t>1. Automated Verification Gate (all 3 parallel checks pass).
-2. Eligibility Adjudication (risk tier established).
-3. Customer Commitment (offer acceptance &amp; e-signature).
-4. Fund Disbursement &amp; Account Creation.</a:t>
-            </a:r>
-          </a:p>
-        </p:txBody>
-      </p:sp>
-    </p:spTree>
-  </p:cSld>
-  <p:clrMapOvr>
-    <a:masterClrMapping/>
-  </p:clrMapOvr>
-</p:sld>
-</file>
-
-<file path=ppt/slides/slide8.xml><?xml version="1.0" encoding="utf-8"?>
-<p:sld xmlns:a="http://schemas.openxmlformats.org/drawingml/2006/main" xmlns:p="http://schemas.openxmlformats.org/presentationml/2006/main" xmlns:r="http://schemas.openxmlformats.org/officeDocument/2006/relationships">
-  <p:cSld>
-    <p:spTree>
-      <p:nvGrpSpPr>
-        <p:cNvPr id="1" name=""/>
-        <p:cNvGrpSpPr/>
-        <p:nvPr/>
-      </p:nvGrpSpPr>
-      <p:grpSpPr/>
-      <p:sp>
-        <p:nvSpPr>
-          <p:cNvPr id="2" name="Rectangle 1"/>
-          <p:cNvSpPr/>
-          <p:nvPr/>
-        </p:nvSpPr>
-        <p:spPr>
-          <a:xfrm>
-            <a:off x="0" y="0"/>
-            <a:ext cx="12191695" cy="6858000"/>
-          </a:xfrm>
-          <a:prstGeom prst="rect">
-            <a:avLst/>
-          </a:prstGeom>
-          <a:solidFill>
-            <a:srgbClr val="0B192C"/>
-          </a:solidFill>
-          <a:ln>
-            <a:noFill/>
-          </a:ln>
-        </p:spPr>
-        <p:style>
-          <a:lnRef idx="1">
-            <a:schemeClr val="accent1"/>
-          </a:lnRef>
-          <a:fillRef idx="3">
-            <a:schemeClr val="accent1"/>
-          </a:fillRef>
-          <a:effectRef idx="2">
-            <a:schemeClr val="accent1"/>
-          </a:effectRef>
-          <a:fontRef idx="minor">
-            <a:schemeClr val="lt1"/>
-          </a:fontRef>
-        </p:style>
-        <p:txBody>
-          <a:bodyPr rtlCol="0" anchor="ctr"/>
-          <a:lstStyle/>
-          <a:p>
-            <a:pPr algn="ctr"/>
-          </a:p>
-        </p:txBody>
-      </p:sp>
-      <p:sp>
-        <p:nvSpPr>
-          <p:cNvPr id="3" name="Rounded Rectangle 2"/>
-          <p:cNvSpPr/>
-          <p:nvPr/>
-        </p:nvSpPr>
-        <p:spPr>
-          <a:xfrm>
-            <a:off x="731520" y="365760"/>
-            <a:ext cx="3108960" cy="292608"/>
-          </a:xfrm>
-          <a:prstGeom prst="roundRect">
-            <a:avLst/>
-          </a:prstGeom>
-          <a:solidFill>
-            <a:srgbClr val="18263E"/>
-          </a:solidFill>
-          <a:ln w="12700">
-            <a:solidFill>
-              <a:srgbClr val="00D2EB"/>
-            </a:solidFill>
-          </a:ln>
-        </p:spPr>
-        <p:style>
-          <a:lnRef idx="1">
-            <a:schemeClr val="accent1"/>
-          </a:lnRef>
-          <a:fillRef idx="3">
-            <a:schemeClr val="accent1"/>
-          </a:fillRef>
-          <a:effectRef idx="2">
-            <a:schemeClr val="accent1"/>
-          </a:effectRef>
-          <a:fontRef idx="minor">
-            <a:schemeClr val="lt1"/>
-          </a:fontRef>
-        </p:style>
-        <p:txBody>
-          <a:bodyPr rtlCol="0" anchor="ctr"/>
-          <a:lstStyle/>
-          <a:p>
-            <a:pPr algn="ctr">
-              <a:defRPr sz="950" b="1">
-                <a:solidFill>
-                  <a:srgbClr val="00D2EB"/>
-                </a:solidFill>
-                <a:latin typeface="Arial"/>
-              </a:defRPr>
-            </a:pPr>
-            <a:r>
-              <a:t>EXCEPTION REGISTER</a:t>
-            </a:r>
-          </a:p>
-        </p:txBody>
-      </p:sp>
-      <p:sp>
-        <p:nvSpPr>
-          <p:cNvPr id="4" name="TextBox 3"/>
-          <p:cNvSpPr txBox="1"/>
-          <p:nvPr/>
-        </p:nvSpPr>
-        <p:spPr>
-          <a:xfrm>
-            <a:off x="731520" y="713232"/>
-            <a:ext cx="10698480" cy="594360"/>
-          </a:xfrm>
-          <a:prstGeom prst="rect">
-            <a:avLst/>
-          </a:prstGeom>
-          <a:noFill/>
-        </p:spPr>
-        <p:txBody>
-          <a:bodyPr wrap="square">
-            <a:spAutoFit/>
-          </a:bodyPr>
-          <a:lstStyle/>
-          <a:p>
-            <a:pPr>
-              <a:defRPr sz="2200" b="1">
-                <a:solidFill>
-                  <a:srgbClr val="F8FAFC"/>
-                </a:solidFill>
-                <a:latin typeface="Arial"/>
-              </a:defRPr>
-            </a:pPr>
-            <a:r>
-              <a:t>Critical Failure Points Matrix (L1 – L6)</a:t>
+              <a:t>Failure Path Matrix: Question 1 (Student Project)</a:t>
             </a:r>
           </a:p>
         </p:txBody>
@@ -9747,12 +11008,12 @@
               </a:spcAft>
               <a:defRPr sz="1100" b="1">
                 <a:solidFill>
-                  <a:srgbClr val="F87171"/>
-                </a:solidFill>
-              </a:defRPr>
-            </a:pPr>
-            <a:r>
-              <a:t>MANDATORY FAILURE PATH REGISTER — AUTOMATED VERIFICATION PHASE</a:t>
+                  <a:srgbClr val="00D2EB"/>
+                </a:solidFill>
+              </a:defRPr>
+            </a:pPr>
+            <a:r>
+              <a:t>QUESTION 1 FAILURE PATH REGISTER (F1 – F6 HIGHLIGHTS)</a:t>
             </a:r>
           </a:p>
           <a:p>
@@ -9767,7 +11028,7 @@
                   <a:srgbClr val="00D2EB"/>
                 </a:solidFill>
               </a:rPr>
-              <a:t>[L1] Document Incompleteness: </a:t>
+              <a:t>[F1] Document Incompleteness: </a:t>
             </a:r>
             <a:r>
               <a:rPr sz="950">
@@ -9775,7 +11036,7 @@
                   <a:srgbClr val="94A3B8"/>
                 </a:solidFill>
               </a:rPr>
-              <a:t>Trigger: Missing Aadhaar/PAN, illegible bank statements, wrong PDF format. | </a:t>
+              <a:t>Trigger: Missing sections, absent signatures, wrong document format. | </a:t>
             </a:r>
             <a:r>
               <a:rPr sz="950">
@@ -9783,7 +11044,7 @@
                   <a:srgbClr val="F8FAFC"/>
                 </a:solidFill>
               </a:rPr>
-              <a:t>Detection: Service Task validation schema fails → Exclusive Gateway routes to 'Return Application'. | </a:t>
+              <a:t>Detection: Service Task validation schema fails → Exclusive Gateway routes to Coordinator. | </a:t>
             </a:r>
             <a:r>
               <a:rPr b="1" sz="950">
@@ -9791,7 +11052,7 @@
                   <a:srgbClr val="FB923C"/>
                 </a:solidFill>
               </a:rPr>
-              <a:t>Outcome: Correction Loop OR 'EndEvent: Application Lapsed'</a:t>
+              <a:t>Outcome: Correction Loop OR 'EndEvent: Invalid Proposal Returned'</a:t>
             </a:r>
           </a:p>
           <a:p>
@@ -9806,7 +11067,7 @@
                   <a:srgbClr val="00D2EB"/>
                 </a:solidFill>
               </a:rPr>
-              <a:t>[L2] KYC Identity Mismatch: </a:t>
+              <a:t>[F2] Team Rule Violation: </a:t>
             </a:r>
             <a:r>
               <a:rPr sz="950">
@@ -9814,7 +11075,7 @@
                   <a:srgbClr val="94A3B8"/>
                 </a:solidFill>
               </a:rPr>
-              <a:t>Trigger: Name misspelling, date of birth mismatch, expired ID document. | </a:t>
+              <a:t>Trigger: Team size below minimum, ineligible member, mixed-department rules. | </a:t>
             </a:r>
             <a:r>
               <a:rPr sz="950">
@@ -9822,7 +11083,7 @@
                   <a:srgbClr val="F8FAFC"/>
                 </a:solidFill>
               </a:rPr>
-              <a:t>Detection: KYC Service Task returns API error code → Exclusive Gateway branches to exception. | </a:t>
+              <a:t>Detection: Service Task validates rules → Exclusive Gateway branches to invalidation. | </a:t>
             </a:r>
             <a:r>
               <a:rPr b="1" sz="950">
@@ -9830,7 +11091,7 @@
                   <a:srgbClr val="FB923C"/>
                 </a:solidFill>
               </a:rPr>
-              <a:t>Outcome: Manual Clearance OR 'EndEvent: Fraud Terminated'</a:t>
+              <a:t>Outcome: Terminal 'EndEvent: Invalid Proposal Returned'</a:t>
             </a:r>
           </a:p>
           <a:p>
@@ -9845,7 +11106,7 @@
                   <a:srgbClr val="00D2EB"/>
                 </a:solidFill>
               </a:rPr>
-              <a:t>[L3] AML / Watchlist Flag: </a:t>
+              <a:t>[F3] Duplicate / Plagiarised Topic: </a:t>
             </a:r>
             <a:r>
               <a:rPr sz="950">
@@ -9853,7 +11114,7 @@
                   <a:srgbClr val="94A3B8"/>
                 </a:solidFill>
               </a:rPr>
-              <a:t>Trigger: Applicant name matches sanctioned individuals, PEP lists, or fraud DB. | </a:t>
+              <a:t>Trigger: Similarity engine detects ≥ 70% overlap with existing or past projects. | </a:t>
             </a:r>
             <a:r>
               <a:rPr sz="950">
@@ -9861,7 +11122,7 @@
                   <a:srgbClr val="F8FAFC"/>
                 </a:solidFill>
               </a:rPr>
-              <a:t>Detection: AML Service Task flags risk score ≥ threshold → Exclusive Gateway branches to probe. | </a:t>
+              <a:t>Detection: Service Task similarity API flags score → Exclusive Gateway routes to rejection. | </a:t>
             </a:r>
             <a:r>
               <a:rPr b="1" sz="950">
@@ -9869,7 +11130,7 @@
                   <a:srgbClr val="FB923C"/>
                 </a:solidFill>
               </a:rPr>
-              <a:t>Outcome: Terminal 'EndEvent: Application Terminated – Fraud/AML'</a:t>
+              <a:t>Outcome: Terminal 'EndEvent: Duplicate / Plagiarised Topic'</a:t>
             </a:r>
           </a:p>
           <a:p>
@@ -9884,7 +11145,7 @@
                   <a:srgbClr val="00D2EB"/>
                 </a:solidFill>
               </a:rPr>
-              <a:t>[L4] Credit Bureau Timeout: </a:t>
+              <a:t>[F4] Proposal Submission Lapsed: </a:t>
             </a:r>
             <a:r>
               <a:rPr sz="950">
@@ -9892,7 +11153,7 @@
                   <a:srgbClr val="94A3B8"/>
                 </a:solidFill>
               </a:rPr>
-              <a:t>Trigger: Credit bureau service unresponsive, network partition, timeout &gt; 24h. | </a:t>
+              <a:t>Trigger: Student team fails to submit proposal within the 14-day departmental window. | </a:t>
             </a:r>
             <a:r>
               <a:rPr sz="950">
@@ -9900,7 +11161,7 @@
                   <a:srgbClr val="F8FAFC"/>
                 </a:solidFill>
               </a:rPr>
-              <a:t>Detection: Non-interrupting Timer Boundary Event (24h) fires on outbound request task. | </a:t>
+              <a:t>Detection: Interrupting Timer Boundary Event (14 days) fires on submission task. | </a:t>
             </a:r>
             <a:r>
               <a:rPr b="1" sz="950">
@@ -9908,7 +11169,7 @@
                   <a:srgbClr val="FB923C"/>
                 </a:solidFill>
               </a:rPr>
-              <a:t>Outcome: Resilient Catch on retry OR manual credit assessment fallback</a:t>
+              <a:t>Outcome: Terminal 'EndEvent: Proposal Lapsed'</a:t>
             </a:r>
           </a:p>
           <a:p>
@@ -9923,7 +11184,7 @@
                   <a:srgbClr val="00D2EB"/>
                 </a:solidFill>
               </a:rPr>
-              <a:t>[L5] Credit Score Rejection: </a:t>
+              <a:t>[F5] Committee Revision Request: </a:t>
             </a:r>
             <a:r>
               <a:rPr sz="950">
@@ -9931,7 +11192,7 @@
                   <a:srgbClr val="94A3B8"/>
                 </a:solidFill>
               </a:rPr>
-              <a:t>Trigger: Report returns credit bureau score below minimum underwriting floor (&lt; 600). | </a:t>
+              <a:t>Trigger: Committee finds proposal technically weak or overly broad, but salvageable. | </a:t>
             </a:r>
             <a:r>
               <a:rPr sz="950">
@@ -9939,7 +11200,7 @@
                   <a:srgbClr val="F8FAFC"/>
                 </a:solidFill>
               </a:rPr>
-              <a:t>Detection: Credit Bureau gateway evaluates score; feeds failed attribute into parallel join. | </a:t>
+              <a:t>Detection: Exclusive Gateway on committee decision selects 'Requires Revision' branch. | </a:t>
             </a:r>
             <a:r>
               <a:rPr b="1" sz="950">
@@ -9947,7 +11208,7 @@
                   <a:srgbClr val="FB923C"/>
                 </a:solidFill>
               </a:rPr>
-              <a:t>Outcome: Terminal 'EndEvent: Loan Rejected – Low Credit Score'</a:t>
+              <a:t>Outcome: Revision Loop back to Similarity Check OR Withdrawal</a:t>
             </a:r>
           </a:p>
           <a:p>
@@ -9962,7 +11223,7 @@
                   <a:srgbClr val="00D2EB"/>
                 </a:solidFill>
               </a:rPr>
-              <a:t>[L6] Excessive DTI Ratio: </a:t>
+              <a:t>[F6] Committee Rejection: </a:t>
             </a:r>
             <a:r>
               <a:rPr sz="950">
@@ -9970,7 +11231,7 @@
                   <a:srgbClr val="94A3B8"/>
                 </a:solidFill>
               </a:rPr>
-              <a:t>Trigger: Applicant liabilities result in debt-to-income ratio exceeding 50% limit. | </a:t>
+              <a:t>Trigger: Proposal judged academically infeasible, out of scope, or non-viable. | </a:t>
             </a:r>
             <a:r>
               <a:rPr sz="950">
@@ -9978,7 +11239,7 @@
                   <a:srgbClr val="F8FAFC"/>
                 </a:solidFill>
               </a:rPr>
-              <a:t>Detection: Automated DTI Service Task computes ratio &gt; threshold → Exclusive Gateway routes to reject. | </a:t>
+              <a:t>Detection: Exclusive Gateway on committee decision selects 'Rejected' branch. | </a:t>
             </a:r>
             <a:r>
               <a:rPr b="1" sz="950">
@@ -9986,437 +11247,7 @@
                   <a:srgbClr val="FB923C"/>
                 </a:solidFill>
               </a:rPr>
-              <a:t>Outcome: Terminal 'EndEvent: Loan Rejected – Excessive DTI'</a:t>
-            </a:r>
-          </a:p>
-        </p:txBody>
-      </p:sp>
-    </p:spTree>
-  </p:cSld>
-  <p:clrMapOvr>
-    <a:masterClrMapping/>
-  </p:clrMapOvr>
-</p:sld>
-</file>
-
-<file path=ppt/slides/slide9.xml><?xml version="1.0" encoding="utf-8"?>
-<p:sld xmlns:a="http://schemas.openxmlformats.org/drawingml/2006/main" xmlns:p="http://schemas.openxmlformats.org/presentationml/2006/main" xmlns:r="http://schemas.openxmlformats.org/officeDocument/2006/relationships">
-  <p:cSld>
-    <p:spTree>
-      <p:nvGrpSpPr>
-        <p:cNvPr id="1" name=""/>
-        <p:cNvGrpSpPr/>
-        <p:nvPr/>
-      </p:nvGrpSpPr>
-      <p:grpSpPr/>
-      <p:sp>
-        <p:nvSpPr>
-          <p:cNvPr id="2" name="Rectangle 1"/>
-          <p:cNvSpPr/>
-          <p:nvPr/>
-        </p:nvSpPr>
-        <p:spPr>
-          <a:xfrm>
-            <a:off x="0" y="0"/>
-            <a:ext cx="12191695" cy="6858000"/>
-          </a:xfrm>
-          <a:prstGeom prst="rect">
-            <a:avLst/>
-          </a:prstGeom>
-          <a:solidFill>
-            <a:srgbClr val="0B192C"/>
-          </a:solidFill>
-          <a:ln>
-            <a:noFill/>
-          </a:ln>
-        </p:spPr>
-        <p:style>
-          <a:lnRef idx="1">
-            <a:schemeClr val="accent1"/>
-          </a:lnRef>
-          <a:fillRef idx="3">
-            <a:schemeClr val="accent1"/>
-          </a:fillRef>
-          <a:effectRef idx="2">
-            <a:schemeClr val="accent1"/>
-          </a:effectRef>
-          <a:fontRef idx="minor">
-            <a:schemeClr val="lt1"/>
-          </a:fontRef>
-        </p:style>
-        <p:txBody>
-          <a:bodyPr rtlCol="0" anchor="ctr"/>
-          <a:lstStyle/>
-          <a:p>
-            <a:pPr algn="ctr"/>
-          </a:p>
-        </p:txBody>
-      </p:sp>
-      <p:sp>
-        <p:nvSpPr>
-          <p:cNvPr id="3" name="Rounded Rectangle 2"/>
-          <p:cNvSpPr/>
-          <p:nvPr/>
-        </p:nvSpPr>
-        <p:spPr>
-          <a:xfrm>
-            <a:off x="731520" y="365760"/>
-            <a:ext cx="3108960" cy="292608"/>
-          </a:xfrm>
-          <a:prstGeom prst="roundRect">
-            <a:avLst/>
-          </a:prstGeom>
-          <a:solidFill>
-            <a:srgbClr val="18263E"/>
-          </a:solidFill>
-          <a:ln w="12700">
-            <a:solidFill>
-              <a:srgbClr val="00D2EB"/>
-            </a:solidFill>
-          </a:ln>
-        </p:spPr>
-        <p:style>
-          <a:lnRef idx="1">
-            <a:schemeClr val="accent1"/>
-          </a:lnRef>
-          <a:fillRef idx="3">
-            <a:schemeClr val="accent1"/>
-          </a:fillRef>
-          <a:effectRef idx="2">
-            <a:schemeClr val="accent1"/>
-          </a:effectRef>
-          <a:fontRef idx="minor">
-            <a:schemeClr val="lt1"/>
-          </a:fontRef>
-        </p:style>
-        <p:txBody>
-          <a:bodyPr rtlCol="0" anchor="ctr"/>
-          <a:lstStyle/>
-          <a:p>
-            <a:pPr algn="ctr">
-              <a:defRPr sz="950" b="1">
-                <a:solidFill>
-                  <a:srgbClr val="00D2EB"/>
-                </a:solidFill>
-                <a:latin typeface="Arial"/>
-              </a:defRPr>
-            </a:pPr>
-            <a:r>
-              <a:t>BRANCHING LOGIC</a:t>
-            </a:r>
-          </a:p>
-        </p:txBody>
-      </p:sp>
-      <p:sp>
-        <p:nvSpPr>
-          <p:cNvPr id="4" name="TextBox 3"/>
-          <p:cNvSpPr txBox="1"/>
-          <p:nvPr/>
-        </p:nvSpPr>
-        <p:spPr>
-          <a:xfrm>
-            <a:off x="731520" y="713232"/>
-            <a:ext cx="10698480" cy="594360"/>
-          </a:xfrm>
-          <a:prstGeom prst="rect">
-            <a:avLst/>
-          </a:prstGeom>
-          <a:noFill/>
-        </p:spPr>
-        <p:txBody>
-          <a:bodyPr wrap="square">
-            <a:spAutoFit/>
-          </a:bodyPr>
-          <a:lstStyle/>
-          <a:p>
-            <a:pPr>
-              <a:defRPr sz="2200" b="1">
-                <a:solidFill>
-                  <a:srgbClr val="F8FAFC"/>
-                </a:solidFill>
-                <a:latin typeface="Arial"/>
-              </a:defRPr>
-            </a:pPr>
-            <a:r>
-              <a:t>Alternate &amp; Exception Paths (L7 – L12)</a:t>
-            </a:r>
-          </a:p>
-        </p:txBody>
-      </p:sp>
-      <p:sp>
-        <p:nvSpPr>
-          <p:cNvPr id="5" name="Rounded Rectangle 4"/>
-          <p:cNvSpPr/>
-          <p:nvPr/>
-        </p:nvSpPr>
-        <p:spPr>
-          <a:xfrm>
-            <a:off x="731520" y="1371600"/>
-            <a:ext cx="5212080" cy="4937760"/>
-          </a:xfrm>
-          <a:prstGeom prst="roundRect">
-            <a:avLst/>
-          </a:prstGeom>
-          <a:solidFill>
-            <a:srgbClr val="18263E"/>
-          </a:solidFill>
-          <a:ln w="12700">
-            <a:solidFill>
-              <a:srgbClr val="2D4466"/>
-            </a:solidFill>
-          </a:ln>
-        </p:spPr>
-        <p:style>
-          <a:lnRef idx="1">
-            <a:schemeClr val="accent1"/>
-          </a:lnRef>
-          <a:fillRef idx="3">
-            <a:schemeClr val="accent1"/>
-          </a:fillRef>
-          <a:effectRef idx="2">
-            <a:schemeClr val="accent1"/>
-          </a:effectRef>
-          <a:fontRef idx="minor">
-            <a:schemeClr val="lt1"/>
-          </a:fontRef>
-        </p:style>
-        <p:txBody>
-          <a:bodyPr rtlCol="0" anchor="ctr" wrap="square"/>
-          <a:lstStyle/>
-          <a:p>
-            <a:pPr algn="ctr">
-              <a:spcAft>
-                <a:spcPts val="800"/>
-              </a:spcAft>
-              <a:defRPr sz="1100" b="1">
-                <a:solidFill>
-                  <a:srgbClr val="00D2EB"/>
-                </a:solidFill>
-              </a:defRPr>
-            </a:pPr>
-            <a:r>
-              <a:t>UNDERWRITER ADJUDICATION &amp; COLLATERAL LOOP (L7 &amp; L8)</a:t>
-            </a:r>
-          </a:p>
-          <a:p>
-            <a:pPr>
-              <a:spcAft>
-                <a:spcPts val="800"/>
-              </a:spcAft>
-            </a:pPr>
-            <a:r>
-              <a:rPr b="1" sz="1000">
-                <a:solidFill>
-                  <a:srgbClr val="F8FAFC"/>
-                </a:solidFill>
-              </a:rPr>
-              <a:t>Borderline Risk Scoring (L7): </a:t>
-            </a:r>
-            <a:r>
-              <a:rPr sz="950">
-                <a:solidFill>
-                  <a:srgbClr val="94A3B8"/>
-                </a:solidFill>
-              </a:rPr>
-              <a:t>When eligibility scoring falls into the 600–749 range or loan amount exceeds policy caps, the Exclusive Gateway diverts the application away from auto-approval to 'Underwriter Full Manual Review'.</a:t>
-            </a:r>
-          </a:p>
-          <a:p>
-            <a:pPr>
-              <a:spcAft>
-                <a:spcPts val="800"/>
-              </a:spcAft>
-            </a:pPr>
-            <a:r>
-              <a:rPr b="1" sz="1000">
-                <a:solidFill>
-                  <a:srgbClr val="F8FAFC"/>
-                </a:solidFill>
-              </a:rPr>
-              <a:t>Underwriter Three-Way Branch: </a:t>
-            </a:r>
-            <a:r>
-              <a:rPr sz="950">
-                <a:solidFill>
-                  <a:srgbClr val="94A3B8"/>
-                </a:solidFill>
-              </a:rPr>
-              <a:t>The underwriter has three mutually exclusive outcomes:
-• Approve: overrides risk tier, proceeds to offer generation.
-• Require Collateral: triggers secured asset evaluation (L8).
-• Reject: terminates flow to 'EndEvent: Loan Rejected'.</a:t>
-            </a:r>
-          </a:p>
-          <a:p>
-            <a:pPr>
-              <a:spcAft>
-                <a:spcPts val="800"/>
-              </a:spcAft>
-            </a:pPr>
-            <a:r>
-              <a:rPr b="1" sz="1000">
-                <a:solidFill>
-                  <a:srgbClr val="F8FAFC"/>
-                </a:solidFill>
-              </a:rPr>
-              <a:t>Collateral Valuation &amp; Re-underwrite Loop (L8): </a:t>
-            </a:r>
-            <a:r>
-              <a:rPr sz="950">
-                <a:solidFill>
-                  <a:srgbClr val="94A3B8"/>
-                </a:solidFill>
-              </a:rPr>
-              <a:t>If collateral is required, a User Task requests an appraiser valuation. An Exclusive Gateway checks if Loan-to-Value (LTV) meets policy. If insufficient, 'Re-Underwrite' loops back to Underwriter Review with revised terms, avoiding premature rejection.</a:t>
-            </a:r>
-          </a:p>
-        </p:txBody>
-      </p:sp>
-      <p:sp>
-        <p:nvSpPr>
-          <p:cNvPr id="6" name="Rounded Rectangle 5"/>
-          <p:cNvSpPr/>
-          <p:nvPr/>
-        </p:nvSpPr>
-        <p:spPr>
-          <a:xfrm>
-            <a:off x="6217920" y="1371600"/>
-            <a:ext cx="5212080" cy="4937760"/>
-          </a:xfrm>
-          <a:prstGeom prst="roundRect">
-            <a:avLst/>
-          </a:prstGeom>
-          <a:solidFill>
-            <a:srgbClr val="18263E"/>
-          </a:solidFill>
-          <a:ln w="12700">
-            <a:solidFill>
-              <a:srgbClr val="2D4466"/>
-            </a:solidFill>
-          </a:ln>
-        </p:spPr>
-        <p:style>
-          <a:lnRef idx="1">
-            <a:schemeClr val="accent1"/>
-          </a:lnRef>
-          <a:fillRef idx="3">
-            <a:schemeClr val="accent1"/>
-          </a:fillRef>
-          <a:effectRef idx="2">
-            <a:schemeClr val="accent1"/>
-          </a:effectRef>
-          <a:fontRef idx="minor">
-            <a:schemeClr val="lt1"/>
-          </a:fontRef>
-        </p:style>
-        <p:txBody>
-          <a:bodyPr rtlCol="0" anchor="ctr" wrap="square"/>
-          <a:lstStyle/>
-          <a:p>
-            <a:pPr algn="ctr">
-              <a:spcAft>
-                <a:spcPts val="800"/>
-              </a:spcAft>
-              <a:defRPr sz="1100" b="1">
-                <a:solidFill>
-                  <a:srgbClr val="FB923C"/>
-                </a:solidFill>
-              </a:defRPr>
-            </a:pPr>
-            <a:r>
-              <a:t>OFFER EXPIRY, WITHDRAWAL &amp; DISBURSEMENT FAULTS (L9 – L12)</a:t>
-            </a:r>
-          </a:p>
-          <a:p>
-            <a:pPr>
-              <a:spcAft>
-                <a:spcPts val="800"/>
-              </a:spcAft>
-            </a:pPr>
-            <a:r>
-              <a:rPr b="1" sz="1000">
-                <a:solidFill>
-                  <a:srgbClr val="F8FAFC"/>
-                </a:solidFill>
-              </a:rPr>
-              <a:t>L9 Offer Acceptance Timeout: </a:t>
-            </a:r>
-            <a:r>
-              <a:rPr sz="950">
-                <a:solidFill>
-                  <a:srgbClr val="94A3B8"/>
-                </a:solidFill>
-              </a:rPr>
-              <a:t>An interrupting boundary timer on 'Review Loan Offer' fires after 7 days, immediately aborting the offer and routing to 'EndEvent: Loan Offer Expired'.</a:t>
-            </a:r>
-          </a:p>
-          <a:p>
-            <a:pPr>
-              <a:spcAft>
-                <a:spcPts val="800"/>
-              </a:spcAft>
-            </a:pPr>
-            <a:r>
-              <a:rPr b="1" sz="1000">
-                <a:solidFill>
-                  <a:srgbClr val="F8FAFC"/>
-                </a:solidFill>
-              </a:rPr>
-              <a:t>L10 Applicant Withdrawal / Negotiation: </a:t>
-            </a:r>
-            <a:r>
-              <a:rPr sz="950">
-                <a:solidFill>
-                  <a:srgbClr val="94A3B8"/>
-                </a:solidFill>
-              </a:rPr>
-              <a:t>Applicants can select 'Counter-Offer' (initiating negotiation with Loan Officer) or 'Withdraw Application' (routing to data archival and 'EndEvent: Application Withdrawn').</a:t>
-            </a:r>
-          </a:p>
-          <a:p>
-            <a:pPr>
-              <a:spcAft>
-                <a:spcPts val="800"/>
-              </a:spcAft>
-            </a:pPr>
-            <a:r>
-              <a:rPr b="1" sz="1000">
-                <a:solidFill>
-                  <a:srgbClr val="F8FAFC"/>
-                </a:solidFill>
-              </a:rPr>
-              <a:t>L11 E-Signature Latency: </a:t>
-            </a:r>
-            <a:r>
-              <a:rPr sz="950">
-                <a:solidFill>
-                  <a:srgbClr val="94A3B8"/>
-                </a:solidFill>
-              </a:rPr>
-              <a:t>A non-interrupting boundary timer (48h) triggers an Operations alert for wet-signature preparation without cancelling digital signing capability.</a:t>
-            </a:r>
-          </a:p>
-          <a:p>
-            <a:pPr>
-              <a:spcAft>
-                <a:spcPts val="800"/>
-              </a:spcAft>
-            </a:pPr>
-            <a:r>
-              <a:rPr b="1" sz="1000">
-                <a:solidFill>
-                  <a:srgbClr val="F8FAFC"/>
-                </a:solidFill>
-              </a:rPr>
-              <a:t>L12 Core Banking Disbursement Error: </a:t>
-            </a:r>
-            <a:r>
-              <a:rPr sz="950">
-                <a:solidFill>
-                  <a:srgbClr val="94A3B8"/>
-                </a:solidFill>
-              </a:rPr>
-              <a:t>An interrupting Error Boundary Event on 'Disburse Loan Funds' catches payment gateway / RTGS faults, preventing double-transfers and routing to Operations retry.</a:t>
+              <a:t>Outcome: Terminal 'EndEvent: Proposal Rejected'</a:t>
             </a:r>
           </a:p>
         </p:txBody>
